--- a/viva.pptx
+++ b/viva.pptx
@@ -4,6 +4,9 @@
   <p:sldMasterIdLst>
     <p:sldMasterId id="2147483648" r:id="rId1"/>
   </p:sldMasterIdLst>
+  <p:notesMasterIdLst>
+    <p:notesMasterId r:id="rId11"/>
+  </p:notesMasterIdLst>
   <p:sldIdLst>
     <p:sldId id="256" r:id="rId2"/>
     <p:sldId id="257" r:id="rId3"/>
@@ -15,9 +18,6 @@
     <p:sldId id="263" r:id="rId9"/>
     <p:sldId id="264" r:id="rId10"/>
   </p:sldIdLst>
-  <p:notesMasterIdLst>
-    <p:notesMasterId r:id="rId11"/>
-  </p:notesMasterIdLst>
   <p:sldSz cx="18288000" cy="10287000"/>
   <p:notesSz cx="10287000" cy="18288000"/>
   <p:defaultTextStyle>
@@ -112,6 +112,11 @@
       </a:defRPr>
     </a:lvl9pPr>
   </p:defaultTextStyle>
+  <p:extLst>
+    <p:ext uri="{EFAFB233-063F-42B5-8137-9DF3F51BA10A}">
+      <p15:sldGuideLst xmlns:p15="http://schemas.microsoft.com/office/powerpoint/2012/main"/>
+    </p:ext>
+  </p:extLst>
 </p:presentation>
 </file>
 
@@ -137,234 +142,10 @@
           <a:chExt cx="0" cy="0"/>
         </a:xfrm>
       </p:grpSpPr>
-      <p:sp>
-        <p:nvSpPr>
-          <p:cNvPr id="2" name="Header Placeholder 1"/>
-          <p:cNvSpPr>
-            <a:spLocks noGrp="1"/>
-          </p:cNvSpPr>
-          <p:nvPr>
-            <p:ph type="hdr" sz="quarter"/>
-          </p:nvPr>
-        </p:nvSpPr>
-        <p:spPr>
-          <a:xfrm>
-            <a:off x="0" y="0"/>
-            <a:ext cx="2971800" cy="458788"/>
-          </a:xfrm>
-          <a:prstGeom prst="rect">
-            <a:avLst/>
-          </a:prstGeom>
-        </p:spPr>
-        <p:txBody>
-          <a:bodyPr vert="horz" lIns="91440" tIns="45720" rIns="91440" bIns="45720" rtlCol="0"/>
-          <a:lstStyle>
-            <a:lvl1pPr algn="l">
-              <a:defRPr sz="1200"/>
-            </a:lvl1pPr>
-          </a:lstStyle>
-          <a:p>
-            <a:endParaRPr lang="en-US"/>
-          </a:p>
-        </p:txBody>
-      </p:sp>
-      <p:sp>
-        <p:nvSpPr>
-          <p:cNvPr id="3" name="Date Placeholder 2"/>
-          <p:cNvSpPr>
-            <a:spLocks noGrp="1"/>
-          </p:cNvSpPr>
-          <p:nvPr>
-            <p:ph type="dt" idx="1"/>
-          </p:nvPr>
-        </p:nvSpPr>
-        <p:spPr>
-          <a:xfrm>
-            <a:off x="3884613" y="0"/>
-            <a:ext cx="2971800" cy="458788"/>
-          </a:xfrm>
-          <a:prstGeom prst="rect">
-            <a:avLst/>
-          </a:prstGeom>
-        </p:spPr>
-        <p:txBody>
-          <a:bodyPr vert="horz" lIns="91440" tIns="45720" rIns="91440" bIns="45720" rtlCol="0"/>
-          <a:lstStyle>
-            <a:lvl1pPr algn="r">
-              <a:defRPr sz="1200"/>
-            </a:lvl1pPr>
-          </a:lstStyle>
-          <a:p>
-            <a:fld id="{5282F153-3F37-0F45-9E97-73ACFA13230C}" type="datetimeFigureOut">
-              <a:rPr lang="en-US"/>
-              <a:t>7/23/19</a:t>
-            </a:fld>
-            <a:endParaRPr lang="en-US"/>
-          </a:p>
-        </p:txBody>
-      </p:sp>
-      <p:sp>
-        <p:nvSpPr>
-          <p:cNvPr id="4" name="Slide Image Placeholder 3"/>
-          <p:cNvSpPr>
-            <a:spLocks noGrp="1" noRot="1" noChangeAspect="1"/>
-          </p:cNvSpPr>
-          <p:nvPr>
-            <p:ph type="sldImg" idx="2"/>
-          </p:nvPr>
-        </p:nvSpPr>
-        <p:spPr>
-          <a:xfrm>
-            <a:off x="685800" y="1143000"/>
-            <a:ext cx="5486400" cy="3086100"/>
-          </a:xfrm>
-          <a:prstGeom prst="rect">
-            <a:avLst/>
-          </a:prstGeom>
-          <a:noFill/>
-          <a:ln w="12700">
-            <a:solidFill>
-              <a:prstClr val="black"/>
-            </a:solidFill>
-          </a:ln>
-        </p:spPr>
-        <p:txBody>
-          <a:bodyPr vert="horz" lIns="91440" tIns="45720" rIns="91440" bIns="45720" rtlCol="0" anchor="ctr"/>
-          <a:lstStyle/>
-          <a:p>
-            <a:endParaRPr lang="en-US"/>
-          </a:p>
-        </p:txBody>
-      </p:sp>
-      <p:sp>
-        <p:nvSpPr>
-          <p:cNvPr id="5" name="Notes Placeholder 4"/>
-          <p:cNvSpPr>
-            <a:spLocks noGrp="1"/>
-          </p:cNvSpPr>
-          <p:nvPr>
-            <p:ph type="body" sz="quarter" idx="3"/>
-          </p:nvPr>
-        </p:nvSpPr>
-        <p:spPr>
-          <a:xfrm>
-            <a:off x="685800" y="4400550"/>
-            <a:ext cx="5486400" cy="3600450"/>
-          </a:xfrm>
-          <a:prstGeom prst="rect">
-            <a:avLst/>
-          </a:prstGeom>
-        </p:spPr>
-        <p:txBody>
-          <a:bodyPr vert="horz" lIns="91440" tIns="45720" rIns="91440" bIns="45720" rtlCol="0"/>
-          <a:lstStyle/>
-          <a:p>
-            <a:pPr lvl="0"/>
-            <a:r>
-              <a:rPr lang="en-US"/>
-              <a:t>Click to edit Master text styles</a:t>
-            </a:r>
-          </a:p>
-          <a:p>
-            <a:pPr lvl="1"/>
-            <a:r>
-              <a:rPr lang="en-US"/>
-              <a:t>Second level</a:t>
-            </a:r>
-          </a:p>
-          <a:p>
-            <a:pPr lvl="2"/>
-            <a:r>
-              <a:rPr lang="en-US"/>
-              <a:t>Third level</a:t>
-            </a:r>
-          </a:p>
-          <a:p>
-            <a:pPr lvl="3"/>
-            <a:r>
-              <a:rPr lang="en-US"/>
-              <a:t>Fourth level</a:t>
-            </a:r>
-          </a:p>
-          <a:p>
-            <a:pPr lvl="4"/>
-            <a:r>
-              <a:rPr lang="en-US"/>
-              <a:t>Fifth level</a:t>
-            </a:r>
-          </a:p>
-        </p:txBody>
-      </p:sp>
-      <p:sp>
-        <p:nvSpPr>
-          <p:cNvPr id="6" name="Footer Placeholder 5"/>
-          <p:cNvSpPr>
-            <a:spLocks noGrp="1"/>
-          </p:cNvSpPr>
-          <p:nvPr>
-            <p:ph type="ftr" sz="quarter" idx="4"/>
-          </p:nvPr>
-        </p:nvSpPr>
-        <p:spPr>
-          <a:xfrm>
-            <a:off x="0" y="8685213"/>
-            <a:ext cx="2971800" cy="458787"/>
-          </a:xfrm>
-          <a:prstGeom prst="rect">
-            <a:avLst/>
-          </a:prstGeom>
-        </p:spPr>
-        <p:txBody>
-          <a:bodyPr vert="horz" lIns="91440" tIns="45720" rIns="91440" bIns="45720" rtlCol="0" anchor="b"/>
-          <a:lstStyle>
-            <a:lvl1pPr algn="l">
-              <a:defRPr sz="1200"/>
-            </a:lvl1pPr>
-          </a:lstStyle>
-          <a:p>
-            <a:endParaRPr lang="en-US"/>
-          </a:p>
-        </p:txBody>
-      </p:sp>
-      <p:sp>
-        <p:nvSpPr>
-          <p:cNvPr id="7" name="Slide Number Placeholder 6"/>
-          <p:cNvSpPr>
-            <a:spLocks noGrp="1"/>
-          </p:cNvSpPr>
-          <p:nvPr>
-            <p:ph type="sldNum" sz="quarter" idx="5"/>
-          </p:nvPr>
-        </p:nvSpPr>
-        <p:spPr>
-          <a:xfrm>
-            <a:off x="3884613" y="8685213"/>
-            <a:ext cx="2971800" cy="458787"/>
-          </a:xfrm>
-          <a:prstGeom prst="rect">
-            <a:avLst/>
-          </a:prstGeom>
-        </p:spPr>
-        <p:txBody>
-          <a:bodyPr vert="horz" lIns="91440" tIns="45720" rIns="91440" bIns="45720" rtlCol="0" anchor="b"/>
-          <a:lstStyle>
-            <a:lvl1pPr algn="r">
-              <a:defRPr sz="1200"/>
-            </a:lvl1pPr>
-          </a:lstStyle>
-          <a:p>
-            <a:fld id="{CE5E9CC1-C706-0F49-92D6-E571CC5EEA8F}" type="slidenum">
-              <a:rPr lang="en-US"/>
-              <a:t>‹#›</a:t>
-            </a:fld>
-            <a:endParaRPr lang="en-US"/>
-          </a:p>
-        </p:txBody>
-      </p:sp>
     </p:spTree>
     <p:extLst>
       <p:ext uri="{BB962C8B-B14F-4D97-AF65-F5344CB8AC3E}">
-        <p14:creationId xmlns:p14="http://schemas.microsoft.com/office/powerpoint/2010/main" val="1024086991"/>
+        <p14:creationId xmlns:p14="http://schemas.microsoft.com/office/powerpoint/2010/main" val="362565950"/>
       </p:ext>
     </p:extLst>
   </p:cSld>
@@ -508,10 +289,6 @@
           <a:bodyPr/>
           <a:lstStyle/>
           <a:p>
-            <a:r>
-              <a:rPr lang="en-US" dirty="0"/>
-              <a:t/>
-            </a:r>
             <a:endParaRPr lang="en-US" dirty="0"/>
           </a:p>
         </p:txBody>
@@ -596,10 +373,6 @@
           <a:bodyPr/>
           <a:lstStyle/>
           <a:p>
-            <a:r>
-              <a:rPr lang="en-US" dirty="0"/>
-              <a:t/>
-            </a:r>
             <a:endParaRPr lang="en-US" dirty="0"/>
           </a:p>
         </p:txBody>
@@ -684,10 +457,6 @@
           <a:bodyPr/>
           <a:lstStyle/>
           <a:p>
-            <a:r>
-              <a:rPr lang="en-US" dirty="0"/>
-              <a:t/>
-            </a:r>
             <a:endParaRPr lang="en-US" dirty="0"/>
           </a:p>
         </p:txBody>
@@ -772,10 +541,6 @@
           <a:bodyPr/>
           <a:lstStyle/>
           <a:p>
-            <a:r>
-              <a:rPr lang="en-US" dirty="0"/>
-              <a:t/>
-            </a:r>
             <a:endParaRPr lang="en-US" dirty="0"/>
           </a:p>
         </p:txBody>
@@ -860,10 +625,6 @@
           <a:bodyPr/>
           <a:lstStyle/>
           <a:p>
-            <a:r>
-              <a:rPr lang="en-US" dirty="0"/>
-              <a:t/>
-            </a:r>
             <a:endParaRPr lang="en-US" dirty="0"/>
           </a:p>
         </p:txBody>
@@ -948,10 +709,6 @@
           <a:bodyPr/>
           <a:lstStyle/>
           <a:p>
-            <a:r>
-              <a:rPr lang="en-US" dirty="0"/>
-              <a:t/>
-            </a:r>
             <a:endParaRPr lang="en-US" dirty="0"/>
           </a:p>
         </p:txBody>
@@ -1036,10 +793,6 @@
           <a:bodyPr/>
           <a:lstStyle/>
           <a:p>
-            <a:r>
-              <a:rPr lang="en-US" dirty="0"/>
-              <a:t/>
-            </a:r>
             <a:endParaRPr lang="en-US" dirty="0"/>
           </a:p>
         </p:txBody>
@@ -1124,10 +877,6 @@
           <a:bodyPr/>
           <a:lstStyle/>
           <a:p>
-            <a:r>
-              <a:rPr lang="en-US" dirty="0"/>
-              <a:t/>
-            </a:r>
             <a:endParaRPr lang="en-US" dirty="0"/>
           </a:p>
         </p:txBody>
@@ -1212,10 +961,6 @@
           <a:bodyPr/>
           <a:lstStyle/>
           <a:p>
-            <a:r>
-              <a:rPr lang="en-US" dirty="0"/>
-              <a:t/>
-            </a:r>
             <a:endParaRPr lang="en-US" dirty="0"/>
           </a:p>
         </p:txBody>
@@ -1289,6 +1034,11 @@
 <file path=ppt/slideMasters/slideMaster1.xml><?xml version="1.0" encoding="utf-8"?>
 <p:sldMaster xmlns:a="http://schemas.openxmlformats.org/drawingml/2006/main" xmlns:r="http://schemas.openxmlformats.org/officeDocument/2006/relationships" xmlns:p="http://schemas.openxmlformats.org/presentationml/2006/main">
   <p:cSld>
+    <p:bg>
+      <p:bgRef idx="1001">
+        <a:schemeClr val="bg1"/>
+      </p:bgRef>
+    </p:bg>
     <p:spTree>
       <p:nvGrpSpPr>
         <p:cNvPr id="1" name=""/>
@@ -1571,6 +1321,7 @@
         <a:solidFill>
           <a:srgbClr val="161512"/>
         </a:solidFill>
+        <a:effectLst/>
       </p:bgPr>
     </p:bg>
     <p:spTree>
@@ -1606,6 +1357,13 @@
           </a:solidFill>
           <a:ln/>
         </p:spPr>
+        <p:txBody>
+          <a:bodyPr/>
+          <a:lstStyle/>
+          <a:p>
+            <a:endParaRPr lang="en-US"/>
+          </a:p>
+        </p:txBody>
       </p:sp>
       <p:sp>
         <p:nvSpPr>
@@ -1630,11 +1388,11 @@
           </a:bodyPr>
           <a:lstStyle/>
           <a:p>
-            <a:pPr algn="l" indent="0" marL="0">
-              <a:buNone/>
-            </a:pPr>
-            <a:r>
-              <a:rPr lang="en-US" sz="1350" b="1" spc="54" kern="0" dirty="0">
+            <a:pPr marL="0" indent="0" algn="l">
+              <a:buNone/>
+            </a:pPr>
+            <a:r>
+              <a:rPr lang="en-US" sz="1350" b="1" kern="0" spc="54" dirty="0">
                 <a:solidFill>
                   <a:srgbClr val="F6F3EC"/>
                 </a:solidFill>
@@ -1671,11 +1429,11 @@
           </a:bodyPr>
           <a:lstStyle/>
           <a:p>
-            <a:pPr algn="l" indent="0" marL="0">
-              <a:buNone/>
-            </a:pPr>
-            <a:r>
-              <a:rPr lang="en-US" sz="1350" spc="54" kern="0" dirty="0">
+            <a:pPr marL="0" indent="0" algn="l">
+              <a:buNone/>
+            </a:pPr>
+            <a:r>
+              <a:rPr lang="en-US" sz="1350" kern="0" spc="54" dirty="0">
                 <a:solidFill>
                   <a:srgbClr val="F6F3EC"/>
                 </a:solidFill>
@@ -1712,11 +1470,11 @@
           </a:bodyPr>
           <a:lstStyle/>
           <a:p>
-            <a:pPr algn="l" indent="0" marL="0">
-              <a:buNone/>
-            </a:pPr>
-            <a:r>
-              <a:rPr lang="en-US" sz="1350" spc="54" kern="0" dirty="0">
+            <a:pPr marL="0" indent="0" algn="l">
+              <a:buNone/>
+            </a:pPr>
+            <a:r>
+              <a:rPr lang="en-US" sz="1350" kern="0" spc="54" dirty="0">
                 <a:solidFill>
                   <a:srgbClr val="9C978C"/>
                 </a:solidFill>
@@ -1753,6 +1511,13 @@
             <a:prstDash val="solid"/>
           </a:ln>
         </p:spPr>
+        <p:txBody>
+          <a:bodyPr/>
+          <a:lstStyle/>
+          <a:p>
+            <a:endParaRPr lang="en-US"/>
+          </a:p>
+        </p:txBody>
       </p:sp>
       <p:sp>
         <p:nvSpPr>
@@ -1777,11 +1542,11 @@
           </a:bodyPr>
           <a:lstStyle/>
           <a:p>
-            <a:pPr algn="l" indent="0" marL="0">
-              <a:buNone/>
-            </a:pPr>
-            <a:r>
-              <a:rPr lang="en-US" sz="1125" spc="68" kern="0" dirty="0">
+            <a:pPr marL="0" indent="0" algn="l">
+              <a:buNone/>
+            </a:pPr>
+            <a:r>
+              <a:rPr lang="en-US" sz="1125" kern="0" spc="68" dirty="0">
                 <a:solidFill>
                   <a:srgbClr val="CBC6BC"/>
                 </a:solidFill>
@@ -1818,14 +1583,14 @@
           </a:bodyPr>
           <a:lstStyle/>
           <a:p>
-            <a:pPr algn="l" indent="0" marL="0">
+            <a:pPr marL="0" indent="0" algn="l">
               <a:lnSpc>
                 <a:spcPct val="118000"/>
               </a:lnSpc>
               <a:buNone/>
             </a:pPr>
             <a:r>
-              <a:rPr lang="en-US" sz="6300" spc="-126" kern="0" dirty="0">
+              <a:rPr lang="en-US" sz="6300" kern="0" spc="-126" dirty="0">
                 <a:solidFill>
                   <a:srgbClr val="F6F3EC"/>
                 </a:solidFill>
@@ -1835,14 +1600,8 @@
               </a:rPr>
               <a:t>Implementing &amp; empirically evaluating the </a:t>
             </a:r>
-            <a:pPr algn="l" indent="0" marL="0">
-              <a:lnSpc>
-                <a:spcPct val="118000"/>
-              </a:lnSpc>
-              <a:buNone/>
-            </a:pPr>
-            <a:r>
-              <a:rPr lang="en-US" sz="6300" i="1" spc="-126" kern="0" dirty="0">
+            <a:r>
+              <a:rPr lang="en-US" sz="6300" i="1" kern="0" spc="-126" dirty="0">
                 <a:solidFill>
                   <a:srgbClr val="A6A097"/>
                 </a:solidFill>
@@ -1852,14 +1611,8 @@
               </a:rPr>
               <a:t>Mixture-of-Superpositions </a:t>
             </a:r>
-            <a:pPr algn="l" indent="0" marL="0">
-              <a:lnSpc>
-                <a:spcPct val="118000"/>
-              </a:lnSpc>
-              <a:buNone/>
-            </a:pPr>
-            <a:r>
-              <a:rPr lang="en-US" sz="6300" spc="-126" kern="0" dirty="0">
+            <a:r>
+              <a:rPr lang="en-US" sz="6300" kern="0" spc="-126" dirty="0">
                 <a:solidFill>
                   <a:srgbClr val="F6F3EC"/>
                 </a:solidFill>
@@ -1869,14 +1622,8 @@
               </a:rPr>
               <a:t>-based protocol </a:t>
             </a:r>
-            <a:pPr algn="l" indent="0" marL="0">
-              <a:lnSpc>
-                <a:spcPct val="118000"/>
-              </a:lnSpc>
-              <a:buNone/>
-            </a:pPr>
-            <a:r>
-              <a:rPr lang="en-US" sz="6300" spc="-126" kern="0" dirty="0">
+            <a:r>
+              <a:rPr lang="en-US" sz="6300" kern="0" spc="-126" dirty="0">
                 <a:solidFill>
                   <a:srgbClr val="A6A097"/>
                 </a:solidFill>
@@ -1909,11 +1656,11 @@
         </p:spPr>
         <p:txBody>
           <a:bodyPr wrap="square" lIns="25400" tIns="25400" rIns="25400" bIns="25400" rtlCol="0" anchor="t">
-            <a:normAutofit/>
-          </a:bodyPr>
-          <a:lstStyle/>
-          <a:p>
-            <a:pPr algn="l" indent="0" marL="0">
+            <a:normAutofit fontScale="92500" lnSpcReduction="20000"/>
+          </a:bodyPr>
+          <a:lstStyle/>
+          <a:p>
+            <a:pPr marL="0" indent="0" algn="l">
               <a:lnSpc>
                 <a:spcPct val="142000"/>
               </a:lnSpc>
@@ -1930,12 +1677,6 @@
               </a:rPr>
               <a:t>The first concrete, end-to-end instantiation of the protocol of </a:t>
             </a:r>
-            <a:pPr algn="l" indent="0" marL="0">
-              <a:lnSpc>
-                <a:spcPct val="142000"/>
-              </a:lnSpc>
-              <a:buNone/>
-            </a:pPr>
             <a:r>
               <a:rPr lang="en-US" sz="1950" i="1" dirty="0">
                 <a:solidFill>
@@ -1947,12 +1688,6 @@
               </a:rPr>
               <a:t>Caro, Hinsche, Ioannou, Nietner &amp; Sweke (2024) </a:t>
             </a:r>
-            <a:pPr algn="l" indent="0" marL="0">
-              <a:lnSpc>
-                <a:spcPct val="142000"/>
-              </a:lnSpc>
-              <a:buNone/>
-            </a:pPr>
             <a:r>
               <a:rPr lang="en-US" sz="1950" dirty="0">
                 <a:solidFill>
@@ -1962,7 +1697,7 @@
                 <a:ea typeface="IBM Plex Serif" pitchFamily="34" charset="-122"/>
                 <a:cs typeface="IBM Plex Serif" pitchFamily="34" charset="-120"/>
               </a:rPr>
-              <a:t>, whose Theorem 12 establishes existence only asymptotically. Also the first empirical map of where it actually breaks.</a:t>
+              <a:t>, whose Theorem 12 establishes existence only asymptotically. Also, the first empirical map of where it actually breaks.</a:t>
             </a:r>
             <a:endParaRPr lang="en-US" sz="1950" dirty="0"/>
           </a:p>
@@ -1987,6 +1722,13 @@
           </a:solidFill>
           <a:ln/>
         </p:spPr>
+        <p:txBody>
+          <a:bodyPr/>
+          <a:lstStyle/>
+          <a:p>
+            <a:endParaRPr lang="en-US"/>
+          </a:p>
+        </p:txBody>
       </p:sp>
       <p:sp>
         <p:nvSpPr>
@@ -2011,11 +1753,11 @@
           </a:bodyPr>
           <a:lstStyle/>
           <a:p>
-            <a:pPr algn="l" indent="0" marL="0">
-              <a:buNone/>
-            </a:pPr>
-            <a:r>
-              <a:rPr lang="en-US" sz="1275" spc="51" kern="0" dirty="0">
+            <a:pPr marL="0" indent="0" algn="l">
+              <a:buNone/>
+            </a:pPr>
+            <a:r>
+              <a:rPr lang="en-US" sz="1275" kern="0" spc="51" dirty="0">
                 <a:solidFill>
                   <a:srgbClr val="9C978C"/>
                 </a:solidFill>
@@ -2052,11 +1794,11 @@
           </a:bodyPr>
           <a:lstStyle/>
           <a:p>
-            <a:pPr algn="l" indent="0" marL="0">
-              <a:buNone/>
-            </a:pPr>
-            <a:r>
-              <a:rPr lang="en-US" sz="1800" spc="48" kern="0" dirty="0">
+            <a:pPr marL="0" indent="0" algn="l">
+              <a:buNone/>
+            </a:pPr>
+            <a:r>
+              <a:rPr lang="en-US" sz="1800" kern="0" spc="48" dirty="0">
                 <a:solidFill>
                   <a:srgbClr val="F6F3EC"/>
                 </a:solidFill>
@@ -2066,11 +1808,8 @@
               </a:rPr>
               <a:t>Alex Do · </a:t>
             </a:r>
-            <a:pPr algn="l" indent="0" marL="0">
-              <a:buNone/>
-            </a:pPr>
-            <a:r>
-              <a:rPr lang="en-US" sz="1500" spc="48" kern="0" dirty="0">
+            <a:r>
+              <a:rPr lang="en-US" sz="1500" kern="0" spc="48" dirty="0">
                 <a:solidFill>
                   <a:srgbClr val="F6F3EC"/>
                 </a:solidFill>
@@ -2107,11 +1846,11 @@
           </a:bodyPr>
           <a:lstStyle/>
           <a:p>
-            <a:pPr algn="l" indent="0" marL="0">
-              <a:buNone/>
-            </a:pPr>
-            <a:r>
-              <a:rPr lang="en-US" sz="1275" spc="51" kern="0" dirty="0">
+            <a:pPr marL="0" indent="0" algn="l">
+              <a:buNone/>
+            </a:pPr>
+            <a:r>
+              <a:rPr lang="en-US" sz="1275" kern="0" spc="51" dirty="0">
                 <a:solidFill>
                   <a:srgbClr val="9C978C"/>
                 </a:solidFill>
@@ -2144,15 +1883,15 @@
         </p:spPr>
         <p:txBody>
           <a:bodyPr wrap="square" lIns="25400" tIns="25400" rIns="25400" bIns="25400" rtlCol="0" anchor="t">
-            <a:normAutofit/>
-          </a:bodyPr>
-          <a:lstStyle/>
-          <a:p>
-            <a:pPr algn="l" indent="0" marL="0">
-              <a:buNone/>
-            </a:pPr>
-            <a:r>
-              <a:rPr lang="en-US" sz="1800" spc="48" kern="0" dirty="0">
+            <a:normAutofit fontScale="92500"/>
+          </a:bodyPr>
+          <a:lstStyle/>
+          <a:p>
+            <a:pPr marL="0" indent="0" algn="l">
+              <a:buNone/>
+            </a:pPr>
+            <a:r>
+              <a:rPr lang="en-US" sz="1800" kern="0" spc="48" dirty="0">
                 <a:solidFill>
                   <a:srgbClr val="F6F3EC"/>
                 </a:solidFill>
@@ -2189,11 +1928,11 @@
           </a:bodyPr>
           <a:lstStyle/>
           <a:p>
-            <a:pPr algn="l" indent="0" marL="0">
-              <a:buNone/>
-            </a:pPr>
-            <a:r>
-              <a:rPr lang="en-US" sz="1275" spc="51" kern="0" dirty="0">
+            <a:pPr marL="0" indent="0" algn="l">
+              <a:buNone/>
+            </a:pPr>
+            <a:r>
+              <a:rPr lang="en-US" sz="1275" kern="0" spc="51" dirty="0">
                 <a:solidFill>
                   <a:srgbClr val="9C978C"/>
                 </a:solidFill>
@@ -2226,15 +1965,15 @@
         </p:spPr>
         <p:txBody>
           <a:bodyPr wrap="square" lIns="25400" tIns="25400" rIns="25400" bIns="25400" rtlCol="0" anchor="t">
-            <a:normAutofit/>
-          </a:bodyPr>
-          <a:lstStyle/>
-          <a:p>
-            <a:pPr algn="l" indent="0" marL="0">
-              <a:buNone/>
-            </a:pPr>
-            <a:r>
-              <a:rPr lang="en-US" sz="1800" spc="48" kern="0" dirty="0">
+            <a:normAutofit fontScale="92500"/>
+          </a:bodyPr>
+          <a:lstStyle/>
+          <a:p>
+            <a:pPr marL="0" indent="0" algn="l">
+              <a:buNone/>
+            </a:pPr>
+            <a:r>
+              <a:rPr lang="en-US" sz="1800" kern="0" spc="48" dirty="0">
                 <a:solidFill>
                   <a:srgbClr val="F6F3EC"/>
                 </a:solidFill>
@@ -2271,11 +2010,11 @@
           </a:bodyPr>
           <a:lstStyle/>
           <a:p>
-            <a:pPr algn="l" indent="0" marL="0">
-              <a:buNone/>
-            </a:pPr>
-            <a:r>
-              <a:rPr lang="en-US" sz="1200" spc="48" kern="0" dirty="0">
+            <a:pPr marL="0" indent="0" algn="l">
+              <a:buNone/>
+            </a:pPr>
+            <a:r>
+              <a:rPr lang="en-US" sz="1200" kern="0" spc="48" dirty="0">
                 <a:solidFill>
                   <a:srgbClr val="9C978C"/>
                 </a:solidFill>
@@ -2305,6 +2044,7 @@
         <a:solidFill>
           <a:srgbClr val="F6F3EC"/>
         </a:solidFill>
+        <a:effectLst/>
       </p:bgPr>
     </p:bg>
     <p:spTree>
@@ -2340,6 +2080,13 @@
           </a:solidFill>
           <a:ln/>
         </p:spPr>
+        <p:txBody>
+          <a:bodyPr/>
+          <a:lstStyle/>
+          <a:p>
+            <a:endParaRPr lang="en-US"/>
+          </a:p>
+        </p:txBody>
       </p:sp>
       <p:sp>
         <p:nvSpPr>
@@ -2364,11 +2111,11 @@
           </a:bodyPr>
           <a:lstStyle/>
           <a:p>
-            <a:pPr algn="l" indent="0" marL="0">
-              <a:buNone/>
-            </a:pPr>
-            <a:r>
-              <a:rPr lang="en-US" sz="1350" b="1" spc="54" kern="0" dirty="0">
+            <a:pPr marL="0" indent="0" algn="l">
+              <a:buNone/>
+            </a:pPr>
+            <a:r>
+              <a:rPr lang="en-US" sz="1350" b="1" kern="0" spc="54" dirty="0">
                 <a:solidFill>
                   <a:srgbClr val="161512"/>
                 </a:solidFill>
@@ -2405,11 +2152,11 @@
           </a:bodyPr>
           <a:lstStyle/>
           <a:p>
-            <a:pPr algn="l" indent="0" marL="0">
-              <a:buNone/>
-            </a:pPr>
-            <a:r>
-              <a:rPr lang="en-US" sz="1350" spc="54" kern="0" dirty="0">
+            <a:pPr marL="0" indent="0" algn="l">
+              <a:buNone/>
+            </a:pPr>
+            <a:r>
+              <a:rPr lang="en-US" sz="1350" kern="0" spc="54" dirty="0">
                 <a:solidFill>
                   <a:srgbClr val="3A3733"/>
                 </a:solidFill>
@@ -2442,18 +2189,18 @@
         </p:spPr>
         <p:txBody>
           <a:bodyPr wrap="square" lIns="25400" tIns="25400" rIns="25400" bIns="25400" rtlCol="0" anchor="t">
-            <a:normAutofit/>
-          </a:bodyPr>
-          <a:lstStyle/>
-          <a:p>
-            <a:pPr algn="l" indent="0" marL="0">
+            <a:normAutofit fontScale="92500" lnSpcReduction="10000"/>
+          </a:bodyPr>
+          <a:lstStyle/>
+          <a:p>
+            <a:pPr marL="0" indent="0" algn="l">
               <a:lnSpc>
                 <a:spcPct val="112000"/>
               </a:lnSpc>
               <a:buNone/>
             </a:pPr>
             <a:r>
-              <a:rPr lang="en-US" sz="3900" spc="-58" kern="0" dirty="0">
+              <a:rPr lang="en-US" sz="3900" kern="0" spc="-58" dirty="0">
                 <a:solidFill>
                   <a:srgbClr val="161512"/>
                 </a:solidFill>
@@ -2486,6 +2233,13 @@
           </a:solidFill>
           <a:ln/>
         </p:spPr>
+        <p:txBody>
+          <a:bodyPr/>
+          <a:lstStyle/>
+          <a:p>
+            <a:endParaRPr lang="en-US"/>
+          </a:p>
+        </p:txBody>
       </p:sp>
       <p:sp>
         <p:nvSpPr>
@@ -2495,8 +2249,8 @@
         </p:nvSpPr>
         <p:spPr>
           <a:xfrm>
-            <a:off x="914400" y="2007245"/>
-            <a:ext cx="1503462" cy="285750"/>
+            <a:off x="914400" y="2007244"/>
+            <a:ext cx="1718742" cy="295273"/>
           </a:xfrm>
           <a:prstGeom prst="rect">
             <a:avLst/>
@@ -2510,11 +2264,11 @@
           </a:bodyPr>
           <a:lstStyle/>
           <a:p>
-            <a:pPr algn="l" indent="0" marL="0">
-              <a:buNone/>
-            </a:pPr>
-            <a:r>
-              <a:rPr lang="en-US" sz="1500" b="1" spc="90" kern="0" dirty="0">
+            <a:pPr marL="0" indent="0" algn="l">
+              <a:buNone/>
+            </a:pPr>
+            <a:r>
+              <a:rPr lang="en-US" sz="1500" b="1" kern="0" spc="90" dirty="0">
                 <a:solidFill>
                   <a:srgbClr val="161512"/>
                 </a:solidFill>
@@ -2551,11 +2305,11 @@
           </a:bodyPr>
           <a:lstStyle/>
           <a:p>
-            <a:pPr algn="r" indent="0" marL="0">
-              <a:buNone/>
-            </a:pPr>
-            <a:r>
-              <a:rPr lang="en-US" sz="1350" spc="27" kern="0" dirty="0">
+            <a:pPr marL="0" indent="0" algn="r">
+              <a:buNone/>
+            </a:pPr>
+            <a:r>
+              <a:rPr lang="en-US" sz="1350" kern="0" spc="27" dirty="0">
                 <a:solidFill>
                   <a:srgbClr val="75716A"/>
                 </a:solidFill>
@@ -2588,6 +2342,13 @@
           </a:solidFill>
           <a:ln/>
         </p:spPr>
+        <p:txBody>
+          <a:bodyPr/>
+          <a:lstStyle/>
+          <a:p>
+            <a:endParaRPr lang="en-US"/>
+          </a:p>
+        </p:txBody>
       </p:sp>
       <p:sp>
         <p:nvSpPr>
@@ -2608,15 +2369,15 @@
         </p:spPr>
         <p:txBody>
           <a:bodyPr wrap="square" lIns="25400" tIns="25400" rIns="25400" bIns="25400" rtlCol="0" anchor="ctr">
-            <a:normAutofit/>
-          </a:bodyPr>
-          <a:lstStyle/>
-          <a:p>
-            <a:pPr algn="l" indent="0" marL="0">
-              <a:buNone/>
-            </a:pPr>
-            <a:r>
-              <a:rPr lang="en-US" sz="1125" spc="68" kern="0" dirty="0">
+            <a:normAutofit lnSpcReduction="10000"/>
+          </a:bodyPr>
+          <a:lstStyle/>
+          <a:p>
+            <a:pPr marL="0" indent="0" algn="l">
+              <a:buNone/>
+            </a:pPr>
+            <a:r>
+              <a:rPr lang="en-US" sz="1125" kern="0" spc="68" dirty="0">
                 <a:solidFill>
                   <a:srgbClr val="75716A"/>
                 </a:solidFill>
@@ -2649,6 +2410,13 @@
           </a:solidFill>
           <a:ln/>
         </p:spPr>
+        <p:txBody>
+          <a:bodyPr/>
+          <a:lstStyle/>
+          <a:p>
+            <a:endParaRPr lang="en-US"/>
+          </a:p>
+        </p:txBody>
       </p:sp>
       <p:sp>
         <p:nvSpPr>
@@ -2669,15 +2437,15 @@
         </p:spPr>
         <p:txBody>
           <a:bodyPr wrap="square" lIns="25400" tIns="25400" rIns="25400" bIns="25400" rtlCol="0" anchor="ctr">
-            <a:normAutofit/>
-          </a:bodyPr>
-          <a:lstStyle/>
-          <a:p>
-            <a:pPr algn="l" indent="0" marL="0">
-              <a:buNone/>
-            </a:pPr>
-            <a:r>
-              <a:rPr lang="en-US" sz="1125" spc="68" kern="0" dirty="0">
+            <a:normAutofit lnSpcReduction="10000"/>
+          </a:bodyPr>
+          <a:lstStyle/>
+          <a:p>
+            <a:pPr marL="0" indent="0" algn="l">
+              <a:buNone/>
+            </a:pPr>
+            <a:r>
+              <a:rPr lang="en-US" sz="1125" kern="0" spc="68" dirty="0">
                 <a:solidFill>
                   <a:srgbClr val="75716A"/>
                 </a:solidFill>
@@ -2710,6 +2478,13 @@
           </a:solidFill>
           <a:ln/>
         </p:spPr>
+        <p:txBody>
+          <a:bodyPr/>
+          <a:lstStyle/>
+          <a:p>
+            <a:endParaRPr lang="en-US"/>
+          </a:p>
+        </p:txBody>
       </p:sp>
       <p:sp>
         <p:nvSpPr>
@@ -2730,15 +2505,15 @@
         </p:spPr>
         <p:txBody>
           <a:bodyPr wrap="square" lIns="25400" tIns="25400" rIns="25400" bIns="25400" rtlCol="0" anchor="ctr">
-            <a:normAutofit/>
-          </a:bodyPr>
-          <a:lstStyle/>
-          <a:p>
-            <a:pPr algn="l" indent="0" marL="0">
-              <a:buNone/>
-            </a:pPr>
-            <a:r>
-              <a:rPr lang="en-US" sz="1125" spc="68" kern="0" dirty="0">
+            <a:normAutofit lnSpcReduction="10000"/>
+          </a:bodyPr>
+          <a:lstStyle/>
+          <a:p>
+            <a:pPr marL="0" indent="0" algn="l">
+              <a:buNone/>
+            </a:pPr>
+            <a:r>
+              <a:rPr lang="en-US" sz="1125" kern="0" spc="68" dirty="0">
                 <a:solidFill>
                   <a:srgbClr val="75716A"/>
                 </a:solidFill>
@@ -2771,6 +2546,13 @@
           </a:solidFill>
           <a:ln/>
         </p:spPr>
+        <p:txBody>
+          <a:bodyPr/>
+          <a:lstStyle/>
+          <a:p>
+            <a:endParaRPr lang="en-US"/>
+          </a:p>
+        </p:txBody>
       </p:sp>
       <p:sp>
         <p:nvSpPr>
@@ -2795,7 +2577,7 @@
           </a:bodyPr>
           <a:lstStyle/>
           <a:p>
-            <a:pPr algn="l" indent="0" marL="0">
+            <a:pPr marL="0" indent="0" algn="l">
               <a:buNone/>
             </a:pPr>
             <a:r>
@@ -2832,6 +2614,13 @@
           </a:solidFill>
           <a:ln/>
         </p:spPr>
+        <p:txBody>
+          <a:bodyPr/>
+          <a:lstStyle/>
+          <a:p>
+            <a:endParaRPr lang="en-US"/>
+          </a:p>
+        </p:txBody>
       </p:sp>
       <p:sp>
         <p:nvSpPr>
@@ -2856,7 +2645,7 @@
           </a:bodyPr>
           <a:lstStyle/>
           <a:p>
-            <a:pPr algn="l" indent="0" marL="0">
+            <a:pPr marL="0" indent="0" algn="l">
               <a:buNone/>
             </a:pPr>
             <a:r>
@@ -2893,6 +2682,13 @@
           </a:solidFill>
           <a:ln/>
         </p:spPr>
+        <p:txBody>
+          <a:bodyPr/>
+          <a:lstStyle/>
+          <a:p>
+            <a:endParaRPr lang="en-US"/>
+          </a:p>
+        </p:txBody>
       </p:sp>
       <p:sp>
         <p:nvSpPr>
@@ -2917,7 +2713,7 @@
           </a:bodyPr>
           <a:lstStyle/>
           <a:p>
-            <a:pPr algn="l" indent="0" marL="0">
+            <a:pPr marL="0" indent="0" algn="l">
               <a:buNone/>
             </a:pPr>
             <a:r>
@@ -2954,6 +2750,13 @@
           </a:solidFill>
           <a:ln/>
         </p:spPr>
+        <p:txBody>
+          <a:bodyPr/>
+          <a:lstStyle/>
+          <a:p>
+            <a:endParaRPr lang="en-US"/>
+          </a:p>
+        </p:txBody>
       </p:sp>
       <p:sp>
         <p:nvSpPr>
@@ -2978,7 +2781,7 @@
           </a:bodyPr>
           <a:lstStyle/>
           <a:p>
-            <a:pPr algn="l" indent="0" marL="0">
+            <a:pPr marL="0" indent="0" algn="l">
               <a:buNone/>
             </a:pPr>
             <a:r>
@@ -3015,6 +2818,13 @@
           </a:solidFill>
           <a:ln/>
         </p:spPr>
+        <p:txBody>
+          <a:bodyPr/>
+          <a:lstStyle/>
+          <a:p>
+            <a:endParaRPr lang="en-US"/>
+          </a:p>
+        </p:txBody>
       </p:sp>
       <p:sp>
         <p:nvSpPr>
@@ -3039,7 +2849,7 @@
           </a:bodyPr>
           <a:lstStyle/>
           <a:p>
-            <a:pPr algn="l" indent="0" marL="0">
+            <a:pPr marL="0" indent="0" algn="l">
               <a:buNone/>
             </a:pPr>
             <a:r>
@@ -3053,9 +2863,6 @@
               </a:rPr>
               <a:t>What was built: </a:t>
             </a:r>
-            <a:pPr algn="l" indent="0" marL="0">
-              <a:buNone/>
-            </a:pPr>
             <a:r>
               <a:rPr lang="en-US" sz="1500" i="1" dirty="0">
                 <a:solidFill>
@@ -3090,6 +2897,13 @@
           </a:solidFill>
           <a:ln/>
         </p:spPr>
+        <p:txBody>
+          <a:bodyPr/>
+          <a:lstStyle/>
+          <a:p>
+            <a:endParaRPr lang="en-US"/>
+          </a:p>
+        </p:txBody>
       </p:sp>
       <p:sp>
         <p:nvSpPr>
@@ -3114,7 +2928,7 @@
           </a:bodyPr>
           <a:lstStyle/>
           <a:p>
-            <a:pPr algn="l" indent="0" marL="0">
+            <a:pPr marL="0" indent="0" algn="l">
               <a:buNone/>
             </a:pPr>
             <a:r>
@@ -3151,6 +2965,13 @@
           </a:solidFill>
           <a:ln/>
         </p:spPr>
+        <p:txBody>
+          <a:bodyPr/>
+          <a:lstStyle/>
+          <a:p>
+            <a:endParaRPr lang="en-US"/>
+          </a:p>
+        </p:txBody>
       </p:sp>
       <p:sp>
         <p:nvSpPr>
@@ -3175,7 +2996,7 @@
           </a:bodyPr>
           <a:lstStyle/>
           <a:p>
-            <a:pPr algn="l" indent="0" marL="0">
+            <a:pPr marL="0" indent="0" algn="l">
               <a:buNone/>
             </a:pPr>
             <a:r>
@@ -3212,6 +3033,13 @@
           </a:solidFill>
           <a:ln/>
         </p:spPr>
+        <p:txBody>
+          <a:bodyPr/>
+          <a:lstStyle/>
+          <a:p>
+            <a:endParaRPr lang="en-US"/>
+          </a:p>
+        </p:txBody>
       </p:sp>
       <p:sp>
         <p:nvSpPr>
@@ -3236,7 +3064,7 @@
           </a:bodyPr>
           <a:lstStyle/>
           <a:p>
-            <a:pPr algn="l" indent="0" marL="0">
+            <a:pPr marL="0" indent="0" algn="l">
               <a:buNone/>
             </a:pPr>
             <a:r>
@@ -3273,6 +3101,13 @@
           </a:solidFill>
           <a:ln/>
         </p:spPr>
+        <p:txBody>
+          <a:bodyPr/>
+          <a:lstStyle/>
+          <a:p>
+            <a:endParaRPr lang="en-US"/>
+          </a:p>
+        </p:txBody>
       </p:sp>
       <p:sp>
         <p:nvSpPr>
@@ -3297,7 +3132,7 @@
           </a:bodyPr>
           <a:lstStyle/>
           <a:p>
-            <a:pPr algn="l" indent="0" marL="0">
+            <a:pPr marL="0" indent="0" algn="l">
               <a:buNone/>
             </a:pPr>
             <a:r>
@@ -3334,6 +3169,13 @@
           </a:solidFill>
           <a:ln/>
         </p:spPr>
+        <p:txBody>
+          <a:bodyPr/>
+          <a:lstStyle/>
+          <a:p>
+            <a:endParaRPr lang="en-US"/>
+          </a:p>
+        </p:txBody>
       </p:sp>
       <p:sp>
         <p:nvSpPr>
@@ -3358,7 +3200,7 @@
           </a:bodyPr>
           <a:lstStyle/>
           <a:p>
-            <a:pPr algn="l" indent="0" marL="0">
+            <a:pPr marL="0" indent="0" algn="l">
               <a:buNone/>
             </a:pPr>
             <a:r>
@@ -3395,6 +3237,13 @@
           </a:solidFill>
           <a:ln/>
         </p:spPr>
+        <p:txBody>
+          <a:bodyPr/>
+          <a:lstStyle/>
+          <a:p>
+            <a:endParaRPr lang="en-US"/>
+          </a:p>
+        </p:txBody>
       </p:sp>
       <p:sp>
         <p:nvSpPr>
@@ -3419,7 +3268,7 @@
           </a:bodyPr>
           <a:lstStyle/>
           <a:p>
-            <a:pPr algn="l" indent="0" marL="0">
+            <a:pPr marL="0" indent="0" algn="l">
               <a:buNone/>
             </a:pPr>
             <a:r>
@@ -3456,6 +3305,13 @@
           </a:solidFill>
           <a:ln/>
         </p:spPr>
+        <p:txBody>
+          <a:bodyPr/>
+          <a:lstStyle/>
+          <a:p>
+            <a:endParaRPr lang="en-US"/>
+          </a:p>
+        </p:txBody>
       </p:sp>
       <p:sp>
         <p:nvSpPr>
@@ -3480,7 +3336,7 @@
           </a:bodyPr>
           <a:lstStyle/>
           <a:p>
-            <a:pPr algn="l" indent="0" marL="0">
+            <a:pPr marL="0" indent="0" algn="l">
               <a:buNone/>
             </a:pPr>
             <a:r>
@@ -3517,6 +3373,13 @@
           </a:solidFill>
           <a:ln/>
         </p:spPr>
+        <p:txBody>
+          <a:bodyPr/>
+          <a:lstStyle/>
+          <a:p>
+            <a:endParaRPr lang="en-US"/>
+          </a:p>
+        </p:txBody>
       </p:sp>
       <p:sp>
         <p:nvSpPr>
@@ -3541,7 +3404,7 @@
           </a:bodyPr>
           <a:lstStyle/>
           <a:p>
-            <a:pPr algn="l" indent="0" marL="0">
+            <a:pPr marL="0" indent="0" algn="l">
               <a:buNone/>
             </a:pPr>
             <a:r>
@@ -3578,6 +3441,13 @@
           </a:solidFill>
           <a:ln/>
         </p:spPr>
+        <p:txBody>
+          <a:bodyPr/>
+          <a:lstStyle/>
+          <a:p>
+            <a:endParaRPr lang="en-US"/>
+          </a:p>
+        </p:txBody>
       </p:sp>
       <p:sp>
         <p:nvSpPr>
@@ -3602,7 +3472,7 @@
           </a:bodyPr>
           <a:lstStyle/>
           <a:p>
-            <a:pPr algn="l" indent="0" marL="0">
+            <a:pPr marL="0" indent="0" algn="l">
               <a:buNone/>
             </a:pPr>
             <a:r>
@@ -3639,6 +3509,13 @@
           </a:solidFill>
           <a:ln/>
         </p:spPr>
+        <p:txBody>
+          <a:bodyPr/>
+          <a:lstStyle/>
+          <a:p>
+            <a:endParaRPr lang="en-US"/>
+          </a:p>
+        </p:txBody>
       </p:sp>
       <p:sp>
         <p:nvSpPr>
@@ -3663,7 +3540,7 @@
           </a:bodyPr>
           <a:lstStyle/>
           <a:p>
-            <a:pPr algn="l" indent="0" marL="0">
+            <a:pPr marL="0" indent="0" algn="l">
               <a:buNone/>
             </a:pPr>
             <a:r>
@@ -3700,6 +3577,13 @@
           </a:solidFill>
           <a:ln/>
         </p:spPr>
+        <p:txBody>
+          <a:bodyPr/>
+          <a:lstStyle/>
+          <a:p>
+            <a:endParaRPr lang="en-US"/>
+          </a:p>
+        </p:txBody>
       </p:sp>
       <p:sp>
         <p:nvSpPr>
@@ -3724,7 +3608,7 @@
           </a:bodyPr>
           <a:lstStyle/>
           <a:p>
-            <a:pPr algn="l" indent="0" marL="0">
+            <a:pPr marL="0" indent="0" algn="l">
               <a:buNone/>
             </a:pPr>
             <a:r>
@@ -3761,6 +3645,13 @@
           </a:solidFill>
           <a:ln/>
         </p:spPr>
+        <p:txBody>
+          <a:bodyPr/>
+          <a:lstStyle/>
+          <a:p>
+            <a:endParaRPr lang="en-US"/>
+          </a:p>
+        </p:txBody>
       </p:sp>
       <p:sp>
         <p:nvSpPr>
@@ -3785,7 +3676,7 @@
           </a:bodyPr>
           <a:lstStyle/>
           <a:p>
-            <a:pPr algn="l" indent="0" marL="0">
+            <a:pPr marL="0" indent="0" algn="l">
               <a:buNone/>
             </a:pPr>
             <a:r>
@@ -3822,6 +3713,13 @@
           </a:solidFill>
           <a:ln/>
         </p:spPr>
+        <p:txBody>
+          <a:bodyPr/>
+          <a:lstStyle/>
+          <a:p>
+            <a:endParaRPr lang="en-US"/>
+          </a:p>
+        </p:txBody>
       </p:sp>
       <p:sp>
         <p:nvSpPr>
@@ -3846,7 +3744,7 @@
           </a:bodyPr>
           <a:lstStyle/>
           <a:p>
-            <a:pPr algn="l" indent="0" marL="0">
+            <a:pPr marL="0" indent="0" algn="l">
               <a:buNone/>
             </a:pPr>
             <a:r>
@@ -3883,6 +3781,13 @@
           </a:solidFill>
           <a:ln/>
         </p:spPr>
+        <p:txBody>
+          <a:bodyPr/>
+          <a:lstStyle/>
+          <a:p>
+            <a:endParaRPr lang="en-US"/>
+          </a:p>
+        </p:txBody>
       </p:sp>
       <p:sp>
         <p:nvSpPr>
@@ -3907,7 +3812,7 @@
           </a:bodyPr>
           <a:lstStyle/>
           <a:p>
-            <a:pPr algn="l" indent="0" marL="0">
+            <a:pPr marL="0" indent="0" algn="l">
               <a:buNone/>
             </a:pPr>
             <a:r>
@@ -3944,6 +3849,13 @@
           </a:solidFill>
           <a:ln/>
         </p:spPr>
+        <p:txBody>
+          <a:bodyPr/>
+          <a:lstStyle/>
+          <a:p>
+            <a:endParaRPr lang="en-US"/>
+          </a:p>
+        </p:txBody>
       </p:sp>
       <p:sp>
         <p:nvSpPr>
@@ -3968,7 +3880,7 @@
           </a:bodyPr>
           <a:lstStyle/>
           <a:p>
-            <a:pPr algn="l" indent="0" marL="0">
+            <a:pPr marL="0" indent="0" algn="l">
               <a:buNone/>
             </a:pPr>
             <a:r>
@@ -4005,6 +3917,13 @@
           </a:solidFill>
           <a:ln/>
         </p:spPr>
+        <p:txBody>
+          <a:bodyPr/>
+          <a:lstStyle/>
+          <a:p>
+            <a:endParaRPr lang="en-US"/>
+          </a:p>
+        </p:txBody>
       </p:sp>
       <p:sp>
         <p:nvSpPr>
@@ -4029,7 +3948,7 @@
           </a:bodyPr>
           <a:lstStyle/>
           <a:p>
-            <a:pPr algn="l" indent="0" marL="0">
+            <a:pPr marL="0" indent="0" algn="l">
               <a:buNone/>
             </a:pPr>
             <a:r>
@@ -4066,6 +3985,13 @@
           </a:solidFill>
           <a:ln/>
         </p:spPr>
+        <p:txBody>
+          <a:bodyPr/>
+          <a:lstStyle/>
+          <a:p>
+            <a:endParaRPr lang="en-US"/>
+          </a:p>
+        </p:txBody>
       </p:sp>
       <p:sp>
         <p:nvSpPr>
@@ -4090,7 +4016,7 @@
           </a:bodyPr>
           <a:lstStyle/>
           <a:p>
-            <a:pPr algn="l" indent="0" marL="0">
+            <a:pPr marL="0" indent="0" algn="l">
               <a:buNone/>
             </a:pPr>
             <a:r>
@@ -4127,6 +4053,13 @@
           </a:solidFill>
           <a:ln/>
         </p:spPr>
+        <p:txBody>
+          <a:bodyPr/>
+          <a:lstStyle/>
+          <a:p>
+            <a:endParaRPr lang="en-US"/>
+          </a:p>
+        </p:txBody>
       </p:sp>
       <p:sp>
         <p:nvSpPr>
@@ -4151,7 +4084,7 @@
           </a:bodyPr>
           <a:lstStyle/>
           <a:p>
-            <a:pPr algn="l" indent="0" marL="0">
+            <a:pPr marL="0" indent="0" algn="l">
               <a:buNone/>
             </a:pPr>
             <a:r>
@@ -4188,6 +4121,13 @@
           </a:solidFill>
           <a:ln/>
         </p:spPr>
+        <p:txBody>
+          <a:bodyPr/>
+          <a:lstStyle/>
+          <a:p>
+            <a:endParaRPr lang="en-US"/>
+          </a:p>
+        </p:txBody>
       </p:sp>
       <p:sp>
         <p:nvSpPr>
@@ -4212,7 +4152,7 @@
           </a:bodyPr>
           <a:lstStyle/>
           <a:p>
-            <a:pPr algn="l" indent="0" marL="0">
+            <a:pPr marL="0" indent="0" algn="l">
               <a:buNone/>
             </a:pPr>
             <a:r>
@@ -4249,6 +4189,13 @@
           </a:solidFill>
           <a:ln/>
         </p:spPr>
+        <p:txBody>
+          <a:bodyPr/>
+          <a:lstStyle/>
+          <a:p>
+            <a:endParaRPr lang="en-US"/>
+          </a:p>
+        </p:txBody>
       </p:sp>
       <p:sp>
         <p:nvSpPr>
@@ -4273,7 +4220,7 @@
           </a:bodyPr>
           <a:lstStyle/>
           <a:p>
-            <a:pPr algn="l" indent="0" marL="0">
+            <a:pPr marL="0" indent="0" algn="l">
               <a:buNone/>
             </a:pPr>
             <a:r>
@@ -4310,6 +4257,13 @@
           </a:solidFill>
           <a:ln/>
         </p:spPr>
+        <p:txBody>
+          <a:bodyPr/>
+          <a:lstStyle/>
+          <a:p>
+            <a:endParaRPr lang="en-US"/>
+          </a:p>
+        </p:txBody>
       </p:sp>
       <p:sp>
         <p:nvSpPr>
@@ -4334,7 +4288,7 @@
           </a:bodyPr>
           <a:lstStyle/>
           <a:p>
-            <a:pPr algn="l" indent="0" marL="0">
+            <a:pPr marL="0" indent="0" algn="l">
               <a:buNone/>
             </a:pPr>
             <a:r>
@@ -4371,6 +4325,13 @@
           </a:solidFill>
           <a:ln/>
         </p:spPr>
+        <p:txBody>
+          <a:bodyPr/>
+          <a:lstStyle/>
+          <a:p>
+            <a:endParaRPr lang="en-US"/>
+          </a:p>
+        </p:txBody>
       </p:sp>
       <p:sp>
         <p:nvSpPr>
@@ -4395,7 +4356,7 @@
           </a:bodyPr>
           <a:lstStyle/>
           <a:p>
-            <a:pPr algn="l" indent="0" marL="0">
+            <a:pPr marL="0" indent="0" algn="l">
               <a:buNone/>
             </a:pPr>
             <a:r>
@@ -4432,6 +4393,13 @@
           </a:solidFill>
           <a:ln/>
         </p:spPr>
+        <p:txBody>
+          <a:bodyPr/>
+          <a:lstStyle/>
+          <a:p>
+            <a:endParaRPr lang="en-US"/>
+          </a:p>
+        </p:txBody>
       </p:sp>
       <p:sp>
         <p:nvSpPr>
@@ -4456,11 +4424,11 @@
           </a:bodyPr>
           <a:lstStyle/>
           <a:p>
-            <a:pPr algn="l" indent="0" marL="0">
-              <a:buNone/>
-            </a:pPr>
-            <a:r>
-              <a:rPr lang="en-US" sz="1500" b="1" spc="90" kern="0" dirty="0">
+            <a:pPr marL="0" indent="0" algn="l">
+              <a:buNone/>
+            </a:pPr>
+            <a:r>
+              <a:rPr lang="en-US" sz="1500" b="1" kern="0" spc="90" dirty="0">
                 <a:solidFill>
                   <a:srgbClr val="161512"/>
                 </a:solidFill>
@@ -4497,11 +4465,11 @@
           </a:bodyPr>
           <a:lstStyle/>
           <a:p>
-            <a:pPr algn="r" indent="0" marL="0">
-              <a:buNone/>
-            </a:pPr>
-            <a:r>
-              <a:rPr lang="en-US" sz="1350" spc="27" kern="0" dirty="0">
+            <a:pPr marL="0" indent="0" algn="r">
+              <a:buNone/>
+            </a:pPr>
+            <a:r>
+              <a:rPr lang="en-US" sz="1350" kern="0" spc="27" dirty="0">
                 <a:solidFill>
                   <a:srgbClr val="75716A"/>
                 </a:solidFill>
@@ -4524,7 +4492,7 @@
         <p:spPr>
           <a:xfrm>
             <a:off x="10275540" y="2531120"/>
-            <a:ext cx="7311002" cy="1336477"/>
+            <a:ext cx="7311002" cy="1546026"/>
           </a:xfrm>
           <a:prstGeom prst="rect">
             <a:avLst/>
@@ -4534,11 +4502,11 @@
         </p:spPr>
         <p:txBody>
           <a:bodyPr wrap="square" lIns="25400" tIns="25400" rIns="25400" bIns="25400" rtlCol="0" anchor="t">
-            <a:normAutofit/>
-          </a:bodyPr>
-          <a:lstStyle/>
-          <a:p>
-            <a:pPr algn="l" indent="0" marL="0">
+            <a:normAutofit lnSpcReduction="10000"/>
+          </a:bodyPr>
+          <a:lstStyle/>
+          <a:p>
+            <a:pPr marL="0" indent="0" algn="l">
               <a:lnSpc>
                 <a:spcPct val="142000"/>
               </a:lnSpc>
@@ -4567,8 +4535,8 @@
         </p:nvSpPr>
         <p:spPr>
           <a:xfrm>
-            <a:off x="10275540" y="4191446"/>
-            <a:ext cx="7098060" cy="1478161"/>
+            <a:off x="10275540" y="4191447"/>
+            <a:ext cx="7098060" cy="1578174"/>
           </a:xfrm>
           <a:prstGeom prst="rect">
             <a:avLst/>
@@ -4578,6 +4546,13 @@
           </a:solidFill>
           <a:ln/>
         </p:spPr>
+        <p:txBody>
+          <a:bodyPr/>
+          <a:lstStyle/>
+          <a:p>
+            <a:endParaRPr lang="en-US"/>
+          </a:p>
+        </p:txBody>
       </p:sp>
       <p:sp>
         <p:nvSpPr>
@@ -4587,8 +4562,8 @@
         </p:nvSpPr>
         <p:spPr>
           <a:xfrm>
-            <a:off x="10275540" y="4191446"/>
-            <a:ext cx="28575" cy="1478161"/>
+            <a:off x="10275540" y="4191447"/>
+            <a:ext cx="45719" cy="1578174"/>
           </a:xfrm>
           <a:prstGeom prst="rect">
             <a:avLst/>
@@ -4598,6 +4573,13 @@
           </a:solidFill>
           <a:ln/>
         </p:spPr>
+        <p:txBody>
+          <a:bodyPr/>
+          <a:lstStyle/>
+          <a:p>
+            <a:endParaRPr lang="en-US"/>
+          </a:p>
+        </p:txBody>
       </p:sp>
       <p:sp>
         <p:nvSpPr>
@@ -4618,11 +4600,11 @@
         </p:spPr>
         <p:txBody>
           <a:bodyPr wrap="square" lIns="25400" tIns="25400" rIns="25400" bIns="25400" rtlCol="0" anchor="t">
-            <a:normAutofit/>
-          </a:bodyPr>
-          <a:lstStyle/>
-          <a:p>
-            <a:pPr algn="l" indent="0" marL="0">
+            <a:normAutofit fontScale="92500" lnSpcReduction="20000"/>
+          </a:bodyPr>
+          <a:lstStyle/>
+          <a:p>
+            <a:pPr marL="0" indent="0" algn="l">
               <a:lnSpc>
                 <a:spcPct val="140000"/>
               </a:lnSpc>
@@ -4639,12 +4621,6 @@
               </a:rPr>
               <a:t>This project supplies the missing artefact. </a:t>
             </a:r>
-            <a:pPr algn="l" indent="0" marL="0">
-              <a:lnSpc>
-                <a:spcPct val="140000"/>
-              </a:lnSpc>
-              <a:buNone/>
-            </a:pPr>
             <a:r>
               <a:rPr lang="en-US" sz="1650" dirty="0">
                 <a:solidFill>
@@ -4659,12 +4635,6 @@
               </a:rPr>
               <a:t>Two Python packages, </a:t>
             </a:r>
-            <a:pPr algn="l" indent="0" marL="0">
-              <a:lnSpc>
-                <a:spcPct val="140000"/>
-              </a:lnSpc>
-              <a:buNone/>
-            </a:pPr>
             <a:r>
               <a:rPr lang="en-US" sz="1650" dirty="0">
                 <a:solidFill>
@@ -4676,12 +4646,6 @@
               </a:rPr>
               <a:t>mos/ </a:t>
             </a:r>
-            <a:pPr algn="l" indent="0" marL="0">
-              <a:lnSpc>
-                <a:spcPct val="140000"/>
-              </a:lnSpc>
-              <a:buNone/>
-            </a:pPr>
             <a:r>
               <a:rPr lang="en-US" sz="1650" dirty="0">
                 <a:solidFill>
@@ -4696,12 +4660,6 @@
               </a:rPr>
               <a:t>(state-level emulator) and </a:t>
             </a:r>
-            <a:pPr algn="l" indent="0" marL="0">
-              <a:lnSpc>
-                <a:spcPct val="140000"/>
-              </a:lnSpc>
-              <a:buNone/>
-            </a:pPr>
             <a:r>
               <a:rPr lang="en-US" sz="1650" dirty="0">
                 <a:solidFill>
@@ -4713,12 +4671,6 @@
               </a:rPr>
               <a:t>ql/ </a:t>
             </a:r>
-            <a:pPr algn="l" indent="0" marL="0">
-              <a:lnSpc>
-                <a:spcPct val="140000"/>
-              </a:lnSpc>
-              <a:buNone/>
-            </a:pPr>
             <a:r>
               <a:rPr lang="en-US" sz="1650" dirty="0">
                 <a:solidFill>
@@ -4756,6 +4708,13 @@
           </a:solidFill>
           <a:ln/>
         </p:spPr>
+        <p:txBody>
+          <a:bodyPr/>
+          <a:lstStyle/>
+          <a:p>
+            <a:endParaRPr lang="en-US"/>
+          </a:p>
+        </p:txBody>
       </p:sp>
       <p:sp>
         <p:nvSpPr>
@@ -4780,11 +4739,11 @@
           </a:bodyPr>
           <a:lstStyle/>
           <a:p>
-            <a:pPr algn="l" indent="0" marL="0">
-              <a:buNone/>
-            </a:pPr>
-            <a:r>
-              <a:rPr lang="en-US" sz="1200" spc="48" kern="0" dirty="0">
+            <a:pPr marL="0" indent="0" algn="l">
+              <a:buNone/>
+            </a:pPr>
+            <a:r>
+              <a:rPr lang="en-US" sz="1200" kern="0" spc="48" dirty="0">
                 <a:solidFill>
                   <a:srgbClr val="3A3733"/>
                 </a:solidFill>
@@ -4821,11 +4780,11 @@
           </a:bodyPr>
           <a:lstStyle/>
           <a:p>
-            <a:pPr algn="l" indent="0" marL="0">
-              <a:buNone/>
-            </a:pPr>
-            <a:r>
-              <a:rPr lang="en-US" sz="1200" spc="48" kern="0" dirty="0">
+            <a:pPr marL="0" indent="0" algn="l">
+              <a:buNone/>
+            </a:pPr>
+            <a:r>
+              <a:rPr lang="en-US" sz="1200" kern="0" spc="48" dirty="0">
                 <a:solidFill>
                   <a:srgbClr val="75716A"/>
                 </a:solidFill>
@@ -4855,6 +4814,7 @@
         <a:solidFill>
           <a:srgbClr val="F6F3EC"/>
         </a:solidFill>
+        <a:effectLst/>
       </p:bgPr>
     </p:bg>
     <p:spTree>
@@ -4890,6 +4850,13 @@
           </a:solidFill>
           <a:ln/>
         </p:spPr>
+        <p:txBody>
+          <a:bodyPr/>
+          <a:lstStyle/>
+          <a:p>
+            <a:endParaRPr lang="en-US"/>
+          </a:p>
+        </p:txBody>
       </p:sp>
       <p:sp>
         <p:nvSpPr>
@@ -4914,11 +4881,11 @@
           </a:bodyPr>
           <a:lstStyle/>
           <a:p>
-            <a:pPr algn="l" indent="0" marL="0">
-              <a:buNone/>
-            </a:pPr>
-            <a:r>
-              <a:rPr lang="en-US" sz="1350" b="1" spc="54" kern="0" dirty="0">
+            <a:pPr marL="0" indent="0" algn="l">
+              <a:buNone/>
+            </a:pPr>
+            <a:r>
+              <a:rPr lang="en-US" sz="1350" b="1" kern="0" spc="54" dirty="0">
                 <a:solidFill>
                   <a:srgbClr val="161512"/>
                 </a:solidFill>
@@ -4951,15 +4918,15 @@
         </p:spPr>
         <p:txBody>
           <a:bodyPr wrap="square" lIns="25400" tIns="25400" rIns="25400" bIns="25400" rtlCol="0" anchor="t">
-            <a:normAutofit/>
-          </a:bodyPr>
-          <a:lstStyle/>
-          <a:p>
-            <a:pPr algn="l" indent="0" marL="0">
-              <a:buNone/>
-            </a:pPr>
-            <a:r>
-              <a:rPr lang="en-US" sz="1350" spc="54" kern="0" dirty="0">
+            <a:normAutofit fontScale="92500"/>
+          </a:bodyPr>
+          <a:lstStyle/>
+          <a:p>
+            <a:pPr marL="0" indent="0" algn="l">
+              <a:buNone/>
+            </a:pPr>
+            <a:r>
+              <a:rPr lang="en-US" sz="1350" kern="0" spc="54" dirty="0">
                 <a:solidFill>
                   <a:srgbClr val="3A3733"/>
                 </a:solidFill>
@@ -4973,30 +4940,6 @@
           </a:p>
         </p:txBody>
       </p:sp>
-      <p:pic>
-        <p:nvPicPr>
-          <p:cNvPr id="5" name="Image 0" descr="preencoded.png">    </p:cNvPr>
-          <p:cNvPicPr>
-            <a:picLocks noChangeAspect="1"/>
-          </p:cNvPicPr>
-          <p:nvPr/>
-        </p:nvPicPr>
-        <p:blipFill>
-          <a:blip r:embed="rId1"/>
-          <a:stretch>
-            <a:fillRect/>
-          </a:stretch>
-        </p:blipFill>
-        <p:spPr>
-          <a:xfrm>
-            <a:off x="914400" y="1566863"/>
-            <a:ext cx="9245575" cy="5118050"/>
-          </a:xfrm>
-          <a:prstGeom prst="rect">
-            <a:avLst/>
-          </a:prstGeom>
-        </p:spPr>
-      </p:pic>
       <p:sp>
         <p:nvSpPr>
           <p:cNvPr id="6" name="Text 3"/>
@@ -5020,11 +4963,11 @@
           </a:bodyPr>
           <a:lstStyle/>
           <a:p>
-            <a:pPr algn="l" indent="0" marL="0">
-              <a:buNone/>
-            </a:pPr>
-            <a:r>
-              <a:rPr lang="en-US" sz="1500" b="1" spc="120" kern="0" dirty="0">
+            <a:pPr marL="0" indent="0" algn="l">
+              <a:buNone/>
+            </a:pPr>
+            <a:r>
+              <a:rPr lang="en-US" sz="1500" b="1" kern="0" spc="120" dirty="0">
                 <a:solidFill>
                   <a:srgbClr val="161512"/>
                 </a:solidFill>
@@ -5057,18 +5000,18 @@
         </p:spPr>
         <p:txBody>
           <a:bodyPr wrap="square" lIns="25400" tIns="25400" rIns="25400" bIns="25400" rtlCol="0" anchor="t">
-            <a:normAutofit/>
-          </a:bodyPr>
-          <a:lstStyle/>
-          <a:p>
-            <a:pPr algn="l" indent="0" marL="0">
+            <a:normAutofit fontScale="92500" lnSpcReduction="20000"/>
+          </a:bodyPr>
+          <a:lstStyle/>
+          <a:p>
+            <a:pPr marL="0" indent="0" algn="l">
               <a:lnSpc>
                 <a:spcPct val="100000"/>
               </a:lnSpc>
               <a:buNone/>
             </a:pPr>
             <a:r>
-              <a:rPr lang="en-US" sz="4050" spc="-61" kern="0" dirty="0">
+              <a:rPr lang="en-US" sz="4050" kern="0" spc="-61" dirty="0">
                 <a:solidFill>
                   <a:srgbClr val="161512"/>
                 </a:solidFill>
@@ -5105,11 +5048,11 @@
           </a:bodyPr>
           <a:lstStyle/>
           <a:p>
-            <a:pPr algn="l" indent="0" marL="0">
-              <a:buNone/>
-            </a:pPr>
-            <a:r>
-              <a:rPr lang="en-US" sz="1125" spc="68" kern="0" dirty="0">
+            <a:pPr marL="0" indent="0" algn="l">
+              <a:buNone/>
+            </a:pPr>
+            <a:r>
+              <a:rPr lang="en-US" sz="1125" kern="0" spc="68" dirty="0">
                 <a:solidFill>
                   <a:srgbClr val="75716A"/>
                 </a:solidFill>
@@ -5142,18 +5085,18 @@
         </p:spPr>
         <p:txBody>
           <a:bodyPr wrap="square" lIns="25400" tIns="25400" rIns="25400" bIns="25400" rtlCol="0" anchor="t">
-            <a:normAutofit/>
-          </a:bodyPr>
-          <a:lstStyle/>
-          <a:p>
-            <a:pPr algn="l" indent="0" marL="0">
+            <a:normAutofit fontScale="92500" lnSpcReduction="20000"/>
+          </a:bodyPr>
+          <a:lstStyle/>
+          <a:p>
+            <a:pPr marL="0" indent="0" algn="l">
               <a:lnSpc>
                 <a:spcPct val="100000"/>
               </a:lnSpc>
               <a:buNone/>
             </a:pPr>
             <a:r>
-              <a:rPr lang="en-US" sz="4050" spc="-61" kern="0" dirty="0">
+              <a:rPr lang="en-US" sz="4050" kern="0" spc="-61" dirty="0">
                 <a:solidFill>
                   <a:srgbClr val="161512"/>
                 </a:solidFill>
@@ -5190,11 +5133,11 @@
           </a:bodyPr>
           <a:lstStyle/>
           <a:p>
-            <a:pPr algn="l" indent="0" marL="0">
-              <a:buNone/>
-            </a:pPr>
-            <a:r>
-              <a:rPr lang="en-US" sz="1125" spc="68" kern="0" dirty="0">
+            <a:pPr marL="0" indent="0" algn="l">
+              <a:buNone/>
+            </a:pPr>
+            <a:r>
+              <a:rPr lang="en-US" sz="1125" kern="0" spc="68" dirty="0">
                 <a:solidFill>
                   <a:srgbClr val="75716A"/>
                 </a:solidFill>
@@ -5227,18 +5170,18 @@
         </p:spPr>
         <p:txBody>
           <a:bodyPr wrap="square" lIns="25400" tIns="25400" rIns="25400" bIns="25400" rtlCol="0" anchor="t">
-            <a:normAutofit/>
-          </a:bodyPr>
-          <a:lstStyle/>
-          <a:p>
-            <a:pPr algn="l" indent="0" marL="0">
+            <a:normAutofit fontScale="92500" lnSpcReduction="20000"/>
+          </a:bodyPr>
+          <a:lstStyle/>
+          <a:p>
+            <a:pPr marL="0" indent="0" algn="l">
               <a:lnSpc>
                 <a:spcPct val="100000"/>
               </a:lnSpc>
               <a:buNone/>
             </a:pPr>
             <a:r>
-              <a:rPr lang="en-US" sz="4050" spc="-61" kern="0" dirty="0">
+              <a:rPr lang="en-US" sz="4050" kern="0" spc="-61" dirty="0">
                 <a:solidFill>
                   <a:srgbClr val="161512"/>
                 </a:solidFill>
@@ -5275,11 +5218,11 @@
           </a:bodyPr>
           <a:lstStyle/>
           <a:p>
-            <a:pPr algn="l" indent="0" marL="0">
-              <a:buNone/>
-            </a:pPr>
-            <a:r>
-              <a:rPr lang="en-US" sz="1125" spc="68" kern="0" dirty="0">
+            <a:pPr marL="0" indent="0" algn="l">
+              <a:buNone/>
+            </a:pPr>
+            <a:r>
+              <a:rPr lang="en-US" sz="1125" kern="0" spc="68" dirty="0">
                 <a:solidFill>
                   <a:srgbClr val="75716A"/>
                 </a:solidFill>
@@ -5312,18 +5255,18 @@
         </p:spPr>
         <p:txBody>
           <a:bodyPr wrap="square" lIns="25400" tIns="25400" rIns="25400" bIns="25400" rtlCol="0" anchor="t">
-            <a:normAutofit/>
-          </a:bodyPr>
-          <a:lstStyle/>
-          <a:p>
-            <a:pPr algn="l" indent="0" marL="0">
+            <a:normAutofit fontScale="92500" lnSpcReduction="20000"/>
+          </a:bodyPr>
+          <a:lstStyle/>
+          <a:p>
+            <a:pPr marL="0" indent="0" algn="l">
               <a:lnSpc>
                 <a:spcPct val="100000"/>
               </a:lnSpc>
               <a:buNone/>
             </a:pPr>
             <a:r>
-              <a:rPr lang="en-US" sz="4050" spc="-61" kern="0" dirty="0">
+              <a:rPr lang="en-US" sz="4050" kern="0" spc="-61" dirty="0">
                 <a:solidFill>
                   <a:srgbClr val="161512"/>
                 </a:solidFill>
@@ -5360,11 +5303,11 @@
           </a:bodyPr>
           <a:lstStyle/>
           <a:p>
-            <a:pPr algn="l" indent="0" marL="0">
-              <a:buNone/>
-            </a:pPr>
-            <a:r>
-              <a:rPr lang="en-US" sz="1125" spc="68" kern="0" dirty="0">
+            <a:pPr marL="0" indent="0" algn="l">
+              <a:buNone/>
+            </a:pPr>
+            <a:r>
+              <a:rPr lang="en-US" sz="1125" kern="0" spc="68" dirty="0">
                 <a:solidFill>
                   <a:srgbClr val="75716A"/>
                 </a:solidFill>
@@ -5397,6 +5340,13 @@
           </a:solidFill>
           <a:ln/>
         </p:spPr>
+        <p:txBody>
+          <a:bodyPr/>
+          <a:lstStyle/>
+          <a:p>
+            <a:endParaRPr lang="en-US"/>
+          </a:p>
+        </p:txBody>
       </p:sp>
       <p:sp>
         <p:nvSpPr>
@@ -5417,6 +5367,13 @@
           </a:solidFill>
           <a:ln/>
         </p:spPr>
+        <p:txBody>
+          <a:bodyPr/>
+          <a:lstStyle/>
+          <a:p>
+            <a:endParaRPr lang="en-US"/>
+          </a:p>
+        </p:txBody>
       </p:sp>
       <p:sp>
         <p:nvSpPr>
@@ -5441,7 +5398,7 @@
           </a:bodyPr>
           <a:lstStyle/>
           <a:p>
-            <a:pPr algn="l" indent="0" marL="0">
+            <a:pPr marL="0" indent="0" algn="l">
               <a:lnSpc>
                 <a:spcPct val="140000"/>
               </a:lnSpc>
@@ -5458,12 +5415,6 @@
               </a:rPr>
               <a:t>Lemma 1. </a:t>
             </a:r>
-            <a:pPr algn="l" indent="0" marL="0">
-              <a:lnSpc>
-                <a:spcPct val="140000"/>
-              </a:lnSpc>
-              <a:buNone/>
-            </a:pPr>
             <a:r>
               <a:rPr lang="en-US" sz="1650" dirty="0">
                 <a:solidFill>
@@ -5478,12 +5429,6 @@
               </a:rPr>
               <a:t>Statevector and circuit preparations of </a:t>
             </a:r>
-            <a:pPr algn="l" indent="0" marL="0">
-              <a:lnSpc>
-                <a:spcPct val="140000"/>
-              </a:lnSpc>
-              <a:buNone/>
-            </a:pPr>
             <a:r>
               <a:rPr lang="en-US" sz="1650" i="1" dirty="0">
                 <a:solidFill>
@@ -5495,12 +5440,6 @@
               </a:rPr>
               <a:t>|ψ</a:t>
             </a:r>
-            <a:pPr algn="l" indent="0" marL="0">
-              <a:lnSpc>
-                <a:spcPct val="140000"/>
-              </a:lnSpc>
-              <a:buNone/>
-            </a:pPr>
             <a:r>
               <a:rPr lang="en-US" sz="1375" i="1" baseline="-40000" dirty="0">
                 <a:solidFill>
@@ -5512,12 +5451,6 @@
               </a:rPr>
               <a:t>f</a:t>
             </a:r>
-            <a:pPr algn="l" indent="0" marL="0">
-              <a:lnSpc>
-                <a:spcPct val="140000"/>
-              </a:lnSpc>
-              <a:buNone/>
-            </a:pPr>
             <a:r>
               <a:rPr lang="en-US" sz="1650" i="1" dirty="0">
                 <a:solidFill>
@@ -5529,12 +5462,6 @@
               </a:rPr>
               <a:t>⟩ </a:t>
             </a:r>
-            <a:pPr algn="l" indent="0" marL="0">
-              <a:lnSpc>
-                <a:spcPct val="140000"/>
-              </a:lnSpc>
-              <a:buNone/>
-            </a:pPr>
             <a:r>
               <a:rPr lang="en-US" sz="1650" dirty="0">
                 <a:solidFill>
@@ -5549,12 +5476,6 @@
               </a:rPr>
               <a:t>are identical under no gate noise; same |x, </a:t>
             </a:r>
-            <a:pPr algn="l" indent="0" marL="0">
-              <a:lnSpc>
-                <a:spcPct val="140000"/>
-              </a:lnSpc>
-              <a:buNone/>
-            </a:pPr>
             <a:r>
               <a:rPr lang="en-US" sz="1650" i="1" dirty="0">
                 <a:solidFill>
@@ -5566,12 +5487,6 @@
               </a:rPr>
               <a:t>f </a:t>
             </a:r>
-            <a:pPr algn="l" indent="0" marL="0">
-              <a:lnSpc>
-                <a:spcPct val="140000"/>
-              </a:lnSpc>
-              <a:buNone/>
-            </a:pPr>
             <a:r>
               <a:rPr lang="en-US" sz="1650" dirty="0">
                 <a:solidFill>
@@ -5613,11 +5528,11 @@
           </a:bodyPr>
           <a:lstStyle/>
           <a:p>
-            <a:pPr algn="l" indent="0" marL="0">
-              <a:buNone/>
-            </a:pPr>
-            <a:r>
-              <a:rPr lang="en-US" sz="1500" b="1" spc="120" kern="0" dirty="0">
+            <a:pPr marL="0" indent="0" algn="l">
+              <a:buNone/>
+            </a:pPr>
+            <a:r>
+              <a:rPr lang="en-US" sz="1500" b="1" kern="0" spc="120" dirty="0">
                 <a:solidFill>
                   <a:srgbClr val="161512"/>
                 </a:solidFill>
@@ -5650,11 +5565,11 @@
         </p:spPr>
         <p:txBody>
           <a:bodyPr wrap="square" lIns="25400" tIns="25400" rIns="25400" bIns="25400" rtlCol="0" anchor="t">
-            <a:normAutofit/>
-          </a:bodyPr>
-          <a:lstStyle/>
-          <a:p>
-            <a:pPr algn="l" indent="0" marL="0">
+            <a:normAutofit fontScale="92500" lnSpcReduction="20000"/>
+          </a:bodyPr>
+          <a:lstStyle/>
+          <a:p>
+            <a:pPr marL="0" indent="0" algn="l">
               <a:lnSpc>
                 <a:spcPct val="142000"/>
               </a:lnSpc>
@@ -5694,6 +5609,13 @@
           </a:solidFill>
           <a:ln/>
         </p:spPr>
+        <p:txBody>
+          <a:bodyPr/>
+          <a:lstStyle/>
+          <a:p>
+            <a:endParaRPr lang="en-US"/>
+          </a:p>
+        </p:txBody>
       </p:sp>
       <p:sp>
         <p:nvSpPr>
@@ -5718,11 +5640,11 @@
           </a:bodyPr>
           <a:lstStyle/>
           <a:p>
-            <a:pPr algn="l" indent="0" marL="0">
-              <a:buNone/>
-            </a:pPr>
-            <a:r>
-              <a:rPr lang="en-US" sz="1200" spc="48" kern="0" dirty="0">
+            <a:pPr marL="0" indent="0" algn="l">
+              <a:buNone/>
+            </a:pPr>
+            <a:r>
+              <a:rPr lang="en-US" sz="1200" kern="0" spc="48" dirty="0">
                 <a:solidFill>
                   <a:srgbClr val="3A3733"/>
                 </a:solidFill>
@@ -5759,11 +5681,11 @@
           </a:bodyPr>
           <a:lstStyle/>
           <a:p>
-            <a:pPr algn="l" indent="0" marL="0">
-              <a:buNone/>
-            </a:pPr>
-            <a:r>
-              <a:rPr lang="en-US" sz="1200" spc="48" kern="0" dirty="0">
+            <a:pPr marL="0" indent="0" algn="l">
+              <a:buNone/>
+            </a:pPr>
+            <a:r>
+              <a:rPr lang="en-US" sz="1200" kern="0" spc="48" dirty="0">
                 <a:solidFill>
                   <a:srgbClr val="75716A"/>
                 </a:solidFill>
@@ -5777,6 +5699,36 @@
           </a:p>
         </p:txBody>
       </p:sp>
+      <p:pic>
+        <p:nvPicPr>
+          <p:cNvPr id="23" name="Picture 22">
+            <a:extLst>
+              <a:ext uri="{FF2B5EF4-FFF2-40B4-BE49-F238E27FC236}">
+                <a16:creationId xmlns:a16="http://schemas.microsoft.com/office/drawing/2014/main" id="{456C8176-83DF-DD3A-1107-FF33EC038236}"/>
+              </a:ext>
+            </a:extLst>
+          </p:cNvPr>
+          <p:cNvPicPr>
+            <a:picLocks noChangeAspect="1"/>
+          </p:cNvPicPr>
+          <p:nvPr/>
+        </p:nvPicPr>
+        <p:blipFill>
+          <a:blip r:embed="rId3"/>
+          <a:stretch>
+            <a:fillRect/>
+          </a:stretch>
+        </p:blipFill>
+        <p:spPr>
+          <a:xfrm>
+            <a:off x="716279" y="1662113"/>
+            <a:ext cx="9649999" cy="5519005"/>
+          </a:xfrm>
+          <a:prstGeom prst="rect">
+            <a:avLst/>
+          </a:prstGeom>
+        </p:spPr>
+      </p:pic>
     </p:spTree>
   </p:cSld>
   <p:clrMapOvr>
@@ -5793,6 +5745,7 @@
         <a:solidFill>
           <a:srgbClr val="F6F3EC"/>
         </a:solidFill>
+        <a:effectLst/>
       </p:bgPr>
     </p:bg>
     <p:spTree>
@@ -5828,6 +5781,13 @@
           </a:solidFill>
           <a:ln/>
         </p:spPr>
+        <p:txBody>
+          <a:bodyPr/>
+          <a:lstStyle/>
+          <a:p>
+            <a:endParaRPr lang="en-US"/>
+          </a:p>
+        </p:txBody>
       </p:sp>
       <p:sp>
         <p:nvSpPr>
@@ -5852,11 +5812,11 @@
           </a:bodyPr>
           <a:lstStyle/>
           <a:p>
-            <a:pPr algn="l" indent="0" marL="0">
-              <a:buNone/>
-            </a:pPr>
-            <a:r>
-              <a:rPr lang="en-US" sz="1350" b="1" spc="54" kern="0" dirty="0">
+            <a:pPr marL="0" indent="0" algn="l">
+              <a:buNone/>
+            </a:pPr>
+            <a:r>
+              <a:rPr lang="en-US" sz="1350" b="1" kern="0" spc="54" dirty="0">
                 <a:solidFill>
                   <a:srgbClr val="161512"/>
                 </a:solidFill>
@@ -5893,11 +5853,11 @@
           </a:bodyPr>
           <a:lstStyle/>
           <a:p>
-            <a:pPr algn="l" indent="0" marL="0">
-              <a:buNone/>
-            </a:pPr>
-            <a:r>
-              <a:rPr lang="en-US" sz="1350" spc="54" kern="0" dirty="0">
+            <a:pPr marL="0" indent="0" algn="l">
+              <a:buNone/>
+            </a:pPr>
+            <a:r>
+              <a:rPr lang="en-US" sz="1350" kern="0" spc="54" dirty="0">
                 <a:solidFill>
                   <a:srgbClr val="3A3733"/>
                 </a:solidFill>
@@ -5930,18 +5890,18 @@
         </p:spPr>
         <p:txBody>
           <a:bodyPr wrap="square" lIns="25400" tIns="25400" rIns="25400" bIns="25400" rtlCol="0" anchor="t">
-            <a:normAutofit/>
-          </a:bodyPr>
-          <a:lstStyle/>
-          <a:p>
-            <a:pPr algn="l" indent="0" marL="0">
+            <a:normAutofit fontScale="92500"/>
+          </a:bodyPr>
+          <a:lstStyle/>
+          <a:p>
+            <a:pPr marL="0" indent="0" algn="l">
               <a:lnSpc>
                 <a:spcPct val="112000"/>
               </a:lnSpc>
               <a:buNone/>
             </a:pPr>
             <a:r>
-              <a:rPr lang="en-US" sz="3900" spc="-58" kern="0" dirty="0">
+              <a:rPr lang="en-US" sz="3900" kern="0" spc="-58" dirty="0">
                 <a:solidFill>
                   <a:srgbClr val="161512"/>
                 </a:solidFill>
@@ -5974,6 +5934,13 @@
           </a:solidFill>
           <a:ln/>
         </p:spPr>
+        <p:txBody>
+          <a:bodyPr/>
+          <a:lstStyle/>
+          <a:p>
+            <a:endParaRPr lang="en-US"/>
+          </a:p>
+        </p:txBody>
       </p:sp>
       <p:sp>
         <p:nvSpPr>
@@ -5998,11 +5965,11 @@
           </a:bodyPr>
           <a:lstStyle/>
           <a:p>
-            <a:pPr algn="l" indent="0" marL="0">
-              <a:buNone/>
-            </a:pPr>
-            <a:r>
-              <a:rPr lang="en-US" sz="1500" b="1" spc="90" kern="0" dirty="0">
+            <a:pPr marL="0" indent="0" algn="l">
+              <a:buNone/>
+            </a:pPr>
+            <a:r>
+              <a:rPr lang="en-US" sz="1500" b="1" kern="0" spc="90" dirty="0">
                 <a:solidFill>
                   <a:srgbClr val="161512"/>
                 </a:solidFill>
@@ -6039,11 +6006,11 @@
           </a:bodyPr>
           <a:lstStyle/>
           <a:p>
-            <a:pPr algn="r" indent="0" marL="0">
-              <a:buNone/>
-            </a:pPr>
-            <a:r>
-              <a:rPr lang="en-US" sz="1350" spc="27" kern="0" dirty="0">
+            <a:pPr marL="0" indent="0" algn="r">
+              <a:buNone/>
+            </a:pPr>
+            <a:r>
+              <a:rPr lang="en-US" sz="1350" kern="0" spc="27" dirty="0">
                 <a:solidFill>
                   <a:srgbClr val="75716A"/>
                 </a:solidFill>
@@ -6076,6 +6043,13 @@
           </a:solidFill>
           <a:ln/>
         </p:spPr>
+        <p:txBody>
+          <a:bodyPr/>
+          <a:lstStyle/>
+          <a:p>
+            <a:endParaRPr lang="en-US"/>
+          </a:p>
+        </p:txBody>
       </p:sp>
       <p:sp>
         <p:nvSpPr>
@@ -6096,15 +6070,15 @@
         </p:spPr>
         <p:txBody>
           <a:bodyPr wrap="square" lIns="25400" tIns="25400" rIns="25400" bIns="25400" rtlCol="0" anchor="ctr">
-            <a:normAutofit/>
-          </a:bodyPr>
-          <a:lstStyle/>
-          <a:p>
-            <a:pPr algn="l" indent="0" marL="0">
-              <a:buNone/>
-            </a:pPr>
-            <a:r>
-              <a:rPr lang="en-US" sz="1125" spc="68" kern="0" dirty="0">
+            <a:normAutofit lnSpcReduction="10000"/>
+          </a:bodyPr>
+          <a:lstStyle/>
+          <a:p>
+            <a:pPr marL="0" indent="0" algn="l">
+              <a:buNone/>
+            </a:pPr>
+            <a:r>
+              <a:rPr lang="en-US" sz="1125" kern="0" spc="68" dirty="0">
                 <a:solidFill>
                   <a:srgbClr val="75716A"/>
                 </a:solidFill>
@@ -6137,6 +6111,13 @@
           </a:solidFill>
           <a:ln/>
         </p:spPr>
+        <p:txBody>
+          <a:bodyPr/>
+          <a:lstStyle/>
+          <a:p>
+            <a:endParaRPr lang="en-US"/>
+          </a:p>
+        </p:txBody>
       </p:sp>
       <p:sp>
         <p:nvSpPr>
@@ -6157,15 +6138,15 @@
         </p:spPr>
         <p:txBody>
           <a:bodyPr wrap="square" lIns="25400" tIns="25400" rIns="25400" bIns="25400" rtlCol="0" anchor="ctr">
-            <a:normAutofit/>
-          </a:bodyPr>
-          <a:lstStyle/>
-          <a:p>
-            <a:pPr algn="r" indent="0" marL="0">
-              <a:buNone/>
-            </a:pPr>
-            <a:r>
-              <a:rPr lang="en-US" sz="1125" spc="68" kern="0" dirty="0">
+            <a:normAutofit lnSpcReduction="10000"/>
+          </a:bodyPr>
+          <a:lstStyle/>
+          <a:p>
+            <a:pPr marL="0" indent="0" algn="r">
+              <a:buNone/>
+            </a:pPr>
+            <a:r>
+              <a:rPr lang="en-US" sz="1125" kern="0" spc="68" dirty="0">
                 <a:solidFill>
                   <a:srgbClr val="75716A"/>
                 </a:solidFill>
@@ -6198,6 +6179,13 @@
           </a:solidFill>
           <a:ln/>
         </p:spPr>
+        <p:txBody>
+          <a:bodyPr/>
+          <a:lstStyle/>
+          <a:p>
+            <a:endParaRPr lang="en-US"/>
+          </a:p>
+        </p:txBody>
       </p:sp>
       <p:sp>
         <p:nvSpPr>
@@ -6218,15 +6206,15 @@
         </p:spPr>
         <p:txBody>
           <a:bodyPr wrap="square" lIns="25400" tIns="25400" rIns="25400" bIns="25400" rtlCol="0" anchor="ctr">
-            <a:normAutofit/>
-          </a:bodyPr>
-          <a:lstStyle/>
-          <a:p>
-            <a:pPr algn="r" indent="0" marL="0">
-              <a:buNone/>
-            </a:pPr>
-            <a:r>
-              <a:rPr lang="en-US" sz="1125" spc="68" kern="0" dirty="0">
+            <a:normAutofit lnSpcReduction="10000"/>
+          </a:bodyPr>
+          <a:lstStyle/>
+          <a:p>
+            <a:pPr marL="0" indent="0" algn="r">
+              <a:buNone/>
+            </a:pPr>
+            <a:r>
+              <a:rPr lang="en-US" sz="1125" kern="0" spc="68" dirty="0">
                 <a:solidFill>
                   <a:srgbClr val="75716A"/>
                 </a:solidFill>
@@ -6259,6 +6247,13 @@
           </a:solidFill>
           <a:ln/>
         </p:spPr>
+        <p:txBody>
+          <a:bodyPr/>
+          <a:lstStyle/>
+          <a:p>
+            <a:endParaRPr lang="en-US"/>
+          </a:p>
+        </p:txBody>
       </p:sp>
       <p:sp>
         <p:nvSpPr>
@@ -6283,7 +6278,7 @@
           </a:bodyPr>
           <a:lstStyle/>
           <a:p>
-            <a:pPr algn="l" indent="0" marL="0">
+            <a:pPr marL="0" indent="0" algn="l">
               <a:buNone/>
             </a:pPr>
             <a:r>
@@ -6320,6 +6315,13 @@
           </a:solidFill>
           <a:ln/>
         </p:spPr>
+        <p:txBody>
+          <a:bodyPr/>
+          <a:lstStyle/>
+          <a:p>
+            <a:endParaRPr lang="en-US"/>
+          </a:p>
+        </p:txBody>
       </p:sp>
       <p:sp>
         <p:nvSpPr>
@@ -6344,7 +6346,7 @@
           </a:bodyPr>
           <a:lstStyle/>
           <a:p>
-            <a:pPr algn="r" indent="0" marL="0">
+            <a:pPr marL="0" indent="0" algn="r">
               <a:buNone/>
             </a:pPr>
             <a:r>
@@ -6381,6 +6383,13 @@
           </a:solidFill>
           <a:ln/>
         </p:spPr>
+        <p:txBody>
+          <a:bodyPr/>
+          <a:lstStyle/>
+          <a:p>
+            <a:endParaRPr lang="en-US"/>
+          </a:p>
+        </p:txBody>
       </p:sp>
       <p:sp>
         <p:nvSpPr>
@@ -6405,7 +6414,7 @@
           </a:bodyPr>
           <a:lstStyle/>
           <a:p>
-            <a:pPr algn="r" indent="0" marL="0">
+            <a:pPr marL="0" indent="0" algn="r">
               <a:buNone/>
             </a:pPr>
             <a:r>
@@ -6442,6 +6451,13 @@
           </a:solidFill>
           <a:ln/>
         </p:spPr>
+        <p:txBody>
+          <a:bodyPr/>
+          <a:lstStyle/>
+          <a:p>
+            <a:endParaRPr lang="en-US"/>
+          </a:p>
+        </p:txBody>
       </p:sp>
       <p:sp>
         <p:nvSpPr>
@@ -6466,7 +6482,7 @@
           </a:bodyPr>
           <a:lstStyle/>
           <a:p>
-            <a:pPr algn="l" indent="0" marL="0">
+            <a:pPr marL="0" indent="0" algn="l">
               <a:buNone/>
             </a:pPr>
             <a:r>
@@ -6503,6 +6519,13 @@
           </a:solidFill>
           <a:ln/>
         </p:spPr>
+        <p:txBody>
+          <a:bodyPr/>
+          <a:lstStyle/>
+          <a:p>
+            <a:endParaRPr lang="en-US"/>
+          </a:p>
+        </p:txBody>
       </p:sp>
       <p:sp>
         <p:nvSpPr>
@@ -6527,7 +6550,7 @@
           </a:bodyPr>
           <a:lstStyle/>
           <a:p>
-            <a:pPr algn="r" indent="0" marL="0">
+            <a:pPr marL="0" indent="0" algn="r">
               <a:buNone/>
             </a:pPr>
             <a:r>
@@ -6564,6 +6587,13 @@
           </a:solidFill>
           <a:ln/>
         </p:spPr>
+        <p:txBody>
+          <a:bodyPr/>
+          <a:lstStyle/>
+          <a:p>
+            <a:endParaRPr lang="en-US"/>
+          </a:p>
+        </p:txBody>
       </p:sp>
       <p:sp>
         <p:nvSpPr>
@@ -6588,7 +6618,7 @@
           </a:bodyPr>
           <a:lstStyle/>
           <a:p>
-            <a:pPr algn="r" indent="0" marL="0">
+            <a:pPr marL="0" indent="0" algn="r">
               <a:buNone/>
             </a:pPr>
             <a:r>
@@ -6625,6 +6655,13 @@
           </a:solidFill>
           <a:ln/>
         </p:spPr>
+        <p:txBody>
+          <a:bodyPr/>
+          <a:lstStyle/>
+          <a:p>
+            <a:endParaRPr lang="en-US"/>
+          </a:p>
+        </p:txBody>
       </p:sp>
       <p:sp>
         <p:nvSpPr>
@@ -6649,7 +6686,7 @@
           </a:bodyPr>
           <a:lstStyle/>
           <a:p>
-            <a:pPr algn="l" indent="0" marL="0">
+            <a:pPr marL="0" indent="0" algn="l">
               <a:buNone/>
             </a:pPr>
             <a:r>
@@ -6686,6 +6723,13 @@
           </a:solidFill>
           <a:ln/>
         </p:spPr>
+        <p:txBody>
+          <a:bodyPr/>
+          <a:lstStyle/>
+          <a:p>
+            <a:endParaRPr lang="en-US"/>
+          </a:p>
+        </p:txBody>
       </p:sp>
       <p:sp>
         <p:nvSpPr>
@@ -6710,7 +6754,7 @@
           </a:bodyPr>
           <a:lstStyle/>
           <a:p>
-            <a:pPr algn="r" indent="0" marL="0">
+            <a:pPr marL="0" indent="0" algn="r">
               <a:buNone/>
             </a:pPr>
             <a:r>
@@ -6747,6 +6791,13 @@
           </a:solidFill>
           <a:ln/>
         </p:spPr>
+        <p:txBody>
+          <a:bodyPr/>
+          <a:lstStyle/>
+          <a:p>
+            <a:endParaRPr lang="en-US"/>
+          </a:p>
+        </p:txBody>
       </p:sp>
       <p:sp>
         <p:nvSpPr>
@@ -6771,7 +6822,7 @@
           </a:bodyPr>
           <a:lstStyle/>
           <a:p>
-            <a:pPr algn="r" indent="0" marL="0">
+            <a:pPr marL="0" indent="0" algn="r">
               <a:buNone/>
             </a:pPr>
             <a:r>
@@ -6808,6 +6859,13 @@
           </a:solidFill>
           <a:ln/>
         </p:spPr>
+        <p:txBody>
+          <a:bodyPr/>
+          <a:lstStyle/>
+          <a:p>
+            <a:endParaRPr lang="en-US"/>
+          </a:p>
+        </p:txBody>
       </p:sp>
       <p:sp>
         <p:nvSpPr>
@@ -6832,7 +6890,7 @@
           </a:bodyPr>
           <a:lstStyle/>
           <a:p>
-            <a:pPr algn="l" indent="0" marL="0">
+            <a:pPr marL="0" indent="0" algn="l">
               <a:buNone/>
             </a:pPr>
             <a:r>
@@ -6869,6 +6927,13 @@
           </a:solidFill>
           <a:ln/>
         </p:spPr>
+        <p:txBody>
+          <a:bodyPr/>
+          <a:lstStyle/>
+          <a:p>
+            <a:endParaRPr lang="en-US"/>
+          </a:p>
+        </p:txBody>
       </p:sp>
       <p:sp>
         <p:nvSpPr>
@@ -6893,7 +6958,7 @@
           </a:bodyPr>
           <a:lstStyle/>
           <a:p>
-            <a:pPr algn="r" indent="0" marL="0">
+            <a:pPr marL="0" indent="0" algn="r">
               <a:buNone/>
             </a:pPr>
             <a:r>
@@ -6930,6 +6995,13 @@
           </a:solidFill>
           <a:ln/>
         </p:spPr>
+        <p:txBody>
+          <a:bodyPr/>
+          <a:lstStyle/>
+          <a:p>
+            <a:endParaRPr lang="en-US"/>
+          </a:p>
+        </p:txBody>
       </p:sp>
       <p:sp>
         <p:nvSpPr>
@@ -6954,7 +7026,7 @@
           </a:bodyPr>
           <a:lstStyle/>
           <a:p>
-            <a:pPr algn="r" indent="0" marL="0">
+            <a:pPr marL="0" indent="0" algn="r">
               <a:buNone/>
             </a:pPr>
             <a:r>
@@ -6991,6 +7063,13 @@
           </a:solidFill>
           <a:ln/>
         </p:spPr>
+        <p:txBody>
+          <a:bodyPr/>
+          <a:lstStyle/>
+          <a:p>
+            <a:endParaRPr lang="en-US"/>
+          </a:p>
+        </p:txBody>
       </p:sp>
       <p:sp>
         <p:nvSpPr>
@@ -7015,7 +7094,7 @@
           </a:bodyPr>
           <a:lstStyle/>
           <a:p>
-            <a:pPr algn="l" indent="0" marL="0">
+            <a:pPr marL="0" indent="0" algn="l">
               <a:buNone/>
             </a:pPr>
             <a:r>
@@ -7052,6 +7131,13 @@
           </a:solidFill>
           <a:ln/>
         </p:spPr>
+        <p:txBody>
+          <a:bodyPr/>
+          <a:lstStyle/>
+          <a:p>
+            <a:endParaRPr lang="en-US"/>
+          </a:p>
+        </p:txBody>
       </p:sp>
       <p:sp>
         <p:nvSpPr>
@@ -7076,7 +7162,7 @@
           </a:bodyPr>
           <a:lstStyle/>
           <a:p>
-            <a:pPr algn="r" indent="0" marL="0">
+            <a:pPr marL="0" indent="0" algn="r">
               <a:buNone/>
             </a:pPr>
             <a:r>
@@ -7113,6 +7199,13 @@
           </a:solidFill>
           <a:ln/>
         </p:spPr>
+        <p:txBody>
+          <a:bodyPr/>
+          <a:lstStyle/>
+          <a:p>
+            <a:endParaRPr lang="en-US"/>
+          </a:p>
+        </p:txBody>
       </p:sp>
       <p:sp>
         <p:nvSpPr>
@@ -7137,7 +7230,7 @@
           </a:bodyPr>
           <a:lstStyle/>
           <a:p>
-            <a:pPr algn="r" indent="0" marL="0">
+            <a:pPr marL="0" indent="0" algn="r">
               <a:buNone/>
             </a:pPr>
             <a:r>
@@ -7174,6 +7267,13 @@
           </a:solidFill>
           <a:ln/>
         </p:spPr>
+        <p:txBody>
+          <a:bodyPr/>
+          <a:lstStyle/>
+          <a:p>
+            <a:endParaRPr lang="en-US"/>
+          </a:p>
+        </p:txBody>
       </p:sp>
       <p:sp>
         <p:nvSpPr>
@@ -7194,6 +7294,13 @@
           </a:solidFill>
           <a:ln/>
         </p:spPr>
+        <p:txBody>
+          <a:bodyPr/>
+          <a:lstStyle/>
+          <a:p>
+            <a:endParaRPr lang="en-US"/>
+          </a:p>
+        </p:txBody>
       </p:sp>
       <p:sp>
         <p:nvSpPr>
@@ -7214,11 +7321,11 @@
         </p:spPr>
         <p:txBody>
           <a:bodyPr wrap="square" lIns="25400" tIns="25400" rIns="25400" bIns="25400" rtlCol="0" anchor="t">
-            <a:normAutofit/>
-          </a:bodyPr>
-          <a:lstStyle/>
-          <a:p>
-            <a:pPr algn="l" indent="0" marL="0">
+            <a:normAutofit fontScale="92500" lnSpcReduction="10000"/>
+          </a:bodyPr>
+          <a:lstStyle/>
+          <a:p>
+            <a:pPr marL="0" indent="0" algn="l">
               <a:lnSpc>
                 <a:spcPct val="140000"/>
               </a:lnSpc>
@@ -7238,12 +7345,6 @@
               </a:rPr>
               <a:t>Wall-clock growth is a </a:t>
             </a:r>
-            <a:pPr algn="l" indent="0" marL="0">
-              <a:lnSpc>
-                <a:spcPct val="140000"/>
-              </a:lnSpc>
-              <a:buNone/>
-            </a:pPr>
             <a:r>
               <a:rPr lang="en-US" sz="1650" i="1" dirty="0">
                 <a:solidFill>
@@ -7255,12 +7356,6 @@
               </a:rPr>
               <a:t>simulator </a:t>
             </a:r>
-            <a:pPr algn="l" indent="0" marL="0">
-              <a:lnSpc>
-                <a:spcPct val="140000"/>
-              </a:lnSpc>
-              <a:buNone/>
-            </a:pPr>
             <a:r>
               <a:rPr lang="en-US" sz="1650" dirty="0">
                 <a:solidFill>
@@ -7303,6 +7398,13 @@
             <a:prstDash val="solid"/>
           </a:ln>
         </p:spPr>
+        <p:txBody>
+          <a:bodyPr/>
+          <a:lstStyle/>
+          <a:p>
+            <a:endParaRPr lang="en-US"/>
+          </a:p>
+        </p:txBody>
       </p:sp>
       <p:sp>
         <p:nvSpPr>
@@ -7327,11 +7429,11 @@
           </a:bodyPr>
           <a:lstStyle/>
           <a:p>
-            <a:pPr algn="l" indent="0" marL="0">
-              <a:buNone/>
-            </a:pPr>
-            <a:r>
-              <a:rPr lang="en-US" sz="1125" spc="68" kern="0" dirty="0">
+            <a:pPr marL="0" indent="0" algn="l">
+              <a:buNone/>
+            </a:pPr>
+            <a:r>
+              <a:rPr lang="en-US" sz="1125" kern="0" spc="68" dirty="0">
                 <a:solidFill>
                   <a:srgbClr val="161512"/>
                 </a:solidFill>
@@ -7341,11 +7443,8 @@
               </a:rPr>
               <a:t>FIG. 1 </a:t>
             </a:r>
-            <a:pPr algn="l" indent="0" marL="0">
-              <a:buNone/>
-            </a:pPr>
-            <a:r>
-              <a:rPr lang="en-US" sz="1125" spc="68" kern="0" dirty="0">
+            <a:r>
+              <a:rPr lang="en-US" sz="1125" kern="0" spc="68" dirty="0">
                 <a:solidFill>
                   <a:srgbClr val="75716A"/>
                 </a:solidFill>
@@ -7361,14 +7460,14 @@
       </p:sp>
       <p:pic>
         <p:nvPicPr>
-          <p:cNvPr id="50" name="Image 0" descr="preencoded.png">    </p:cNvPr>
+          <p:cNvPr id="50" name="Image 0" descr="preencoded.png"/>
           <p:cNvPicPr>
             <a:picLocks noChangeAspect="1"/>
           </p:cNvPicPr>
           <p:nvPr/>
         </p:nvPicPr>
         <p:blipFill>
-          <a:blip r:embed="rId1"/>
+          <a:blip r:embed="rId3"/>
           <a:stretch>
             <a:fillRect/>
           </a:stretch>
@@ -7402,6 +7501,13 @@
           </a:solidFill>
           <a:ln/>
         </p:spPr>
+        <p:txBody>
+          <a:bodyPr/>
+          <a:lstStyle/>
+          <a:p>
+            <a:endParaRPr lang="en-US"/>
+          </a:p>
+        </p:txBody>
       </p:sp>
       <p:sp>
         <p:nvSpPr>
@@ -7426,11 +7532,11 @@
           </a:bodyPr>
           <a:lstStyle/>
           <a:p>
-            <a:pPr algn="l" indent="0" marL="0">
-              <a:buNone/>
-            </a:pPr>
-            <a:r>
-              <a:rPr lang="en-US" sz="1500" b="1" spc="90" kern="0" dirty="0">
+            <a:pPr marL="0" indent="0" algn="l">
+              <a:buNone/>
+            </a:pPr>
+            <a:r>
+              <a:rPr lang="en-US" sz="1500" b="1" kern="0" spc="90" dirty="0">
                 <a:solidFill>
                   <a:srgbClr val="161512"/>
                 </a:solidFill>
@@ -7467,11 +7573,11 @@
           </a:bodyPr>
           <a:lstStyle/>
           <a:p>
-            <a:pPr algn="r" indent="0" marL="0">
-              <a:buNone/>
-            </a:pPr>
-            <a:r>
-              <a:rPr lang="en-US" sz="1350" spc="27" kern="0" dirty="0">
+            <a:pPr marL="0" indent="0" algn="r">
+              <a:buNone/>
+            </a:pPr>
+            <a:r>
+              <a:rPr lang="en-US" sz="1350" kern="0" spc="27" dirty="0">
                 <a:solidFill>
                   <a:srgbClr val="75716A"/>
                 </a:solidFill>
@@ -7504,6 +7610,13 @@
           </a:solidFill>
           <a:ln/>
         </p:spPr>
+        <p:txBody>
+          <a:bodyPr/>
+          <a:lstStyle/>
+          <a:p>
+            <a:endParaRPr lang="en-US"/>
+          </a:p>
+        </p:txBody>
       </p:sp>
       <p:sp>
         <p:nvSpPr>
@@ -7524,15 +7637,15 @@
         </p:spPr>
         <p:txBody>
           <a:bodyPr wrap="square" lIns="25400" tIns="25400" rIns="25400" bIns="25400" rtlCol="0" anchor="ctr">
-            <a:normAutofit/>
-          </a:bodyPr>
-          <a:lstStyle/>
-          <a:p>
-            <a:pPr algn="l" indent="0" marL="0">
-              <a:buNone/>
-            </a:pPr>
-            <a:r>
-              <a:rPr lang="en-US" sz="1125" spc="68" kern="0" dirty="0">
+            <a:normAutofit lnSpcReduction="10000"/>
+          </a:bodyPr>
+          <a:lstStyle/>
+          <a:p>
+            <a:pPr marL="0" indent="0" algn="l">
+              <a:buNone/>
+            </a:pPr>
+            <a:r>
+              <a:rPr lang="en-US" sz="1125" kern="0" spc="68" dirty="0">
                 <a:solidFill>
                   <a:srgbClr val="75716A"/>
                 </a:solidFill>
@@ -7565,6 +7678,13 @@
           </a:solidFill>
           <a:ln/>
         </p:spPr>
+        <p:txBody>
+          <a:bodyPr/>
+          <a:lstStyle/>
+          <a:p>
+            <a:endParaRPr lang="en-US"/>
+          </a:p>
+        </p:txBody>
       </p:sp>
       <p:sp>
         <p:nvSpPr>
@@ -7585,15 +7705,15 @@
         </p:spPr>
         <p:txBody>
           <a:bodyPr wrap="square" lIns="25400" tIns="25400" rIns="25400" bIns="25400" rtlCol="0" anchor="ctr">
-            <a:normAutofit/>
-          </a:bodyPr>
-          <a:lstStyle/>
-          <a:p>
-            <a:pPr algn="r" indent="0" marL="0">
-              <a:buNone/>
-            </a:pPr>
-            <a:r>
-              <a:rPr lang="en-US" sz="1125" spc="68" kern="0" dirty="0">
+            <a:normAutofit lnSpcReduction="10000"/>
+          </a:bodyPr>
+          <a:lstStyle/>
+          <a:p>
+            <a:pPr marL="0" indent="0" algn="r">
+              <a:buNone/>
+            </a:pPr>
+            <a:r>
+              <a:rPr lang="en-US" sz="1125" kern="0" spc="68" dirty="0">
                 <a:solidFill>
                   <a:srgbClr val="75716A"/>
                 </a:solidFill>
@@ -7626,6 +7746,13 @@
           </a:solidFill>
           <a:ln/>
         </p:spPr>
+        <p:txBody>
+          <a:bodyPr/>
+          <a:lstStyle/>
+          <a:p>
+            <a:endParaRPr lang="en-US"/>
+          </a:p>
+        </p:txBody>
       </p:sp>
       <p:sp>
         <p:nvSpPr>
@@ -7646,15 +7773,15 @@
         </p:spPr>
         <p:txBody>
           <a:bodyPr wrap="square" lIns="25400" tIns="25400" rIns="25400" bIns="25400" rtlCol="0" anchor="ctr">
-            <a:normAutofit/>
-          </a:bodyPr>
-          <a:lstStyle/>
-          <a:p>
-            <a:pPr algn="r" indent="0" marL="0">
-              <a:buNone/>
-            </a:pPr>
-            <a:r>
-              <a:rPr lang="en-US" sz="1125" spc="68" kern="0" dirty="0">
+            <a:normAutofit lnSpcReduction="10000"/>
+          </a:bodyPr>
+          <a:lstStyle/>
+          <a:p>
+            <a:pPr marL="0" indent="0" algn="r">
+              <a:buNone/>
+            </a:pPr>
+            <a:r>
+              <a:rPr lang="en-US" sz="1125" kern="0" spc="68" dirty="0">
                 <a:solidFill>
                   <a:srgbClr val="75716A"/>
                 </a:solidFill>
@@ -7687,6 +7814,13 @@
           </a:solidFill>
           <a:ln/>
         </p:spPr>
+        <p:txBody>
+          <a:bodyPr/>
+          <a:lstStyle/>
+          <a:p>
+            <a:endParaRPr lang="en-US"/>
+          </a:p>
+        </p:txBody>
       </p:sp>
       <p:sp>
         <p:nvSpPr>
@@ -7707,15 +7841,15 @@
         </p:spPr>
         <p:txBody>
           <a:bodyPr wrap="square" lIns="25400" tIns="25400" rIns="25400" bIns="25400" rtlCol="0" anchor="ctr">
-            <a:normAutofit/>
-          </a:bodyPr>
-          <a:lstStyle/>
-          <a:p>
-            <a:pPr algn="r" indent="0" marL="0">
-              <a:buNone/>
-            </a:pPr>
-            <a:r>
-              <a:rPr lang="en-US" sz="1125" spc="68" kern="0" dirty="0">
+            <a:normAutofit lnSpcReduction="10000"/>
+          </a:bodyPr>
+          <a:lstStyle/>
+          <a:p>
+            <a:pPr marL="0" indent="0" algn="r">
+              <a:buNone/>
+            </a:pPr>
+            <a:r>
+              <a:rPr lang="en-US" sz="1125" kern="0" spc="68" dirty="0">
                 <a:solidFill>
                   <a:srgbClr val="75716A"/>
                 </a:solidFill>
@@ -7748,6 +7882,13 @@
           </a:solidFill>
           <a:ln/>
         </p:spPr>
+        <p:txBody>
+          <a:bodyPr/>
+          <a:lstStyle/>
+          <a:p>
+            <a:endParaRPr lang="en-US"/>
+          </a:p>
+        </p:txBody>
       </p:sp>
       <p:sp>
         <p:nvSpPr>
@@ -7768,15 +7909,15 @@
         </p:spPr>
         <p:txBody>
           <a:bodyPr wrap="square" lIns="25400" tIns="25400" rIns="25400" bIns="25400" rtlCol="0" anchor="ctr">
-            <a:normAutofit/>
-          </a:bodyPr>
-          <a:lstStyle/>
-          <a:p>
-            <a:pPr algn="r" indent="0" marL="0">
-              <a:buNone/>
-            </a:pPr>
-            <a:r>
-              <a:rPr lang="en-US" sz="1125" spc="68" kern="0" dirty="0">
+            <a:normAutofit lnSpcReduction="10000"/>
+          </a:bodyPr>
+          <a:lstStyle/>
+          <a:p>
+            <a:pPr marL="0" indent="0" algn="r">
+              <a:buNone/>
+            </a:pPr>
+            <a:r>
+              <a:rPr lang="en-US" sz="1125" kern="0" spc="68" dirty="0">
                 <a:solidFill>
                   <a:srgbClr val="75716A"/>
                 </a:solidFill>
@@ -7809,6 +7950,13 @@
           </a:solidFill>
           <a:ln/>
         </p:spPr>
+        <p:txBody>
+          <a:bodyPr/>
+          <a:lstStyle/>
+          <a:p>
+            <a:endParaRPr lang="en-US"/>
+          </a:p>
+        </p:txBody>
       </p:sp>
       <p:sp>
         <p:nvSpPr>
@@ -7829,15 +7977,15 @@
         </p:spPr>
         <p:txBody>
           <a:bodyPr wrap="square" lIns="25400" tIns="25400" rIns="25400" bIns="25400" rtlCol="0" anchor="ctr">
-            <a:normAutofit/>
-          </a:bodyPr>
-          <a:lstStyle/>
-          <a:p>
-            <a:pPr algn="r" indent="0" marL="0">
-              <a:buNone/>
-            </a:pPr>
-            <a:r>
-              <a:rPr lang="en-US" sz="1125" spc="68" kern="0" dirty="0">
+            <a:normAutofit lnSpcReduction="10000"/>
+          </a:bodyPr>
+          <a:lstStyle/>
+          <a:p>
+            <a:pPr marL="0" indent="0" algn="r">
+              <a:buNone/>
+            </a:pPr>
+            <a:r>
+              <a:rPr lang="en-US" sz="1125" kern="0" spc="68" dirty="0">
                 <a:solidFill>
                   <a:srgbClr val="75716A"/>
                 </a:solidFill>
@@ -7870,6 +8018,13 @@
           </a:solidFill>
           <a:ln/>
         </p:spPr>
+        <p:txBody>
+          <a:bodyPr/>
+          <a:lstStyle/>
+          <a:p>
+            <a:endParaRPr lang="en-US"/>
+          </a:p>
+        </p:txBody>
       </p:sp>
       <p:sp>
         <p:nvSpPr>
@@ -7894,7 +8049,7 @@
           </a:bodyPr>
           <a:lstStyle/>
           <a:p>
-            <a:pPr algn="l" indent="0" marL="0">
+            <a:pPr marL="0" indent="0" algn="l">
               <a:buNone/>
             </a:pPr>
             <a:r>
@@ -7931,6 +8086,13 @@
           </a:solidFill>
           <a:ln/>
         </p:spPr>
+        <p:txBody>
+          <a:bodyPr/>
+          <a:lstStyle/>
+          <a:p>
+            <a:endParaRPr lang="en-US"/>
+          </a:p>
+        </p:txBody>
       </p:sp>
       <p:sp>
         <p:nvSpPr>
@@ -7955,7 +8117,7 @@
           </a:bodyPr>
           <a:lstStyle/>
           <a:p>
-            <a:pPr algn="r" indent="0" marL="0">
+            <a:pPr marL="0" indent="0" algn="r">
               <a:buNone/>
             </a:pPr>
             <a:r>
@@ -7992,6 +8154,13 @@
           </a:solidFill>
           <a:ln/>
         </p:spPr>
+        <p:txBody>
+          <a:bodyPr/>
+          <a:lstStyle/>
+          <a:p>
+            <a:endParaRPr lang="en-US"/>
+          </a:p>
+        </p:txBody>
       </p:sp>
       <p:sp>
         <p:nvSpPr>
@@ -8016,7 +8185,7 @@
           </a:bodyPr>
           <a:lstStyle/>
           <a:p>
-            <a:pPr algn="r" indent="0" marL="0">
+            <a:pPr marL="0" indent="0" algn="r">
               <a:buNone/>
             </a:pPr>
             <a:r>
@@ -8053,6 +8222,13 @@
           </a:solidFill>
           <a:ln/>
         </p:spPr>
+        <p:txBody>
+          <a:bodyPr/>
+          <a:lstStyle/>
+          <a:p>
+            <a:endParaRPr lang="en-US"/>
+          </a:p>
+        </p:txBody>
       </p:sp>
       <p:sp>
         <p:nvSpPr>
@@ -8077,7 +8253,7 @@
           </a:bodyPr>
           <a:lstStyle/>
           <a:p>
-            <a:pPr algn="r" indent="0" marL="0">
+            <a:pPr marL="0" indent="0" algn="r">
               <a:buNone/>
             </a:pPr>
             <a:r>
@@ -8114,6 +8290,13 @@
           </a:solidFill>
           <a:ln/>
         </p:spPr>
+        <p:txBody>
+          <a:bodyPr/>
+          <a:lstStyle/>
+          <a:p>
+            <a:endParaRPr lang="en-US"/>
+          </a:p>
+        </p:txBody>
       </p:sp>
       <p:sp>
         <p:nvSpPr>
@@ -8138,7 +8321,7 @@
           </a:bodyPr>
           <a:lstStyle/>
           <a:p>
-            <a:pPr algn="r" indent="0" marL="0">
+            <a:pPr marL="0" indent="0" algn="r">
               <a:buNone/>
             </a:pPr>
             <a:r>
@@ -8175,6 +8358,13 @@
           </a:solidFill>
           <a:ln/>
         </p:spPr>
+        <p:txBody>
+          <a:bodyPr/>
+          <a:lstStyle/>
+          <a:p>
+            <a:endParaRPr lang="en-US"/>
+          </a:p>
+        </p:txBody>
       </p:sp>
       <p:sp>
         <p:nvSpPr>
@@ -8199,7 +8389,7 @@
           </a:bodyPr>
           <a:lstStyle/>
           <a:p>
-            <a:pPr algn="r" indent="0" marL="0">
+            <a:pPr marL="0" indent="0" algn="r">
               <a:buNone/>
             </a:pPr>
             <a:r>
@@ -8236,6 +8426,13 @@
           </a:solidFill>
           <a:ln/>
         </p:spPr>
+        <p:txBody>
+          <a:bodyPr/>
+          <a:lstStyle/>
+          <a:p>
+            <a:endParaRPr lang="en-US"/>
+          </a:p>
+        </p:txBody>
       </p:sp>
       <p:sp>
         <p:nvSpPr>
@@ -8260,7 +8457,7 @@
           </a:bodyPr>
           <a:lstStyle/>
           <a:p>
-            <a:pPr algn="l" indent="0" marL="0">
+            <a:pPr marL="0" indent="0" algn="l">
               <a:buNone/>
             </a:pPr>
             <a:r>
@@ -8297,6 +8494,13 @@
           </a:solidFill>
           <a:ln/>
         </p:spPr>
+        <p:txBody>
+          <a:bodyPr/>
+          <a:lstStyle/>
+          <a:p>
+            <a:endParaRPr lang="en-US"/>
+          </a:p>
+        </p:txBody>
       </p:sp>
       <p:sp>
         <p:nvSpPr>
@@ -8321,7 +8525,7 @@
           </a:bodyPr>
           <a:lstStyle/>
           <a:p>
-            <a:pPr algn="r" indent="0" marL="0">
+            <a:pPr marL="0" indent="0" algn="r">
               <a:buNone/>
             </a:pPr>
             <a:r>
@@ -8358,6 +8562,13 @@
           </a:solidFill>
           <a:ln/>
         </p:spPr>
+        <p:txBody>
+          <a:bodyPr/>
+          <a:lstStyle/>
+          <a:p>
+            <a:endParaRPr lang="en-US"/>
+          </a:p>
+        </p:txBody>
       </p:sp>
       <p:sp>
         <p:nvSpPr>
@@ -8382,7 +8593,7 @@
           </a:bodyPr>
           <a:lstStyle/>
           <a:p>
-            <a:pPr algn="r" indent="0" marL="0">
+            <a:pPr marL="0" indent="0" algn="r">
               <a:buNone/>
             </a:pPr>
             <a:r>
@@ -8419,6 +8630,13 @@
           </a:solidFill>
           <a:ln/>
         </p:spPr>
+        <p:txBody>
+          <a:bodyPr/>
+          <a:lstStyle/>
+          <a:p>
+            <a:endParaRPr lang="en-US"/>
+          </a:p>
+        </p:txBody>
       </p:sp>
       <p:sp>
         <p:nvSpPr>
@@ -8443,7 +8661,7 @@
           </a:bodyPr>
           <a:lstStyle/>
           <a:p>
-            <a:pPr algn="r" indent="0" marL="0">
+            <a:pPr marL="0" indent="0" algn="r">
               <a:buNone/>
             </a:pPr>
             <a:r>
@@ -8480,6 +8698,13 @@
           </a:solidFill>
           <a:ln/>
         </p:spPr>
+        <p:txBody>
+          <a:bodyPr/>
+          <a:lstStyle/>
+          <a:p>
+            <a:endParaRPr lang="en-US"/>
+          </a:p>
+        </p:txBody>
       </p:sp>
       <p:sp>
         <p:nvSpPr>
@@ -8504,7 +8729,7 @@
           </a:bodyPr>
           <a:lstStyle/>
           <a:p>
-            <a:pPr algn="r" indent="0" marL="0">
+            <a:pPr marL="0" indent="0" algn="r">
               <a:buNone/>
             </a:pPr>
             <a:r>
@@ -8541,6 +8766,13 @@
           </a:solidFill>
           <a:ln/>
         </p:spPr>
+        <p:txBody>
+          <a:bodyPr/>
+          <a:lstStyle/>
+          <a:p>
+            <a:endParaRPr lang="en-US"/>
+          </a:p>
+        </p:txBody>
       </p:sp>
       <p:sp>
         <p:nvSpPr>
@@ -8565,7 +8797,7 @@
           </a:bodyPr>
           <a:lstStyle/>
           <a:p>
-            <a:pPr algn="r" indent="0" marL="0">
+            <a:pPr marL="0" indent="0" algn="r">
               <a:buNone/>
             </a:pPr>
             <a:r>
@@ -8602,6 +8834,13 @@
           </a:solidFill>
           <a:ln/>
         </p:spPr>
+        <p:txBody>
+          <a:bodyPr/>
+          <a:lstStyle/>
+          <a:p>
+            <a:endParaRPr lang="en-US"/>
+          </a:p>
+        </p:txBody>
       </p:sp>
       <p:sp>
         <p:nvSpPr>
@@ -8626,7 +8865,7 @@
           </a:bodyPr>
           <a:lstStyle/>
           <a:p>
-            <a:pPr algn="l" indent="0" marL="0">
+            <a:pPr marL="0" indent="0" algn="l">
               <a:buNone/>
             </a:pPr>
             <a:r>
@@ -8663,6 +8902,13 @@
           </a:solidFill>
           <a:ln/>
         </p:spPr>
+        <p:txBody>
+          <a:bodyPr/>
+          <a:lstStyle/>
+          <a:p>
+            <a:endParaRPr lang="en-US"/>
+          </a:p>
+        </p:txBody>
       </p:sp>
       <p:sp>
         <p:nvSpPr>
@@ -8687,7 +8933,7 @@
           </a:bodyPr>
           <a:lstStyle/>
           <a:p>
-            <a:pPr algn="r" indent="0" marL="0">
+            <a:pPr marL="0" indent="0" algn="r">
               <a:buNone/>
             </a:pPr>
             <a:r>
@@ -8724,6 +8970,13 @@
           </a:solidFill>
           <a:ln/>
         </p:spPr>
+        <p:txBody>
+          <a:bodyPr/>
+          <a:lstStyle/>
+          <a:p>
+            <a:endParaRPr lang="en-US"/>
+          </a:p>
+        </p:txBody>
       </p:sp>
       <p:sp>
         <p:nvSpPr>
@@ -8748,7 +9001,7 @@
           </a:bodyPr>
           <a:lstStyle/>
           <a:p>
-            <a:pPr algn="r" indent="0" marL="0">
+            <a:pPr marL="0" indent="0" algn="r">
               <a:buNone/>
             </a:pPr>
             <a:r>
@@ -8785,6 +9038,13 @@
           </a:solidFill>
           <a:ln/>
         </p:spPr>
+        <p:txBody>
+          <a:bodyPr/>
+          <a:lstStyle/>
+          <a:p>
+            <a:endParaRPr lang="en-US"/>
+          </a:p>
+        </p:txBody>
       </p:sp>
       <p:sp>
         <p:nvSpPr>
@@ -8809,7 +9069,7 @@
           </a:bodyPr>
           <a:lstStyle/>
           <a:p>
-            <a:pPr algn="r" indent="0" marL="0">
+            <a:pPr marL="0" indent="0" algn="r">
               <a:buNone/>
             </a:pPr>
             <a:r>
@@ -8846,6 +9106,13 @@
           </a:solidFill>
           <a:ln/>
         </p:spPr>
+        <p:txBody>
+          <a:bodyPr/>
+          <a:lstStyle/>
+          <a:p>
+            <a:endParaRPr lang="en-US"/>
+          </a:p>
+        </p:txBody>
       </p:sp>
       <p:sp>
         <p:nvSpPr>
@@ -8870,7 +9137,7 @@
           </a:bodyPr>
           <a:lstStyle/>
           <a:p>
-            <a:pPr algn="r" indent="0" marL="0">
+            <a:pPr marL="0" indent="0" algn="r">
               <a:buNone/>
             </a:pPr>
             <a:r>
@@ -8907,6 +9174,13 @@
           </a:solidFill>
           <a:ln/>
         </p:spPr>
+        <p:txBody>
+          <a:bodyPr/>
+          <a:lstStyle/>
+          <a:p>
+            <a:endParaRPr lang="en-US"/>
+          </a:p>
+        </p:txBody>
       </p:sp>
       <p:sp>
         <p:nvSpPr>
@@ -8931,7 +9205,7 @@
           </a:bodyPr>
           <a:lstStyle/>
           <a:p>
-            <a:pPr algn="r" indent="0" marL="0">
+            <a:pPr marL="0" indent="0" algn="r">
               <a:buNone/>
             </a:pPr>
             <a:r>
@@ -8968,6 +9242,13 @@
           </a:solidFill>
           <a:ln/>
         </p:spPr>
+        <p:txBody>
+          <a:bodyPr/>
+          <a:lstStyle/>
+          <a:p>
+            <a:endParaRPr lang="en-US"/>
+          </a:p>
+        </p:txBody>
       </p:sp>
       <p:sp>
         <p:nvSpPr>
@@ -8992,7 +9273,7 @@
           </a:bodyPr>
           <a:lstStyle/>
           <a:p>
-            <a:pPr algn="l" indent="0" marL="0">
+            <a:pPr marL="0" indent="0" algn="l">
               <a:buNone/>
             </a:pPr>
             <a:r>
@@ -9029,6 +9310,13 @@
           </a:solidFill>
           <a:ln/>
         </p:spPr>
+        <p:txBody>
+          <a:bodyPr/>
+          <a:lstStyle/>
+          <a:p>
+            <a:endParaRPr lang="en-US"/>
+          </a:p>
+        </p:txBody>
       </p:sp>
       <p:sp>
         <p:nvSpPr>
@@ -9053,7 +9341,7 @@
           </a:bodyPr>
           <a:lstStyle/>
           <a:p>
-            <a:pPr algn="r" indent="0" marL="0">
+            <a:pPr marL="0" indent="0" algn="r">
               <a:buNone/>
             </a:pPr>
             <a:r>
@@ -9090,6 +9378,13 @@
           </a:solidFill>
           <a:ln/>
         </p:spPr>
+        <p:txBody>
+          <a:bodyPr/>
+          <a:lstStyle/>
+          <a:p>
+            <a:endParaRPr lang="en-US"/>
+          </a:p>
+        </p:txBody>
       </p:sp>
       <p:sp>
         <p:nvSpPr>
@@ -9114,7 +9409,7 @@
           </a:bodyPr>
           <a:lstStyle/>
           <a:p>
-            <a:pPr algn="r" indent="0" marL="0">
+            <a:pPr marL="0" indent="0" algn="r">
               <a:buNone/>
             </a:pPr>
             <a:r>
@@ -9151,6 +9446,13 @@
           </a:solidFill>
           <a:ln/>
         </p:spPr>
+        <p:txBody>
+          <a:bodyPr/>
+          <a:lstStyle/>
+          <a:p>
+            <a:endParaRPr lang="en-US"/>
+          </a:p>
+        </p:txBody>
       </p:sp>
       <p:sp>
         <p:nvSpPr>
@@ -9175,7 +9477,7 @@
           </a:bodyPr>
           <a:lstStyle/>
           <a:p>
-            <a:pPr algn="r" indent="0" marL="0">
+            <a:pPr marL="0" indent="0" algn="r">
               <a:buNone/>
             </a:pPr>
             <a:r>
@@ -9212,6 +9514,13 @@
           </a:solidFill>
           <a:ln/>
         </p:spPr>
+        <p:txBody>
+          <a:bodyPr/>
+          <a:lstStyle/>
+          <a:p>
+            <a:endParaRPr lang="en-US"/>
+          </a:p>
+        </p:txBody>
       </p:sp>
       <p:sp>
         <p:nvSpPr>
@@ -9236,7 +9545,7 @@
           </a:bodyPr>
           <a:lstStyle/>
           <a:p>
-            <a:pPr algn="r" indent="0" marL="0">
+            <a:pPr marL="0" indent="0" algn="r">
               <a:buNone/>
             </a:pPr>
             <a:r>
@@ -9273,6 +9582,13 @@
           </a:solidFill>
           <a:ln/>
         </p:spPr>
+        <p:txBody>
+          <a:bodyPr/>
+          <a:lstStyle/>
+          <a:p>
+            <a:endParaRPr lang="en-US"/>
+          </a:p>
+        </p:txBody>
       </p:sp>
       <p:sp>
         <p:nvSpPr>
@@ -9297,7 +9613,7 @@
           </a:bodyPr>
           <a:lstStyle/>
           <a:p>
-            <a:pPr algn="r" indent="0" marL="0">
+            <a:pPr marL="0" indent="0" algn="r">
               <a:buNone/>
             </a:pPr>
             <a:r>
@@ -9334,6 +9650,13 @@
           </a:solidFill>
           <a:ln/>
         </p:spPr>
+        <p:txBody>
+          <a:bodyPr/>
+          <a:lstStyle/>
+          <a:p>
+            <a:endParaRPr lang="en-US"/>
+          </a:p>
+        </p:txBody>
       </p:sp>
       <p:sp>
         <p:nvSpPr>
@@ -9354,6 +9677,13 @@
           </a:solidFill>
           <a:ln/>
         </p:spPr>
+        <p:txBody>
+          <a:bodyPr/>
+          <a:lstStyle/>
+          <a:p>
+            <a:endParaRPr lang="en-US"/>
+          </a:p>
+        </p:txBody>
       </p:sp>
       <p:sp>
         <p:nvSpPr>
@@ -9374,11 +9704,11 @@
         </p:spPr>
         <p:txBody>
           <a:bodyPr wrap="square" lIns="25400" tIns="25400" rIns="25400" bIns="25400" rtlCol="0" anchor="t">
-            <a:normAutofit/>
-          </a:bodyPr>
-          <a:lstStyle/>
-          <a:p>
-            <a:pPr algn="l" indent="0" marL="0">
+            <a:normAutofit fontScale="92500" lnSpcReduction="10000"/>
+          </a:bodyPr>
+          <a:lstStyle/>
+          <a:p>
+            <a:pPr marL="0" indent="0" algn="l">
               <a:lnSpc>
                 <a:spcPct val="140000"/>
               </a:lnSpc>
@@ -9418,6 +9748,13 @@
           </a:solidFill>
           <a:ln/>
         </p:spPr>
+        <p:txBody>
+          <a:bodyPr/>
+          <a:lstStyle/>
+          <a:p>
+            <a:endParaRPr lang="en-US"/>
+          </a:p>
+        </p:txBody>
       </p:sp>
       <p:sp>
         <p:nvSpPr>
@@ -9438,6 +9775,13 @@
           </a:solidFill>
           <a:ln/>
         </p:spPr>
+        <p:txBody>
+          <a:bodyPr/>
+          <a:lstStyle/>
+          <a:p>
+            <a:endParaRPr lang="en-US"/>
+          </a:p>
+        </p:txBody>
       </p:sp>
       <p:sp>
         <p:nvSpPr>
@@ -9458,11 +9802,11 @@
         </p:spPr>
         <p:txBody>
           <a:bodyPr wrap="square" lIns="25400" tIns="25400" rIns="25400" bIns="25400" rtlCol="0" anchor="t">
-            <a:normAutofit/>
-          </a:bodyPr>
-          <a:lstStyle/>
-          <a:p>
-            <a:pPr algn="l" indent="0" marL="0">
+            <a:normAutofit fontScale="92500" lnSpcReduction="10000"/>
+          </a:bodyPr>
+          <a:lstStyle/>
+          <a:p>
+            <a:pPr marL="0" indent="0" algn="l">
               <a:lnSpc>
                 <a:spcPct val="140000"/>
               </a:lnSpc>
@@ -9479,12 +9823,6 @@
               </a:rPr>
               <a:t>Limitation: </a:t>
             </a:r>
-            <a:pPr algn="l" indent="0" marL="0">
-              <a:lnSpc>
-                <a:spcPct val="140000"/>
-              </a:lnSpc>
-              <a:buNone/>
-            </a:pPr>
             <a:r>
               <a:rPr lang="en-US" sz="1650" dirty="0">
                 <a:solidFill>
@@ -9499,12 +9837,6 @@
               </a:rPr>
               <a:t>The list-size bound </a:t>
             </a:r>
-            <a:pPr algn="l" indent="0" marL="0">
-              <a:lnSpc>
-                <a:spcPct val="140000"/>
-              </a:lnSpc>
-              <a:buNone/>
-            </a:pPr>
             <a:r>
               <a:rPr lang="en-US" sz="1650" i="1" dirty="0">
                 <a:solidFill>
@@ -9516,12 +9848,6 @@
               </a:rPr>
               <a:t>64b²/ϑ² </a:t>
             </a:r>
-            <a:pPr algn="l" indent="0" marL="0">
-              <a:lnSpc>
-                <a:spcPct val="140000"/>
-              </a:lnSpc>
-              <a:buNone/>
-            </a:pPr>
             <a:r>
               <a:rPr lang="en-US" sz="1650" dirty="0">
                 <a:solidFill>
@@ -9536,12 +9862,6 @@
               </a:rPr>
               <a:t>≈ 711 never triggered: largest adversarial list submitted had </a:t>
             </a:r>
-            <a:pPr algn="l" indent="0" marL="0">
-              <a:lnSpc>
-                <a:spcPct val="140000"/>
-              </a:lnSpc>
-              <a:buNone/>
-            </a:pPr>
             <a:r>
               <a:rPr lang="en-US" sz="1650" i="1" dirty="0">
                 <a:solidFill>
@@ -9553,12 +9873,6 @@
               </a:rPr>
               <a:t>|L| = 10</a:t>
             </a:r>
-            <a:pPr algn="l" indent="0" marL="0">
-              <a:lnSpc>
-                <a:spcPct val="140000"/>
-              </a:lnSpc>
-              <a:buNone/>
-            </a:pPr>
             <a:r>
               <a:rPr lang="en-US" sz="1650" dirty="0">
                 <a:solidFill>
@@ -9596,6 +9910,13 @@
           </a:solidFill>
           <a:ln/>
         </p:spPr>
+        <p:txBody>
+          <a:bodyPr/>
+          <a:lstStyle/>
+          <a:p>
+            <a:endParaRPr lang="en-US"/>
+          </a:p>
+        </p:txBody>
       </p:sp>
       <p:sp>
         <p:nvSpPr>
@@ -9620,11 +9941,11 @@
           </a:bodyPr>
           <a:lstStyle/>
           <a:p>
-            <a:pPr algn="l" indent="0" marL="0">
-              <a:buNone/>
-            </a:pPr>
-            <a:r>
-              <a:rPr lang="en-US" sz="1200" spc="48" kern="0" dirty="0">
+            <a:pPr marL="0" indent="0" algn="l">
+              <a:buNone/>
+            </a:pPr>
+            <a:r>
+              <a:rPr lang="en-US" sz="1200" kern="0" spc="48" dirty="0">
                 <a:solidFill>
                   <a:srgbClr val="3A3733"/>
                 </a:solidFill>
@@ -9654,6 +9975,7 @@
         <a:solidFill>
           <a:srgbClr val="F6F3EC"/>
         </a:solidFill>
+        <a:effectLst/>
       </p:bgPr>
     </p:bg>
     <p:spTree>
@@ -9689,6 +10011,13 @@
           </a:solidFill>
           <a:ln/>
         </p:spPr>
+        <p:txBody>
+          <a:bodyPr/>
+          <a:lstStyle/>
+          <a:p>
+            <a:endParaRPr lang="en-US"/>
+          </a:p>
+        </p:txBody>
       </p:sp>
       <p:sp>
         <p:nvSpPr>
@@ -9713,11 +10042,11 @@
           </a:bodyPr>
           <a:lstStyle/>
           <a:p>
-            <a:pPr algn="l" indent="0" marL="0">
-              <a:buNone/>
-            </a:pPr>
-            <a:r>
-              <a:rPr lang="en-US" sz="1350" b="1" spc="54" kern="0" dirty="0">
+            <a:pPr marL="0" indent="0" algn="l">
+              <a:buNone/>
+            </a:pPr>
+            <a:r>
+              <a:rPr lang="en-US" sz="1350" b="1" kern="0" spc="54" dirty="0">
                 <a:solidFill>
                   <a:srgbClr val="161512"/>
                 </a:solidFill>
@@ -9750,18 +10079,18 @@
         </p:spPr>
         <p:txBody>
           <a:bodyPr wrap="square" lIns="25400" tIns="25400" rIns="25400" bIns="25400" rtlCol="0" anchor="t">
-            <a:normAutofit/>
-          </a:bodyPr>
-          <a:lstStyle/>
-          <a:p>
-            <a:pPr algn="l" indent="0" marL="0">
+            <a:normAutofit fontScale="92500" lnSpcReduction="10000"/>
+          </a:bodyPr>
+          <a:lstStyle/>
+          <a:p>
+            <a:pPr marL="0" indent="0" algn="l">
               <a:lnSpc>
                 <a:spcPct val="112000"/>
               </a:lnSpc>
               <a:buNone/>
             </a:pPr>
             <a:r>
-              <a:rPr lang="en-US" sz="3900" spc="-58" kern="0" dirty="0">
+              <a:rPr lang="en-US" sz="3900" kern="0" spc="-58" dirty="0">
                 <a:solidFill>
                   <a:srgbClr val="161512"/>
                 </a:solidFill>
@@ -9794,6 +10123,13 @@
           </a:solidFill>
           <a:ln/>
         </p:spPr>
+        <p:txBody>
+          <a:bodyPr/>
+          <a:lstStyle/>
+          <a:p>
+            <a:endParaRPr lang="en-US"/>
+          </a:p>
+        </p:txBody>
       </p:sp>
       <p:sp>
         <p:nvSpPr>
@@ -9814,15 +10150,15 @@
         </p:spPr>
         <p:txBody>
           <a:bodyPr wrap="square" lIns="25400" tIns="25400" rIns="25400" bIns="25400" rtlCol="0" anchor="t">
-            <a:normAutofit/>
-          </a:bodyPr>
-          <a:lstStyle/>
-          <a:p>
-            <a:pPr algn="l" indent="0" marL="0">
-              <a:buNone/>
-            </a:pPr>
-            <a:r>
-              <a:rPr lang="en-US" sz="1500" b="1" spc="90" kern="0" dirty="0">
+            <a:normAutofit fontScale="92500"/>
+          </a:bodyPr>
+          <a:lstStyle/>
+          <a:p>
+            <a:pPr marL="0" indent="0" algn="l">
+              <a:buNone/>
+            </a:pPr>
+            <a:r>
+              <a:rPr lang="en-US" sz="1500" b="1" kern="0" spc="90" dirty="0">
                 <a:solidFill>
                   <a:srgbClr val="161512"/>
                 </a:solidFill>
@@ -9859,11 +10195,11 @@
           </a:bodyPr>
           <a:lstStyle/>
           <a:p>
-            <a:pPr algn="r" indent="0" marL="0">
-              <a:buNone/>
-            </a:pPr>
-            <a:r>
-              <a:rPr lang="en-US" sz="1350" spc="27" kern="0" dirty="0">
+            <a:pPr marL="0" indent="0" algn="r">
+              <a:buNone/>
+            </a:pPr>
+            <a:r>
+              <a:rPr lang="en-US" sz="1350" kern="0" spc="27" dirty="0">
                 <a:solidFill>
                   <a:srgbClr val="75716A"/>
                 </a:solidFill>
@@ -9901,17 +10237,24 @@
             <a:prstDash val="solid"/>
           </a:ln>
         </p:spPr>
+        <p:txBody>
+          <a:bodyPr/>
+          <a:lstStyle/>
+          <a:p>
+            <a:endParaRPr lang="en-US"/>
+          </a:p>
+        </p:txBody>
       </p:sp>
       <p:pic>
         <p:nvPicPr>
-          <p:cNvPr id="9" name="Image 0" descr="preencoded.png">    </p:cNvPr>
+          <p:cNvPr id="9" name="Image 0" descr="preencoded.png"/>
           <p:cNvPicPr>
             <a:picLocks noChangeAspect="1"/>
           </p:cNvPicPr>
           <p:nvPr/>
         </p:nvPicPr>
         <p:blipFill>
-          <a:blip r:embed="rId1"/>
+          <a:blip r:embed="rId3"/>
           <a:stretch>
             <a:fillRect/>
           </a:stretch>
@@ -9945,6 +10288,13 @@
           </a:solidFill>
           <a:ln/>
         </p:spPr>
+        <p:txBody>
+          <a:bodyPr/>
+          <a:lstStyle/>
+          <a:p>
+            <a:endParaRPr lang="en-US"/>
+          </a:p>
+        </p:txBody>
       </p:sp>
       <p:sp>
         <p:nvSpPr>
@@ -9969,11 +10319,11 @@
           </a:bodyPr>
           <a:lstStyle/>
           <a:p>
-            <a:pPr algn="l" indent="0" marL="0">
-              <a:buNone/>
-            </a:pPr>
-            <a:r>
-              <a:rPr lang="en-US" sz="1500" b="1" spc="90" kern="0" dirty="0">
+            <a:pPr marL="0" indent="0" algn="l">
+              <a:buNone/>
+            </a:pPr>
+            <a:r>
+              <a:rPr lang="en-US" sz="1500" b="1" kern="0" spc="90" dirty="0">
                 <a:solidFill>
                   <a:srgbClr val="161512"/>
                 </a:solidFill>
@@ -10010,11 +10360,11 @@
           </a:bodyPr>
           <a:lstStyle/>
           <a:p>
-            <a:pPr algn="r" indent="0" marL="0">
-              <a:buNone/>
-            </a:pPr>
-            <a:r>
-              <a:rPr lang="en-US" sz="1350" spc="27" kern="0" dirty="0">
+            <a:pPr marL="0" indent="0" algn="r">
+              <a:buNone/>
+            </a:pPr>
+            <a:r>
+              <a:rPr lang="en-US" sz="1350" kern="0" spc="27" dirty="0">
                 <a:solidFill>
                   <a:srgbClr val="75716A"/>
                 </a:solidFill>
@@ -10047,11 +10397,11 @@
         </p:spPr>
         <p:txBody>
           <a:bodyPr wrap="square" lIns="25400" tIns="25400" rIns="25400" bIns="25400" rtlCol="0" anchor="t">
-            <a:normAutofit/>
-          </a:bodyPr>
-          <a:lstStyle/>
-          <a:p>
-            <a:pPr algn="l" indent="0" marL="0">
+            <a:normAutofit fontScale="92500"/>
+          </a:bodyPr>
+          <a:lstStyle/>
+          <a:p>
+            <a:pPr marL="0" indent="0" algn="l">
               <a:lnSpc>
                 <a:spcPct val="142000"/>
               </a:lnSpc>
@@ -10068,12 +10418,6 @@
               </a:rPr>
               <a:t>The adversary submits the </a:t>
             </a:r>
-            <a:pPr algn="l" indent="0" marL="0">
-              <a:lnSpc>
-                <a:spcPct val="142000"/>
-              </a:lnSpc>
-              <a:buNone/>
-            </a:pPr>
             <a:r>
               <a:rPr lang="en-US" sz="1950" i="1" dirty="0">
                 <a:solidFill>
@@ -10085,12 +10429,6 @@
               </a:rPr>
               <a:t>true </a:t>
             </a:r>
-            <a:pPr algn="l" indent="0" marL="0">
-              <a:lnSpc>
-                <a:spcPct val="142000"/>
-              </a:lnSpc>
-              <a:buNone/>
-            </a:pPr>
             <a:r>
               <a:rPr lang="en-US" sz="1950" dirty="0">
                 <a:solidFill>
@@ -10102,12 +10440,6 @@
               </a:rPr>
               <a:t>heaviest Fourier coefficient alongside five fakes. The verifier’s weight check </a:t>
             </a:r>
-            <a:pPr algn="l" indent="0" marL="0">
-              <a:lnSpc>
-                <a:spcPct val="142000"/>
-              </a:lnSpc>
-              <a:buNone/>
-            </a:pPr>
             <a:r>
               <a:rPr lang="en-US" sz="1950" i="1" dirty="0">
                 <a:solidFill>
@@ -10119,12 +10451,6 @@
               </a:rPr>
               <a:t>Σ ϕ̃(s)² &lt; a² − ε²/8 </a:t>
             </a:r>
-            <a:pPr algn="l" indent="0" marL="0">
-              <a:lnSpc>
-                <a:spcPct val="142000"/>
-              </a:lnSpc>
-              <a:buNone/>
-            </a:pPr>
             <a:r>
               <a:rPr lang="en-US" sz="1950" dirty="0">
                 <a:solidFill>
@@ -10159,6 +10485,13 @@
           </a:solidFill>
           <a:ln/>
         </p:spPr>
+        <p:txBody>
+          <a:bodyPr/>
+          <a:lstStyle/>
+          <a:p>
+            <a:endParaRPr lang="en-US"/>
+          </a:p>
+        </p:txBody>
       </p:sp>
       <p:sp>
         <p:nvSpPr>
@@ -10179,6 +10512,13 @@
           </a:solidFill>
           <a:ln/>
         </p:spPr>
+        <p:txBody>
+          <a:bodyPr/>
+          <a:lstStyle/>
+          <a:p>
+            <a:endParaRPr lang="en-US"/>
+          </a:p>
+        </p:txBody>
       </p:sp>
       <p:sp>
         <p:nvSpPr>
@@ -10199,11 +10539,11 @@
         </p:spPr>
         <p:txBody>
           <a:bodyPr wrap="square" lIns="25400" tIns="25400" rIns="25400" bIns="25400" rtlCol="0" anchor="t">
-            <a:normAutofit/>
-          </a:bodyPr>
-          <a:lstStyle/>
-          <a:p>
-            <a:pPr algn="l" indent="0" marL="0">
+            <a:normAutofit fontScale="92500" lnSpcReduction="10000"/>
+          </a:bodyPr>
+          <a:lstStyle/>
+          <a:p>
+            <a:pPr marL="0" indent="0" algn="l">
               <a:lnSpc>
                 <a:spcPct val="140000"/>
               </a:lnSpc>
@@ -10246,6 +10586,13 @@
           </a:solidFill>
           <a:ln/>
         </p:spPr>
+        <p:txBody>
+          <a:bodyPr/>
+          <a:lstStyle/>
+          <a:p>
+            <a:endParaRPr lang="en-US"/>
+          </a:p>
+        </p:txBody>
       </p:sp>
       <p:sp>
         <p:nvSpPr>
@@ -10266,15 +10613,15 @@
         </p:spPr>
         <p:txBody>
           <a:bodyPr wrap="square" lIns="25400" tIns="25400" rIns="25400" bIns="25400" rtlCol="0" anchor="ctr">
-            <a:normAutofit/>
-          </a:bodyPr>
-          <a:lstStyle/>
-          <a:p>
-            <a:pPr algn="l" indent="0" marL="0">
-              <a:buNone/>
-            </a:pPr>
-            <a:r>
-              <a:rPr lang="en-US" sz="1125" spc="68" kern="0" dirty="0">
+            <a:normAutofit lnSpcReduction="10000"/>
+          </a:bodyPr>
+          <a:lstStyle/>
+          <a:p>
+            <a:pPr marL="0" indent="0" algn="l">
+              <a:buNone/>
+            </a:pPr>
+            <a:r>
+              <a:rPr lang="en-US" sz="1125" kern="0" spc="68" dirty="0">
                 <a:solidFill>
                   <a:srgbClr val="75716A"/>
                 </a:solidFill>
@@ -10307,6 +10654,13 @@
           </a:solidFill>
           <a:ln/>
         </p:spPr>
+        <p:txBody>
+          <a:bodyPr/>
+          <a:lstStyle/>
+          <a:p>
+            <a:endParaRPr lang="en-US"/>
+          </a:p>
+        </p:txBody>
       </p:sp>
       <p:sp>
         <p:nvSpPr>
@@ -10327,15 +10681,15 @@
         </p:spPr>
         <p:txBody>
           <a:bodyPr wrap="square" lIns="25400" tIns="25400" rIns="25400" bIns="25400" rtlCol="0" anchor="ctr">
-            <a:normAutofit/>
-          </a:bodyPr>
-          <a:lstStyle/>
-          <a:p>
-            <a:pPr algn="r" indent="0" marL="0">
-              <a:buNone/>
-            </a:pPr>
-            <a:r>
-              <a:rPr lang="en-US" sz="1125" spc="68" kern="0" dirty="0">
+            <a:normAutofit lnSpcReduction="10000"/>
+          </a:bodyPr>
+          <a:lstStyle/>
+          <a:p>
+            <a:pPr marL="0" indent="0" algn="r">
+              <a:buNone/>
+            </a:pPr>
+            <a:r>
+              <a:rPr lang="en-US" sz="1125" kern="0" spc="68" dirty="0">
                 <a:solidFill>
                   <a:srgbClr val="75716A"/>
                 </a:solidFill>
@@ -10368,6 +10722,13 @@
           </a:solidFill>
           <a:ln/>
         </p:spPr>
+        <p:txBody>
+          <a:bodyPr/>
+          <a:lstStyle/>
+          <a:p>
+            <a:endParaRPr lang="en-US"/>
+          </a:p>
+        </p:txBody>
       </p:sp>
       <p:sp>
         <p:nvSpPr>
@@ -10388,15 +10749,15 @@
         </p:spPr>
         <p:txBody>
           <a:bodyPr wrap="square" lIns="25400" tIns="25400" rIns="25400" bIns="25400" rtlCol="0" anchor="ctr">
-            <a:normAutofit/>
-          </a:bodyPr>
-          <a:lstStyle/>
-          <a:p>
-            <a:pPr algn="r" indent="0" marL="0">
-              <a:buNone/>
-            </a:pPr>
-            <a:r>
-              <a:rPr lang="en-US" sz="1125" spc="68" kern="0" dirty="0">
+            <a:normAutofit lnSpcReduction="10000"/>
+          </a:bodyPr>
+          <a:lstStyle/>
+          <a:p>
+            <a:pPr marL="0" indent="0" algn="r">
+              <a:buNone/>
+            </a:pPr>
+            <a:r>
+              <a:rPr lang="en-US" sz="1125" kern="0" spc="68" dirty="0">
                 <a:solidFill>
                   <a:srgbClr val="75716A"/>
                 </a:solidFill>
@@ -10429,6 +10790,13 @@
           </a:solidFill>
           <a:ln/>
         </p:spPr>
+        <p:txBody>
+          <a:bodyPr/>
+          <a:lstStyle/>
+          <a:p>
+            <a:endParaRPr lang="en-US"/>
+          </a:p>
+        </p:txBody>
       </p:sp>
       <p:sp>
         <p:nvSpPr>
@@ -10449,15 +10817,15 @@
         </p:spPr>
         <p:txBody>
           <a:bodyPr wrap="square" lIns="25400" tIns="25400" rIns="25400" bIns="25400" rtlCol="0" anchor="ctr">
-            <a:normAutofit/>
-          </a:bodyPr>
-          <a:lstStyle/>
-          <a:p>
-            <a:pPr algn="r" indent="0" marL="0">
-              <a:buNone/>
-            </a:pPr>
-            <a:r>
-              <a:rPr lang="en-US" sz="1125" spc="68" kern="0" dirty="0">
+            <a:normAutofit lnSpcReduction="10000"/>
+          </a:bodyPr>
+          <a:lstStyle/>
+          <a:p>
+            <a:pPr marL="0" indent="0" algn="r">
+              <a:buNone/>
+            </a:pPr>
+            <a:r>
+              <a:rPr lang="en-US" sz="1125" kern="0" spc="68" dirty="0">
                 <a:solidFill>
                   <a:srgbClr val="75716A"/>
                 </a:solidFill>
@@ -10490,6 +10858,13 @@
           </a:solidFill>
           <a:ln/>
         </p:spPr>
+        <p:txBody>
+          <a:bodyPr/>
+          <a:lstStyle/>
+          <a:p>
+            <a:endParaRPr lang="en-US"/>
+          </a:p>
+        </p:txBody>
       </p:sp>
       <p:sp>
         <p:nvSpPr>
@@ -10514,7 +10889,7 @@
           </a:bodyPr>
           <a:lstStyle/>
           <a:p>
-            <a:pPr algn="l" indent="0" marL="0">
+            <a:pPr marL="0" indent="0" algn="l">
               <a:buNone/>
             </a:pPr>
             <a:r>
@@ -10551,6 +10926,13 @@
           </a:solidFill>
           <a:ln/>
         </p:spPr>
+        <p:txBody>
+          <a:bodyPr/>
+          <a:lstStyle/>
+          <a:p>
+            <a:endParaRPr lang="en-US"/>
+          </a:p>
+        </p:txBody>
       </p:sp>
       <p:sp>
         <p:nvSpPr>
@@ -10575,7 +10957,7 @@
           </a:bodyPr>
           <a:lstStyle/>
           <a:p>
-            <a:pPr algn="r" indent="0" marL="0">
+            <a:pPr marL="0" indent="0" algn="r">
               <a:buNone/>
             </a:pPr>
             <a:r>
@@ -10612,6 +10994,13 @@
           </a:solidFill>
           <a:ln/>
         </p:spPr>
+        <p:txBody>
+          <a:bodyPr/>
+          <a:lstStyle/>
+          <a:p>
+            <a:endParaRPr lang="en-US"/>
+          </a:p>
+        </p:txBody>
       </p:sp>
       <p:sp>
         <p:nvSpPr>
@@ -10636,7 +11025,7 @@
           </a:bodyPr>
           <a:lstStyle/>
           <a:p>
-            <a:pPr algn="r" indent="0" marL="0">
+            <a:pPr marL="0" indent="0" algn="r">
               <a:buNone/>
             </a:pPr>
             <a:r>
@@ -10673,6 +11062,13 @@
           </a:solidFill>
           <a:ln/>
         </p:spPr>
+        <p:txBody>
+          <a:bodyPr/>
+          <a:lstStyle/>
+          <a:p>
+            <a:endParaRPr lang="en-US"/>
+          </a:p>
+        </p:txBody>
       </p:sp>
       <p:sp>
         <p:nvSpPr>
@@ -10697,7 +11093,7 @@
           </a:bodyPr>
           <a:lstStyle/>
           <a:p>
-            <a:pPr algn="r" indent="0" marL="0">
+            <a:pPr marL="0" indent="0" algn="r">
               <a:buNone/>
             </a:pPr>
             <a:r>
@@ -10734,6 +11130,13 @@
           </a:solidFill>
           <a:ln/>
         </p:spPr>
+        <p:txBody>
+          <a:bodyPr/>
+          <a:lstStyle/>
+          <a:p>
+            <a:endParaRPr lang="en-US"/>
+          </a:p>
+        </p:txBody>
       </p:sp>
       <p:sp>
         <p:nvSpPr>
@@ -10758,7 +11161,7 @@
           </a:bodyPr>
           <a:lstStyle/>
           <a:p>
-            <a:pPr algn="l" indent="0" marL="0">
+            <a:pPr marL="0" indent="0" algn="l">
               <a:buNone/>
             </a:pPr>
             <a:r>
@@ -10795,6 +11198,13 @@
           </a:solidFill>
           <a:ln/>
         </p:spPr>
+        <p:txBody>
+          <a:bodyPr/>
+          <a:lstStyle/>
+          <a:p>
+            <a:endParaRPr lang="en-US"/>
+          </a:p>
+        </p:txBody>
       </p:sp>
       <p:sp>
         <p:nvSpPr>
@@ -10819,7 +11229,7 @@
           </a:bodyPr>
           <a:lstStyle/>
           <a:p>
-            <a:pPr algn="r" indent="0" marL="0">
+            <a:pPr marL="0" indent="0" algn="r">
               <a:buNone/>
             </a:pPr>
             <a:r>
@@ -10856,6 +11266,13 @@
           </a:solidFill>
           <a:ln/>
         </p:spPr>
+        <p:txBody>
+          <a:bodyPr/>
+          <a:lstStyle/>
+          <a:p>
+            <a:endParaRPr lang="en-US"/>
+          </a:p>
+        </p:txBody>
       </p:sp>
       <p:sp>
         <p:nvSpPr>
@@ -10880,7 +11297,7 @@
           </a:bodyPr>
           <a:lstStyle/>
           <a:p>
-            <a:pPr algn="r" indent="0" marL="0">
+            <a:pPr marL="0" indent="0" algn="r">
               <a:buNone/>
             </a:pPr>
             <a:r>
@@ -10917,6 +11334,13 @@
           </a:solidFill>
           <a:ln/>
         </p:spPr>
+        <p:txBody>
+          <a:bodyPr/>
+          <a:lstStyle/>
+          <a:p>
+            <a:endParaRPr lang="en-US"/>
+          </a:p>
+        </p:txBody>
       </p:sp>
       <p:sp>
         <p:nvSpPr>
@@ -10941,7 +11365,7 @@
           </a:bodyPr>
           <a:lstStyle/>
           <a:p>
-            <a:pPr algn="r" indent="0" marL="0">
+            <a:pPr marL="0" indent="0" algn="r">
               <a:buNone/>
             </a:pPr>
             <a:r>
@@ -10978,6 +11402,13 @@
           </a:solidFill>
           <a:ln/>
         </p:spPr>
+        <p:txBody>
+          <a:bodyPr/>
+          <a:lstStyle/>
+          <a:p>
+            <a:endParaRPr lang="en-US"/>
+          </a:p>
+        </p:txBody>
       </p:sp>
       <p:sp>
         <p:nvSpPr>
@@ -11002,7 +11433,7 @@
           </a:bodyPr>
           <a:lstStyle/>
           <a:p>
-            <a:pPr algn="l" indent="0" marL="0">
+            <a:pPr marL="0" indent="0" algn="l">
               <a:buNone/>
             </a:pPr>
             <a:r>
@@ -11039,6 +11470,13 @@
           </a:solidFill>
           <a:ln/>
         </p:spPr>
+        <p:txBody>
+          <a:bodyPr/>
+          <a:lstStyle/>
+          <a:p>
+            <a:endParaRPr lang="en-US"/>
+          </a:p>
+        </p:txBody>
       </p:sp>
       <p:sp>
         <p:nvSpPr>
@@ -11063,7 +11501,7 @@
           </a:bodyPr>
           <a:lstStyle/>
           <a:p>
-            <a:pPr algn="r" indent="0" marL="0">
+            <a:pPr marL="0" indent="0" algn="r">
               <a:buNone/>
             </a:pPr>
             <a:r>
@@ -11100,6 +11538,13 @@
           </a:solidFill>
           <a:ln/>
         </p:spPr>
+        <p:txBody>
+          <a:bodyPr/>
+          <a:lstStyle/>
+          <a:p>
+            <a:endParaRPr lang="en-US"/>
+          </a:p>
+        </p:txBody>
       </p:sp>
       <p:sp>
         <p:nvSpPr>
@@ -11124,7 +11569,7 @@
           </a:bodyPr>
           <a:lstStyle/>
           <a:p>
-            <a:pPr algn="r" indent="0" marL="0">
+            <a:pPr marL="0" indent="0" algn="r">
               <a:buNone/>
             </a:pPr>
             <a:r>
@@ -11161,6 +11606,13 @@
           </a:solidFill>
           <a:ln/>
         </p:spPr>
+        <p:txBody>
+          <a:bodyPr/>
+          <a:lstStyle/>
+          <a:p>
+            <a:endParaRPr lang="en-US"/>
+          </a:p>
+        </p:txBody>
       </p:sp>
       <p:sp>
         <p:nvSpPr>
@@ -11185,7 +11637,7 @@
           </a:bodyPr>
           <a:lstStyle/>
           <a:p>
-            <a:pPr algn="r" indent="0" marL="0">
+            <a:pPr marL="0" indent="0" algn="r">
               <a:buNone/>
             </a:pPr>
             <a:r>
@@ -11222,6 +11674,13 @@
           </a:solidFill>
           <a:ln/>
         </p:spPr>
+        <p:txBody>
+          <a:bodyPr/>
+          <a:lstStyle/>
+          <a:p>
+            <a:endParaRPr lang="en-US"/>
+          </a:p>
+        </p:txBody>
       </p:sp>
       <p:sp>
         <p:nvSpPr>
@@ -11246,7 +11705,7 @@
           </a:bodyPr>
           <a:lstStyle/>
           <a:p>
-            <a:pPr algn="l" indent="0" marL="0">
+            <a:pPr marL="0" indent="0" algn="l">
               <a:buNone/>
             </a:pPr>
             <a:r>
@@ -11283,6 +11742,13 @@
           </a:solidFill>
           <a:ln/>
         </p:spPr>
+        <p:txBody>
+          <a:bodyPr/>
+          <a:lstStyle/>
+          <a:p>
+            <a:endParaRPr lang="en-US"/>
+          </a:p>
+        </p:txBody>
       </p:sp>
       <p:sp>
         <p:nvSpPr>
@@ -11307,7 +11773,7 @@
           </a:bodyPr>
           <a:lstStyle/>
           <a:p>
-            <a:pPr algn="r" indent="0" marL="0">
+            <a:pPr marL="0" indent="0" algn="r">
               <a:buNone/>
             </a:pPr>
             <a:r>
@@ -11344,6 +11810,13 @@
           </a:solidFill>
           <a:ln/>
         </p:spPr>
+        <p:txBody>
+          <a:bodyPr/>
+          <a:lstStyle/>
+          <a:p>
+            <a:endParaRPr lang="en-US"/>
+          </a:p>
+        </p:txBody>
       </p:sp>
       <p:sp>
         <p:nvSpPr>
@@ -11368,7 +11841,7 @@
           </a:bodyPr>
           <a:lstStyle/>
           <a:p>
-            <a:pPr algn="r" indent="0" marL="0">
+            <a:pPr marL="0" indent="0" algn="r">
               <a:buNone/>
             </a:pPr>
             <a:r>
@@ -11405,6 +11878,13 @@
           </a:solidFill>
           <a:ln/>
         </p:spPr>
+        <p:txBody>
+          <a:bodyPr/>
+          <a:lstStyle/>
+          <a:p>
+            <a:endParaRPr lang="en-US"/>
+          </a:p>
+        </p:txBody>
       </p:sp>
       <p:sp>
         <p:nvSpPr>
@@ -11429,7 +11909,7 @@
           </a:bodyPr>
           <a:lstStyle/>
           <a:p>
-            <a:pPr algn="r" indent="0" marL="0">
+            <a:pPr marL="0" indent="0" algn="r">
               <a:buNone/>
             </a:pPr>
             <a:r>
@@ -11470,11 +11950,11 @@
           </a:bodyPr>
           <a:lstStyle/>
           <a:p>
-            <a:pPr algn="l" indent="0" marL="0">
-              <a:buNone/>
-            </a:pPr>
-            <a:r>
-              <a:rPr lang="en-US" sz="1350" i="1" spc="27" kern="0" dirty="0">
+            <a:pPr marL="0" indent="0" algn="l">
+              <a:buNone/>
+            </a:pPr>
+            <a:r>
+              <a:rPr lang="en-US" sz="1350" i="1" kern="0" spc="27" dirty="0">
                 <a:solidFill>
                   <a:srgbClr val="75716A"/>
                 </a:solidFill>
@@ -11507,6 +11987,13 @@
           </a:solidFill>
           <a:ln/>
         </p:spPr>
+        <p:txBody>
+          <a:bodyPr/>
+          <a:lstStyle/>
+          <a:p>
+            <a:endParaRPr lang="en-US"/>
+          </a:p>
+        </p:txBody>
       </p:sp>
       <p:sp>
         <p:nvSpPr>
@@ -11531,11 +12018,11 @@
           </a:bodyPr>
           <a:lstStyle/>
           <a:p>
-            <a:pPr algn="l" indent="0" marL="0">
-              <a:buNone/>
-            </a:pPr>
-            <a:r>
-              <a:rPr lang="en-US" sz="1200" spc="48" kern="0" dirty="0">
+            <a:pPr marL="0" indent="0" algn="l">
+              <a:buNone/>
+            </a:pPr>
+            <a:r>
+              <a:rPr lang="en-US" sz="1200" kern="0" spc="48" dirty="0">
                 <a:solidFill>
                   <a:srgbClr val="3A3733"/>
                 </a:solidFill>
@@ -11572,11 +12059,11 @@
           </a:bodyPr>
           <a:lstStyle/>
           <a:p>
-            <a:pPr algn="l" indent="0" marL="0">
-              <a:buNone/>
-            </a:pPr>
-            <a:r>
-              <a:rPr lang="en-US" sz="1200" spc="48" kern="0" dirty="0">
+            <a:pPr marL="0" indent="0" algn="l">
+              <a:buNone/>
+            </a:pPr>
+            <a:r>
+              <a:rPr lang="en-US" sz="1200" kern="0" spc="48" dirty="0">
                 <a:solidFill>
                   <a:srgbClr val="75716A"/>
                 </a:solidFill>
@@ -11606,6 +12093,7 @@
         <a:solidFill>
           <a:srgbClr val="F6F3EC"/>
         </a:solidFill>
+        <a:effectLst/>
       </p:bgPr>
     </p:bg>
     <p:spTree>
@@ -11641,6 +12129,13 @@
           </a:solidFill>
           <a:ln/>
         </p:spPr>
+        <p:txBody>
+          <a:bodyPr/>
+          <a:lstStyle/>
+          <a:p>
+            <a:endParaRPr lang="en-US"/>
+          </a:p>
+        </p:txBody>
       </p:sp>
       <p:sp>
         <p:nvSpPr>
@@ -11665,11 +12160,11 @@
           </a:bodyPr>
           <a:lstStyle/>
           <a:p>
-            <a:pPr algn="l" indent="0" marL="0">
-              <a:buNone/>
-            </a:pPr>
-            <a:r>
-              <a:rPr lang="en-US" sz="1350" b="1" spc="54" kern="0" dirty="0">
+            <a:pPr marL="0" indent="0" algn="l">
+              <a:buNone/>
+            </a:pPr>
+            <a:r>
+              <a:rPr lang="en-US" sz="1350" b="1" kern="0" spc="54" dirty="0">
                 <a:solidFill>
                   <a:srgbClr val="161512"/>
                 </a:solidFill>
@@ -11706,11 +12201,11 @@
           </a:bodyPr>
           <a:lstStyle/>
           <a:p>
-            <a:pPr algn="l" indent="0" marL="0">
-              <a:buNone/>
-            </a:pPr>
-            <a:r>
-              <a:rPr lang="en-US" sz="1350" spc="54" kern="0" dirty="0">
+            <a:pPr marL="0" indent="0" algn="l">
+              <a:buNone/>
+            </a:pPr>
+            <a:r>
+              <a:rPr lang="en-US" sz="1350" kern="0" spc="54" dirty="0">
                 <a:solidFill>
                   <a:srgbClr val="3A3733"/>
                 </a:solidFill>
@@ -11743,18 +12238,18 @@
         </p:spPr>
         <p:txBody>
           <a:bodyPr wrap="square" lIns="25400" tIns="25400" rIns="25400" bIns="25400" rtlCol="0" anchor="t">
-            <a:normAutofit/>
-          </a:bodyPr>
-          <a:lstStyle/>
-          <a:p>
-            <a:pPr algn="l" indent="0" marL="0">
+            <a:normAutofit fontScale="92500" lnSpcReduction="20000"/>
+          </a:bodyPr>
+          <a:lstStyle/>
+          <a:p>
+            <a:pPr marL="0" indent="0" algn="l">
               <a:lnSpc>
                 <a:spcPct val="112000"/>
               </a:lnSpc>
               <a:buNone/>
             </a:pPr>
             <a:r>
-              <a:rPr lang="en-US" sz="3900" spc="-58" kern="0" dirty="0">
+              <a:rPr lang="en-US" sz="3900" kern="0" spc="-58" dirty="0">
                 <a:solidFill>
                   <a:srgbClr val="161512"/>
                 </a:solidFill>
@@ -11787,6 +12282,13 @@
           </a:solidFill>
           <a:ln/>
         </p:spPr>
+        <p:txBody>
+          <a:bodyPr/>
+          <a:lstStyle/>
+          <a:p>
+            <a:endParaRPr lang="en-US"/>
+          </a:p>
+        </p:txBody>
       </p:sp>
       <p:sp>
         <p:nvSpPr>
@@ -11811,35 +12313,18 @@
           </a:bodyPr>
           <a:lstStyle/>
           <a:p>
-            <a:pPr algn="l" indent="0" marL="0">
-              <a:buNone/>
-            </a:pPr>
-            <a:r>
-              <a:rPr lang="en-US" sz="975" b="1" spc="90" kern="0" dirty="0">
-                <a:solidFill>
-                  <a:srgbClr val="2D4A6E"/>
-                </a:solidFill>
-                <a:highlight>
-                  <a:srgbClr val="E8EEF5"/>
-                </a:highlight>
+            <a:pPr marL="0" indent="0" algn="l">
+              <a:buNone/>
+            </a:pPr>
+            <a:r>
+              <a:rPr lang="en-US" sz="1500" b="1" kern="0" spc="90" dirty="0">
+                <a:solidFill>
+                  <a:srgbClr val="161512"/>
+                </a:solidFill>
                 <a:latin typeface="IBM Plex Sans Condensed" pitchFamily="34" charset="0"/>
                 <a:ea typeface="IBM Plex Sans Condensed" pitchFamily="34" charset="-122"/>
                 <a:cs typeface="IBM Plex Sans Condensed" pitchFamily="34" charset="-120"/>
               </a:rPr>
-              <a:t>THEORY MATCH </a:t>
-            </a:r>
-            <a:pPr algn="l" indent="0" marL="0">
-              <a:buNone/>
-            </a:pPr>
-            <a:r>
-              <a:rPr lang="en-US" sz="1500" b="1" spc="90" kern="0" dirty="0">
-                <a:solidFill>
-                  <a:srgbClr val="161512"/>
-                </a:solidFill>
-                <a:latin typeface="IBM Plex Sans Condensed" pitchFamily="34" charset="0"/>
-                <a:ea typeface="IBM Plex Sans Condensed" pitchFamily="34" charset="-122"/>
-                <a:cs typeface="IBM Plex Sans Condensed" pitchFamily="34" charset="-120"/>
-              </a:rPr>
               <a:t>LABEL-FLIP SWEEP</a:t>
             </a:r>
             <a:endParaRPr lang="en-US" sz="1500" dirty="0"/>
@@ -11869,11 +12354,11 @@
           </a:bodyPr>
           <a:lstStyle/>
           <a:p>
-            <a:pPr algn="r" indent="0" marL="0">
-              <a:buNone/>
-            </a:pPr>
-            <a:r>
-              <a:rPr lang="en-US" sz="1350" spc="27" kern="0" dirty="0">
+            <a:pPr marL="0" indent="0" algn="r">
+              <a:buNone/>
+            </a:pPr>
+            <a:r>
+              <a:rPr lang="en-US" sz="1350" kern="0" spc="27" dirty="0">
                 <a:solidFill>
                   <a:srgbClr val="75716A"/>
                 </a:solidFill>
@@ -11911,6 +12396,13 @@
             <a:prstDash val="solid"/>
           </a:ln>
         </p:spPr>
+        <p:txBody>
+          <a:bodyPr/>
+          <a:lstStyle/>
+          <a:p>
+            <a:endParaRPr lang="en-US"/>
+          </a:p>
+        </p:txBody>
       </p:sp>
       <p:sp>
         <p:nvSpPr>
@@ -11931,6 +12423,13 @@
           </a:solidFill>
           <a:ln/>
         </p:spPr>
+        <p:txBody>
+          <a:bodyPr/>
+          <a:lstStyle/>
+          <a:p>
+            <a:endParaRPr lang="en-US"/>
+          </a:p>
+        </p:txBody>
       </p:sp>
       <p:sp>
         <p:nvSpPr>
@@ -11951,6 +12450,13 @@
           </a:solidFill>
           <a:ln/>
         </p:spPr>
+        <p:txBody>
+          <a:bodyPr/>
+          <a:lstStyle/>
+          <a:p>
+            <a:endParaRPr lang="en-US"/>
+          </a:p>
+        </p:txBody>
       </p:sp>
       <p:sp>
         <p:nvSpPr>
@@ -11971,11 +12477,11 @@
         </p:spPr>
         <p:txBody>
           <a:bodyPr wrap="square" lIns="25400" tIns="25400" rIns="25400" bIns="25400" rtlCol="0" anchor="t">
-            <a:normAutofit/>
-          </a:bodyPr>
-          <a:lstStyle/>
-          <a:p>
-            <a:pPr algn="l" indent="0" marL="0">
+            <a:normAutofit fontScale="92500" lnSpcReduction="20000"/>
+          </a:bodyPr>
+          <a:lstStyle/>
+          <a:p>
+            <a:pPr marL="0" indent="0" algn="l">
               <a:lnSpc>
                 <a:spcPct val="140000"/>
               </a:lnSpc>
@@ -11992,12 +12498,6 @@
               </a:rPr>
               <a:t>&lt; 1.8% relative error </a:t>
             </a:r>
-            <a:pPr algn="l" indent="0" marL="0">
-              <a:lnSpc>
-                <a:spcPct val="140000"/>
-              </a:lnSpc>
-              <a:buNone/>
-            </a:pPr>
             <a:r>
               <a:rPr lang="en-US" sz="1500" dirty="0">
                 <a:solidFill>
@@ -12012,12 +12512,6 @@
               </a:rPr>
               <a:t>across all n ∈ {4,…,16}, all η ≤ 0.42. Sharp empty-list transition at η ≈ 0.447: exact root where margin (1−2η)² − ε²/8 goes negative. </a:t>
             </a:r>
-            <a:pPr algn="l" indent="0" marL="0">
-              <a:lnSpc>
-                <a:spcPct val="140000"/>
-              </a:lnSpc>
-              <a:buNone/>
-            </a:pPr>
             <a:r>
               <a:rPr lang="en-US" sz="1500" i="1" dirty="0">
                 <a:solidFill>
@@ -12052,6 +12546,13 @@
           </a:solidFill>
           <a:ln/>
         </p:spPr>
+        <p:txBody>
+          <a:bodyPr/>
+          <a:lstStyle/>
+          <a:p>
+            <a:endParaRPr lang="en-US"/>
+          </a:p>
+        </p:txBody>
       </p:sp>
       <p:sp>
         <p:nvSpPr>
@@ -12076,35 +12577,18 @@
           </a:bodyPr>
           <a:lstStyle/>
           <a:p>
-            <a:pPr algn="l" indent="0" marL="0">
-              <a:buNone/>
-            </a:pPr>
-            <a:r>
-              <a:rPr lang="en-US" sz="975" b="1" spc="90" kern="0" dirty="0">
-                <a:solidFill>
-                  <a:srgbClr val="FFFFFF"/>
-                </a:solidFill>
-                <a:highlight>
-                  <a:srgbClr val="8A2A18"/>
-                </a:highlight>
+            <a:pPr marL="0" indent="0" algn="l">
+              <a:buNone/>
+            </a:pPr>
+            <a:r>
+              <a:rPr lang="en-US" sz="1500" b="1" kern="0" spc="90" dirty="0">
+                <a:solidFill>
+                  <a:srgbClr val="161512"/>
+                </a:solidFill>
                 <a:latin typeface="IBM Plex Sans Condensed" pitchFamily="34" charset="0"/>
                 <a:ea typeface="IBM Plex Sans Condensed" pitchFamily="34" charset="-122"/>
                 <a:cs typeface="IBM Plex Sans Condensed" pitchFamily="34" charset="-120"/>
               </a:rPr>
-              <a:t>NOVEL </a:t>
-            </a:r>
-            <a:pPr algn="l" indent="0" marL="0">
-              <a:buNone/>
-            </a:pPr>
-            <a:r>
-              <a:rPr lang="en-US" sz="1500" b="1" spc="90" kern="0" dirty="0">
-                <a:solidFill>
-                  <a:srgbClr val="161512"/>
-                </a:solidFill>
-                <a:latin typeface="IBM Plex Sans Condensed" pitchFamily="34" charset="0"/>
-                <a:ea typeface="IBM Plex Sans Condensed" pitchFamily="34" charset="-122"/>
-                <a:cs typeface="IBM Plex Sans Condensed" pitchFamily="34" charset="-120"/>
-              </a:rPr>
               <a:t>GATE-NOISE CLIFF</a:t>
             </a:r>
             <a:endParaRPr lang="en-US" sz="1500" dirty="0"/>
@@ -12134,11 +12618,11 @@
           </a:bodyPr>
           <a:lstStyle/>
           <a:p>
-            <a:pPr algn="r" indent="0" marL="0">
-              <a:buNone/>
-            </a:pPr>
-            <a:r>
-              <a:rPr lang="en-US" sz="1350" spc="27" kern="0" dirty="0">
+            <a:pPr marL="0" indent="0" algn="r">
+              <a:buNone/>
+            </a:pPr>
+            <a:r>
+              <a:rPr lang="en-US" sz="1350" kern="0" spc="27" dirty="0">
                 <a:solidFill>
                   <a:srgbClr val="75716A"/>
                 </a:solidFill>
@@ -12176,6 +12660,13 @@
             <a:prstDash val="solid"/>
           </a:ln>
         </p:spPr>
+        <p:txBody>
+          <a:bodyPr/>
+          <a:lstStyle/>
+          <a:p>
+            <a:endParaRPr lang="en-US"/>
+          </a:p>
+        </p:txBody>
       </p:sp>
       <p:sp>
         <p:nvSpPr>
@@ -12196,6 +12687,13 @@
           </a:solidFill>
           <a:ln/>
         </p:spPr>
+        <p:txBody>
+          <a:bodyPr/>
+          <a:lstStyle/>
+          <a:p>
+            <a:endParaRPr lang="en-US"/>
+          </a:p>
+        </p:txBody>
       </p:sp>
       <p:sp>
         <p:nvSpPr>
@@ -12216,6 +12714,13 @@
           </a:solidFill>
           <a:ln/>
         </p:spPr>
+        <p:txBody>
+          <a:bodyPr/>
+          <a:lstStyle/>
+          <a:p>
+            <a:endParaRPr lang="en-US"/>
+          </a:p>
+        </p:txBody>
       </p:sp>
       <p:sp>
         <p:nvSpPr>
@@ -12240,7 +12745,7 @@
           </a:bodyPr>
           <a:lstStyle/>
           <a:p>
-            <a:pPr algn="l" indent="0" marL="0">
+            <a:pPr marL="0" indent="0" algn="l">
               <a:lnSpc>
                 <a:spcPct val="140000"/>
               </a:lnSpc>
@@ -12260,12 +12765,6 @@
               </a:rPr>
               <a:t>Uniform noise floor </a:t>
             </a:r>
-            <a:pPr algn="l" indent="0" marL="0">
-              <a:lnSpc>
-                <a:spcPct val="140000"/>
-              </a:lnSpc>
-              <a:buNone/>
-            </a:pPr>
             <a:r>
               <a:rPr lang="en-US" sz="1500" i="1" dirty="0">
                 <a:solidFill>
@@ -12275,14 +12774,8 @@
                 <a:ea typeface="IBM Plex Serif" pitchFamily="34" charset="-122"/>
                 <a:cs typeface="IBM Plex Serif" pitchFamily="34" charset="-120"/>
               </a:rPr>
-              <a:t>1/2ⁿ </a:t>
-            </a:r>
-            <a:pPr algn="l" indent="0" marL="0">
-              <a:lnSpc>
-                <a:spcPct val="140000"/>
-              </a:lnSpc>
-              <a:buNone/>
-            </a:pPr>
+              <a:t>1/2ⁿ  </a:t>
+            </a:r>
             <a:r>
               <a:rPr lang="en-US" sz="1500" dirty="0">
                 <a:solidFill>
@@ -12297,12 +12790,6 @@
               </a:rPr>
               <a:t>exceeds the extraction threshold </a:t>
             </a:r>
-            <a:pPr algn="l" indent="0" marL="0">
-              <a:lnSpc>
-                <a:spcPct val="140000"/>
-              </a:lnSpc>
-              <a:buNone/>
-            </a:pPr>
             <a:r>
               <a:rPr lang="en-US" sz="1500" i="1" dirty="0">
                 <a:solidFill>
@@ -12314,12 +12801,6 @@
               </a:rPr>
               <a:t>ϑ²/4 </a:t>
             </a:r>
-            <a:pPr algn="l" indent="0" marL="0">
-              <a:lnSpc>
-                <a:spcPct val="140000"/>
-              </a:lnSpc>
-              <a:buNone/>
-            </a:pPr>
             <a:r>
               <a:rPr lang="en-US" sz="1500" dirty="0">
                 <a:solidFill>
@@ -12334,12 +12815,6 @@
               </a:rPr>
               <a:t>for </a:t>
             </a:r>
-            <a:pPr algn="l" indent="0" marL="0">
-              <a:lnSpc>
-                <a:spcPct val="140000"/>
-              </a:lnSpc>
-              <a:buNone/>
-            </a:pPr>
             <a:r>
               <a:rPr lang="en-US" sz="1500" b="1" dirty="0">
                 <a:solidFill>
@@ -12351,12 +12826,6 @@
               </a:rPr>
               <a:t>n ≤ 5 </a:t>
             </a:r>
-            <a:pPr algn="l" indent="0" marL="0">
-              <a:lnSpc>
-                <a:spcPct val="140000"/>
-              </a:lnSpc>
-              <a:buNone/>
-            </a:pPr>
             <a:r>
               <a:rPr lang="en-US" sz="1500" dirty="0">
                 <a:solidFill>
@@ -12371,12 +12840,6 @@
               </a:rPr>
               <a:t>; crosses below at </a:t>
             </a:r>
-            <a:pPr algn="l" indent="0" marL="0">
-              <a:lnSpc>
-                <a:spcPct val="140000"/>
-              </a:lnSpc>
-              <a:buNone/>
-            </a:pPr>
             <a:r>
               <a:rPr lang="en-US" sz="1500" b="1" dirty="0">
                 <a:solidFill>
@@ -12388,12 +12851,6 @@
               </a:rPr>
               <a:t>n = 6 </a:t>
             </a:r>
-            <a:pPr algn="l" indent="0" marL="0">
-              <a:lnSpc>
-                <a:spcPct val="140000"/>
-              </a:lnSpc>
-              <a:buNone/>
-            </a:pPr>
             <a:r>
               <a:rPr lang="en-US" sz="1500" dirty="0">
                 <a:solidFill>
@@ -12408,12 +12865,6 @@
               </a:rPr>
               <a:t>. Explains why n ≤ 5 looks robust and n ≥ 6 collapses. Ma–Su–Deng cover output-side noise, not per-gate depolarising. </a:t>
             </a:r>
-            <a:pPr algn="l" indent="0" marL="0">
-              <a:lnSpc>
-                <a:spcPct val="140000"/>
-              </a:lnSpc>
-              <a:buNone/>
-            </a:pPr>
             <a:r>
               <a:rPr lang="en-US" sz="1500" i="1" dirty="0">
                 <a:solidFill>
@@ -12448,6 +12899,13 @@
           </a:solidFill>
           <a:ln/>
         </p:spPr>
+        <p:txBody>
+          <a:bodyPr/>
+          <a:lstStyle/>
+          <a:p>
+            <a:endParaRPr lang="en-US"/>
+          </a:p>
+        </p:txBody>
       </p:sp>
       <p:sp>
         <p:nvSpPr>
@@ -12472,11 +12930,11 @@
           </a:bodyPr>
           <a:lstStyle/>
           <a:p>
-            <a:pPr algn="l" indent="0" marL="0">
-              <a:buNone/>
-            </a:pPr>
-            <a:r>
-              <a:rPr lang="en-US" sz="1200" spc="48" kern="0" dirty="0">
+            <a:pPr marL="0" indent="0" algn="l">
+              <a:buNone/>
+            </a:pPr>
+            <a:r>
+              <a:rPr lang="en-US" sz="1200" kern="0" spc="48" dirty="0">
                 <a:solidFill>
                   <a:srgbClr val="75716A"/>
                 </a:solidFill>
@@ -12490,6 +12948,66 @@
           </a:p>
         </p:txBody>
       </p:sp>
+      <p:pic>
+        <p:nvPicPr>
+          <p:cNvPr id="22" name="Picture 21">
+            <a:extLst>
+              <a:ext uri="{FF2B5EF4-FFF2-40B4-BE49-F238E27FC236}">
+                <a16:creationId xmlns:a16="http://schemas.microsoft.com/office/drawing/2014/main" id="{A951A856-E8A1-1A41-2216-F3C7843557CD}"/>
+              </a:ext>
+            </a:extLst>
+          </p:cNvPr>
+          <p:cNvPicPr>
+            <a:picLocks noChangeAspect="1"/>
+          </p:cNvPicPr>
+          <p:nvPr/>
+        </p:nvPicPr>
+        <p:blipFill>
+          <a:blip r:embed="rId3"/>
+          <a:stretch>
+            <a:fillRect/>
+          </a:stretch>
+        </p:blipFill>
+        <p:spPr>
+          <a:xfrm>
+            <a:off x="1133475" y="3187674"/>
+            <a:ext cx="7479196" cy="3887491"/>
+          </a:xfrm>
+          <a:prstGeom prst="rect">
+            <a:avLst/>
+          </a:prstGeom>
+        </p:spPr>
+      </p:pic>
+      <p:pic>
+        <p:nvPicPr>
+          <p:cNvPr id="24" name="Picture 23">
+            <a:extLst>
+              <a:ext uri="{FF2B5EF4-FFF2-40B4-BE49-F238E27FC236}">
+                <a16:creationId xmlns:a16="http://schemas.microsoft.com/office/drawing/2014/main" id="{21867B73-ED56-806E-058A-75BD9661AA7A}"/>
+              </a:ext>
+            </a:extLst>
+          </p:cNvPr>
+          <p:cNvPicPr>
+            <a:picLocks noChangeAspect="1"/>
+          </p:cNvPicPr>
+          <p:nvPr/>
+        </p:nvPicPr>
+        <p:blipFill>
+          <a:blip r:embed="rId4"/>
+          <a:stretch>
+            <a:fillRect/>
+          </a:stretch>
+        </p:blipFill>
+        <p:spPr>
+          <a:xfrm>
+            <a:off x="9970770" y="3171526"/>
+            <a:ext cx="6880860" cy="3887491"/>
+          </a:xfrm>
+          <a:prstGeom prst="rect">
+            <a:avLst/>
+          </a:prstGeom>
+        </p:spPr>
+      </p:pic>
     </p:spTree>
   </p:cSld>
   <p:clrMapOvr>
@@ -12506,6 +13024,7 @@
         <a:solidFill>
           <a:srgbClr val="F6F3EC"/>
         </a:solidFill>
+        <a:effectLst/>
       </p:bgPr>
     </p:bg>
     <p:spTree>
@@ -12541,6 +13060,13 @@
           </a:solidFill>
           <a:ln/>
         </p:spPr>
+        <p:txBody>
+          <a:bodyPr/>
+          <a:lstStyle/>
+          <a:p>
+            <a:endParaRPr lang="en-US"/>
+          </a:p>
+        </p:txBody>
       </p:sp>
       <p:sp>
         <p:nvSpPr>
@@ -12565,11 +13091,11 @@
           </a:bodyPr>
           <a:lstStyle/>
           <a:p>
-            <a:pPr algn="l" indent="0" marL="0">
-              <a:buNone/>
-            </a:pPr>
-            <a:r>
-              <a:rPr lang="en-US" sz="1350" b="1" spc="54" kern="0" dirty="0">
+            <a:pPr marL="0" indent="0" algn="l">
+              <a:buNone/>
+            </a:pPr>
+            <a:r>
+              <a:rPr lang="en-US" sz="1350" b="1" kern="0" spc="54" dirty="0">
                 <a:solidFill>
                   <a:srgbClr val="161512"/>
                 </a:solidFill>
@@ -12606,11 +13132,11 @@
           </a:bodyPr>
           <a:lstStyle/>
           <a:p>
-            <a:pPr algn="l" indent="0" marL="0">
-              <a:buNone/>
-            </a:pPr>
-            <a:r>
-              <a:rPr lang="en-US" sz="1350" spc="54" kern="0" dirty="0">
+            <a:pPr marL="0" indent="0" algn="l">
+              <a:buNone/>
+            </a:pPr>
+            <a:r>
+              <a:rPr lang="en-US" sz="1350" kern="0" spc="54" dirty="0">
                 <a:solidFill>
                   <a:srgbClr val="3A3733"/>
                 </a:solidFill>
@@ -12643,18 +13169,18 @@
         </p:spPr>
         <p:txBody>
           <a:bodyPr wrap="square" lIns="25400" tIns="25400" rIns="25400" bIns="25400" rtlCol="0" anchor="t">
-            <a:normAutofit/>
-          </a:bodyPr>
-          <a:lstStyle/>
-          <a:p>
-            <a:pPr algn="l" indent="0" marL="0">
+            <a:normAutofit fontScale="92500" lnSpcReduction="10000"/>
+          </a:bodyPr>
+          <a:lstStyle/>
+          <a:p>
+            <a:pPr marL="0" indent="0" algn="l">
               <a:lnSpc>
                 <a:spcPct val="112000"/>
               </a:lnSpc>
               <a:buNone/>
             </a:pPr>
             <a:r>
-              <a:rPr lang="en-US" sz="3900" spc="-58" kern="0" dirty="0">
+              <a:rPr lang="en-US" sz="3900" kern="0" spc="-58" dirty="0">
                 <a:solidFill>
                   <a:srgbClr val="161512"/>
                 </a:solidFill>
@@ -12687,6 +13213,13 @@
           </a:solidFill>
           <a:ln/>
         </p:spPr>
+        <p:txBody>
+          <a:bodyPr/>
+          <a:lstStyle/>
+          <a:p>
+            <a:endParaRPr lang="en-US"/>
+          </a:p>
+        </p:txBody>
       </p:sp>
       <p:sp>
         <p:nvSpPr>
@@ -12711,11 +13244,11 @@
           </a:bodyPr>
           <a:lstStyle/>
           <a:p>
-            <a:pPr algn="l" indent="0" marL="0">
-              <a:buNone/>
-            </a:pPr>
-            <a:r>
-              <a:rPr lang="en-US" sz="1500" b="1" spc="90" kern="0" dirty="0">
+            <a:pPr marL="0" indent="0" algn="l">
+              <a:buNone/>
+            </a:pPr>
+            <a:r>
+              <a:rPr lang="en-US" sz="1500" b="1" kern="0" spc="90" dirty="0">
                 <a:solidFill>
                   <a:srgbClr val="161512"/>
                 </a:solidFill>
@@ -12752,11 +13285,11 @@
           </a:bodyPr>
           <a:lstStyle/>
           <a:p>
-            <a:pPr algn="r" indent="0" marL="0">
-              <a:buNone/>
-            </a:pPr>
-            <a:r>
-              <a:rPr lang="en-US" sz="1350" spc="27" kern="0" dirty="0">
+            <a:pPr marL="0" indent="0" algn="r">
+              <a:buNone/>
+            </a:pPr>
+            <a:r>
+              <a:rPr lang="en-US" sz="1350" kern="0" spc="27" dirty="0">
                 <a:solidFill>
                   <a:srgbClr val="75716A"/>
                 </a:solidFill>
@@ -12766,11 +13299,8 @@
               </a:rPr>
               <a:t>Maiorana–McFarland · |ĝ(s)| = 2</a:t>
             </a:r>
-            <a:pPr algn="r" indent="0" marL="0">
-              <a:buNone/>
-            </a:pPr>
-            <a:r>
-              <a:rPr lang="en-US" sz="1125" baseline="30000" spc="27" kern="0" dirty="0">
+            <a:r>
+              <a:rPr lang="en-US" sz="1125" kern="0" spc="27" baseline="30000" dirty="0">
                 <a:solidFill>
                   <a:srgbClr val="75716A"/>
                 </a:solidFill>
@@ -12803,11 +13333,11 @@
         </p:spPr>
         <p:txBody>
           <a:bodyPr wrap="square" lIns="25400" tIns="25400" rIns="25400" bIns="25400" rtlCol="0" anchor="t">
-            <a:normAutofit/>
-          </a:bodyPr>
-          <a:lstStyle/>
-          <a:p>
-            <a:pPr algn="l" indent="0" marL="0">
+            <a:normAutofit fontScale="92500"/>
+          </a:bodyPr>
+          <a:lstStyle/>
+          <a:p>
+            <a:pPr marL="0" indent="0" algn="l">
               <a:lnSpc>
                 <a:spcPct val="142000"/>
               </a:lnSpc>
@@ -12824,12 +13354,6 @@
               </a:rPr>
               <a:t>Corollary 5 (Caro et al.) excludes </a:t>
             </a:r>
-            <a:pPr algn="l" indent="0" marL="0">
-              <a:lnSpc>
-                <a:spcPct val="142000"/>
-              </a:lnSpc>
-              <a:buNone/>
-            </a:pPr>
             <a:r>
               <a:rPr lang="en-US" sz="1650" i="1" dirty="0">
                 <a:solidFill>
@@ -12841,12 +13365,6 @@
               </a:rPr>
               <a:t>s </a:t>
             </a:r>
-            <a:pPr algn="l" indent="0" marL="0">
-              <a:lnSpc>
-                <a:spcPct val="142000"/>
-              </a:lnSpc>
-              <a:buNone/>
-            </a:pPr>
             <a:r>
               <a:rPr lang="en-US" sz="1650" dirty="0">
                 <a:solidFill>
@@ -12858,12 +13376,6 @@
               </a:rPr>
               <a:t>whenever </a:t>
             </a:r>
-            <a:pPr algn="l" indent="0" marL="0">
-              <a:lnSpc>
-                <a:spcPct val="142000"/>
-              </a:lnSpc>
-              <a:buNone/>
-            </a:pPr>
             <a:r>
               <a:rPr lang="en-US" sz="1650" i="1" dirty="0">
                 <a:solidFill>
@@ -12875,12 +13387,6 @@
               </a:rPr>
               <a:t>|ĝ(s)| &lt; ε/2 </a:t>
             </a:r>
-            <a:pPr algn="l" indent="0" marL="0">
-              <a:lnSpc>
-                <a:spcPct val="142000"/>
-              </a:lnSpc>
-              <a:buNone/>
-            </a:pPr>
             <a:r>
               <a:rPr lang="en-US" sz="1650" dirty="0">
                 <a:solidFill>
@@ -12892,12 +13398,6 @@
               </a:rPr>
               <a:t>. Flat bent coefficients </a:t>
             </a:r>
-            <a:pPr algn="l" indent="0" marL="0">
-              <a:lnSpc>
-                <a:spcPct val="142000"/>
-              </a:lnSpc>
-              <a:buNone/>
-            </a:pPr>
             <a:r>
               <a:rPr lang="en-US" sz="1650" i="1" dirty="0">
                 <a:solidFill>
@@ -12909,12 +13409,6 @@
               </a:rPr>
               <a:t>2</a:t>
             </a:r>
-            <a:pPr algn="l" indent="0" marL="0">
-              <a:lnSpc>
-                <a:spcPct val="142000"/>
-              </a:lnSpc>
-              <a:buNone/>
-            </a:pPr>
             <a:r>
               <a:rPr lang="en-US" sz="1375" baseline="30000" dirty="0">
                 <a:solidFill>
@@ -12926,12 +13420,6 @@
               </a:rPr>
               <a:t>−n/2 </a:t>
             </a:r>
-            <a:pPr algn="l" indent="0" marL="0">
-              <a:lnSpc>
-                <a:spcPct val="142000"/>
-              </a:lnSpc>
-              <a:buNone/>
-            </a:pPr>
             <a:r>
               <a:rPr lang="en-US" sz="1650" dirty="0">
                 <a:solidFill>
@@ -12943,12 +13431,6 @@
               </a:rPr>
               <a:t>at </a:t>
             </a:r>
-            <a:pPr algn="l" indent="0" marL="0">
-              <a:lnSpc>
-                <a:spcPct val="142000"/>
-              </a:lnSpc>
-              <a:buNone/>
-            </a:pPr>
             <a:r>
               <a:rPr lang="en-US" sz="1650" i="1" dirty="0">
                 <a:solidFill>
@@ -12960,12 +13442,6 @@
               </a:rPr>
               <a:t>ε = 0.3 </a:t>
             </a:r>
-            <a:pPr algn="l" indent="0" marL="0">
-              <a:lnSpc>
-                <a:spcPct val="142000"/>
-              </a:lnSpc>
-              <a:buNone/>
-            </a:pPr>
             <a:r>
               <a:rPr lang="en-US" sz="1650" dirty="0">
                 <a:solidFill>
@@ -13000,6 +13476,13 @@
           </a:solidFill>
           <a:ln/>
         </p:spPr>
+        <p:txBody>
+          <a:bodyPr/>
+          <a:lstStyle/>
+          <a:p>
+            <a:endParaRPr lang="en-US"/>
+          </a:p>
+        </p:txBody>
       </p:sp>
       <p:sp>
         <p:nvSpPr>
@@ -13020,6 +13503,13 @@
           </a:solidFill>
           <a:ln/>
         </p:spPr>
+        <p:txBody>
+          <a:bodyPr/>
+          <a:lstStyle/>
+          <a:p>
+            <a:endParaRPr lang="en-US"/>
+          </a:p>
+        </p:txBody>
       </p:sp>
       <p:sp>
         <p:nvSpPr>
@@ -13040,11 +13530,11 @@
         </p:spPr>
         <p:txBody>
           <a:bodyPr wrap="square" lIns="25400" tIns="25400" rIns="25400" bIns="25400" rtlCol="0" anchor="t">
-            <a:normAutofit/>
-          </a:bodyPr>
-          <a:lstStyle/>
-          <a:p>
-            <a:pPr algn="ctr" indent="0" marL="0">
+            <a:normAutofit lnSpcReduction="10000"/>
+          </a:bodyPr>
+          <a:lstStyle/>
+          <a:p>
+            <a:pPr marL="0" indent="0" algn="ctr">
               <a:lnSpc>
                 <a:spcPct val="140000"/>
               </a:lnSpc>
@@ -13061,12 +13551,6 @@
               </a:rPr>
               <a:t>n = 2 log</a:t>
             </a:r>
-            <a:pPr algn="ctr" indent="0" marL="0">
-              <a:lnSpc>
-                <a:spcPct val="140000"/>
-              </a:lnSpc>
-              <a:buNone/>
-            </a:pPr>
             <a:r>
               <a:rPr lang="en-US" sz="2000" baseline="-40000" dirty="0">
                 <a:solidFill>
@@ -13078,12 +13562,6 @@
               </a:rPr>
               <a:t>2</a:t>
             </a:r>
-            <a:pPr algn="ctr" indent="0" marL="0">
-              <a:lnSpc>
-                <a:spcPct val="140000"/>
-              </a:lnSpc>
-              <a:buNone/>
-            </a:pPr>
             <a:r>
               <a:rPr lang="en-US" sz="2400" i="1" dirty="0">
                 <a:solidFill>
@@ -13123,6 +13601,13 @@
             <a:prstDash val="solid"/>
           </a:ln>
         </p:spPr>
+        <p:txBody>
+          <a:bodyPr/>
+          <a:lstStyle/>
+          <a:p>
+            <a:endParaRPr lang="en-US"/>
+          </a:p>
+        </p:txBody>
       </p:sp>
       <p:sp>
         <p:nvSpPr>
@@ -13147,11 +13632,11 @@
           </a:bodyPr>
           <a:lstStyle/>
           <a:p>
-            <a:pPr algn="l" indent="0" marL="0">
-              <a:buNone/>
-            </a:pPr>
-            <a:r>
-              <a:rPr lang="en-US" sz="1125" spc="68" kern="0" dirty="0">
+            <a:pPr marL="0" indent="0" algn="l">
+              <a:buNone/>
+            </a:pPr>
+            <a:r>
+              <a:rPr lang="en-US" sz="1125" kern="0" spc="68" dirty="0">
                 <a:solidFill>
                   <a:srgbClr val="161512"/>
                 </a:solidFill>
@@ -13161,11 +13646,8 @@
               </a:rPr>
               <a:t>FIG. 5 </a:t>
             </a:r>
-            <a:pPr algn="l" indent="0" marL="0">
-              <a:buNone/>
-            </a:pPr>
-            <a:r>
-              <a:rPr lang="en-US" sz="1125" spc="68" kern="0" dirty="0">
+            <a:r>
+              <a:rPr lang="en-US" sz="1125" kern="0" spc="68" dirty="0">
                 <a:solidFill>
                   <a:srgbClr val="75716A"/>
                 </a:solidFill>
@@ -13181,14 +13663,14 @@
       </p:sp>
       <p:pic>
         <p:nvPicPr>
-          <p:cNvPr id="15" name="Image 0" descr="preencoded.png">    </p:cNvPr>
+          <p:cNvPr id="15" name="Image 0" descr="preencoded.png"/>
           <p:cNvPicPr>
             <a:picLocks noChangeAspect="1"/>
           </p:cNvPicPr>
           <p:nvPr/>
         </p:nvPicPr>
         <p:blipFill>
-          <a:blip r:embed="rId1"/>
+          <a:blip r:embed="rId3"/>
           <a:stretch>
             <a:fillRect/>
           </a:stretch>
@@ -13222,6 +13704,13 @@
           </a:solidFill>
           <a:ln/>
         </p:spPr>
+        <p:txBody>
+          <a:bodyPr/>
+          <a:lstStyle/>
+          <a:p>
+            <a:endParaRPr lang="en-US"/>
+          </a:p>
+        </p:txBody>
       </p:sp>
       <p:sp>
         <p:nvSpPr>
@@ -13242,15 +13731,15 @@
         </p:spPr>
         <p:txBody>
           <a:bodyPr wrap="square" lIns="25400" tIns="25400" rIns="25400" bIns="25400" rtlCol="0" anchor="t">
-            <a:normAutofit/>
-          </a:bodyPr>
-          <a:lstStyle/>
-          <a:p>
-            <a:pPr algn="l" indent="0" marL="0">
-              <a:buNone/>
-            </a:pPr>
-            <a:r>
-              <a:rPr lang="en-US" sz="1500" b="1" spc="90" kern="0" dirty="0">
+            <a:normAutofit fontScale="92500"/>
+          </a:bodyPr>
+          <a:lstStyle/>
+          <a:p>
+            <a:pPr marL="0" indent="0" algn="l">
+              <a:buNone/>
+            </a:pPr>
+            <a:r>
+              <a:rPr lang="en-US" sz="1500" b="1" kern="0" spc="90" dirty="0">
                 <a:solidFill>
                   <a:srgbClr val="161512"/>
                 </a:solidFill>
@@ -13287,11 +13776,11 @@
           </a:bodyPr>
           <a:lstStyle/>
           <a:p>
-            <a:pPr algn="r" indent="0" marL="0">
-              <a:buNone/>
-            </a:pPr>
-            <a:r>
-              <a:rPr lang="en-US" sz="1350" spc="27" kern="0" dirty="0">
+            <a:pPr marL="0" indent="0" algn="r">
+              <a:buNone/>
+            </a:pPr>
+            <a:r>
+              <a:rPr lang="en-US" sz="1350" kern="0" spc="27" dirty="0">
                 <a:solidFill>
                   <a:srgbClr val="75716A"/>
                 </a:solidFill>
@@ -13324,11 +13813,11 @@
         </p:spPr>
         <p:txBody>
           <a:bodyPr wrap="square" lIns="25400" tIns="25400" rIns="25400" bIns="25400" rtlCol="0" anchor="t">
-            <a:normAutofit/>
-          </a:bodyPr>
-          <a:lstStyle/>
-          <a:p>
-            <a:pPr algn="l" indent="0" marL="0">
+            <a:normAutofit fontScale="92500"/>
+          </a:bodyPr>
+          <a:lstStyle/>
+          <a:p>
+            <a:pPr marL="0" indent="0" algn="l">
               <a:lnSpc>
                 <a:spcPct val="142000"/>
               </a:lnSpc>
@@ -13345,12 +13834,6 @@
               </a:rPr>
               <a:t>ϑ lower-bounds the magnitude of all non-zero Fourier coefficients. Sweep ϑ against n: acceptance collapses at the frontier </a:t>
             </a:r>
-            <a:pPr algn="l" indent="0" marL="0">
-              <a:lnSpc>
-                <a:spcPct val="142000"/>
-              </a:lnSpc>
-              <a:buNone/>
-            </a:pPr>
             <a:r>
               <a:rPr lang="en-US" sz="1650" i="1" dirty="0">
                 <a:solidFill>
@@ -13362,12 +13845,6 @@
               </a:rPr>
               <a:t>ϑ = 2·c</a:t>
             </a:r>
-            <a:pPr algn="l" indent="0" marL="0">
-              <a:lnSpc>
-                <a:spcPct val="142000"/>
-              </a:lnSpc>
-              <a:buNone/>
-            </a:pPr>
             <a:r>
               <a:rPr lang="en-US" sz="1375" baseline="-40000" dirty="0">
                 <a:solidFill>
@@ -13379,12 +13856,6 @@
               </a:rPr>
               <a:t>sec </a:t>
             </a:r>
-            <a:pPr algn="l" indent="0" marL="0">
-              <a:lnSpc>
-                <a:spcPct val="142000"/>
-              </a:lnSpc>
-              <a:buNone/>
-            </a:pPr>
             <a:r>
               <a:rPr lang="en-US" sz="1650" i="1" dirty="0">
                 <a:solidFill>
@@ -13396,12 +13867,6 @@
               </a:rPr>
               <a:t>= 0.2 </a:t>
             </a:r>
-            <a:pPr algn="l" indent="0" marL="0">
-              <a:lnSpc>
-                <a:spcPct val="142000"/>
-              </a:lnSpc>
-              <a:buNone/>
-            </a:pPr>
             <a:r>
               <a:rPr lang="en-US" sz="1650" dirty="0">
                 <a:solidFill>
@@ -13441,6 +13906,13 @@
             <a:prstDash val="solid"/>
           </a:ln>
         </p:spPr>
+        <p:txBody>
+          <a:bodyPr/>
+          <a:lstStyle/>
+          <a:p>
+            <a:endParaRPr lang="en-US"/>
+          </a:p>
+        </p:txBody>
       </p:sp>
       <p:sp>
         <p:nvSpPr>
@@ -13465,11 +13937,11 @@
           </a:bodyPr>
           <a:lstStyle/>
           <a:p>
-            <a:pPr algn="l" indent="0" marL="0">
-              <a:buNone/>
-            </a:pPr>
-            <a:r>
-              <a:rPr lang="en-US" sz="1125" spc="68" kern="0" dirty="0">
+            <a:pPr marL="0" indent="0" algn="l">
+              <a:buNone/>
+            </a:pPr>
+            <a:r>
+              <a:rPr lang="en-US" sz="1125" kern="0" spc="68" dirty="0">
                 <a:solidFill>
                   <a:srgbClr val="161512"/>
                 </a:solidFill>
@@ -13479,11 +13951,8 @@
               </a:rPr>
               <a:t>FIG. 6 </a:t>
             </a:r>
-            <a:pPr algn="l" indent="0" marL="0">
-              <a:buNone/>
-            </a:pPr>
-            <a:r>
-              <a:rPr lang="en-US" sz="1125" spc="68" kern="0" dirty="0">
+            <a:r>
+              <a:rPr lang="en-US" sz="1125" kern="0" spc="68" dirty="0">
                 <a:solidFill>
                   <a:srgbClr val="75716A"/>
                 </a:solidFill>
@@ -13499,14 +13968,14 @@
       </p:sp>
       <p:pic>
         <p:nvPicPr>
-          <p:cNvPr id="22" name="Image 1" descr="preencoded.png">    </p:cNvPr>
+          <p:cNvPr id="22" name="Image 1" descr="preencoded.png"/>
           <p:cNvPicPr>
             <a:picLocks noChangeAspect="1"/>
           </p:cNvPicPr>
           <p:nvPr/>
         </p:nvPicPr>
         <p:blipFill>
-          <a:blip r:embed="rId2"/>
+          <a:blip r:embed="rId4"/>
           <a:stretch>
             <a:fillRect/>
           </a:stretch>
@@ -13540,6 +14009,13 @@
           </a:solidFill>
           <a:ln/>
         </p:spPr>
+        <p:txBody>
+          <a:bodyPr/>
+          <a:lstStyle/>
+          <a:p>
+            <a:endParaRPr lang="en-US"/>
+          </a:p>
+        </p:txBody>
       </p:sp>
       <p:sp>
         <p:nvSpPr>
@@ -13564,11 +14040,11 @@
           </a:bodyPr>
           <a:lstStyle/>
           <a:p>
-            <a:pPr algn="l" indent="0" marL="0">
-              <a:buNone/>
-            </a:pPr>
-            <a:r>
-              <a:rPr lang="en-US" sz="1200" spc="48" kern="0" dirty="0">
+            <a:pPr marL="0" indent="0" algn="l">
+              <a:buNone/>
+            </a:pPr>
+            <a:r>
+              <a:rPr lang="en-US" sz="1200" kern="0" spc="48" dirty="0">
                 <a:solidFill>
                   <a:srgbClr val="3A3733"/>
                 </a:solidFill>
@@ -13598,6 +14074,7 @@
         <a:solidFill>
           <a:srgbClr val="161512"/>
         </a:solidFill>
+        <a:effectLst/>
       </p:bgPr>
     </p:bg>
     <p:spTree>
@@ -13633,6 +14110,13 @@
           </a:solidFill>
           <a:ln/>
         </p:spPr>
+        <p:txBody>
+          <a:bodyPr/>
+          <a:lstStyle/>
+          <a:p>
+            <a:endParaRPr lang="en-US"/>
+          </a:p>
+        </p:txBody>
       </p:sp>
       <p:sp>
         <p:nvSpPr>
@@ -13657,11 +14141,11 @@
           </a:bodyPr>
           <a:lstStyle/>
           <a:p>
-            <a:pPr algn="l" indent="0" marL="0">
-              <a:buNone/>
-            </a:pPr>
-            <a:r>
-              <a:rPr lang="en-US" sz="1350" b="1" spc="54" kern="0" dirty="0">
+            <a:pPr marL="0" indent="0" algn="l">
+              <a:buNone/>
+            </a:pPr>
+            <a:r>
+              <a:rPr lang="en-US" sz="1350" b="1" kern="0" spc="54" dirty="0">
                 <a:solidFill>
                   <a:srgbClr val="F6F3EC"/>
                 </a:solidFill>
@@ -13694,15 +14178,15 @@
         </p:spPr>
         <p:txBody>
           <a:bodyPr wrap="square" lIns="25400" tIns="25400" rIns="25400" bIns="25400" rtlCol="0" anchor="t">
-            <a:normAutofit/>
-          </a:bodyPr>
-          <a:lstStyle/>
-          <a:p>
-            <a:pPr algn="l" indent="0" marL="0">
-              <a:buNone/>
-            </a:pPr>
-            <a:r>
-              <a:rPr lang="en-US" sz="1350" spc="54" kern="0" dirty="0">
+            <a:normAutofit fontScale="92500"/>
+          </a:bodyPr>
+          <a:lstStyle/>
+          <a:p>
+            <a:pPr marL="0" indent="0" algn="l">
+              <a:buNone/>
+            </a:pPr>
+            <a:r>
+              <a:rPr lang="en-US" sz="1350" kern="0" spc="54" dirty="0">
                 <a:solidFill>
                   <a:srgbClr val="F6F3EC"/>
                 </a:solidFill>
@@ -13735,18 +14219,18 @@
         </p:spPr>
         <p:txBody>
           <a:bodyPr wrap="square" lIns="25400" tIns="25400" rIns="25400" bIns="25400" rtlCol="0" anchor="t">
-            <a:normAutofit/>
-          </a:bodyPr>
-          <a:lstStyle/>
-          <a:p>
-            <a:pPr algn="l" indent="0" marL="0">
+            <a:normAutofit fontScale="92500" lnSpcReduction="20000"/>
+          </a:bodyPr>
+          <a:lstStyle/>
+          <a:p>
+            <a:pPr marL="0" indent="0" algn="l">
               <a:lnSpc>
                 <a:spcPct val="112000"/>
               </a:lnSpc>
               <a:buNone/>
             </a:pPr>
             <a:r>
-              <a:rPr lang="en-US" sz="3900" spc="-58" kern="0" dirty="0">
+              <a:rPr lang="en-US" sz="3900" kern="0" spc="-58" dirty="0">
                 <a:solidFill>
                   <a:srgbClr val="F6F3EC"/>
                 </a:solidFill>
@@ -13779,6 +14263,13 @@
           </a:solidFill>
           <a:ln/>
         </p:spPr>
+        <p:txBody>
+          <a:bodyPr/>
+          <a:lstStyle/>
+          <a:p>
+            <a:endParaRPr lang="en-US"/>
+          </a:p>
+        </p:txBody>
       </p:sp>
       <p:sp>
         <p:nvSpPr>
@@ -13799,15 +14290,15 @@
         </p:spPr>
         <p:txBody>
           <a:bodyPr wrap="square" lIns="25400" tIns="25400" rIns="25400" bIns="25400" rtlCol="0" anchor="t">
-            <a:normAutofit/>
-          </a:bodyPr>
-          <a:lstStyle/>
-          <a:p>
-            <a:pPr algn="l" indent="0" marL="0">
-              <a:buNone/>
-            </a:pPr>
-            <a:r>
-              <a:rPr lang="en-US" sz="1500" b="1" spc="90" kern="0" dirty="0">
+            <a:normAutofit fontScale="92500"/>
+          </a:bodyPr>
+          <a:lstStyle/>
+          <a:p>
+            <a:pPr marL="0" indent="0" algn="l">
+              <a:buNone/>
+            </a:pPr>
+            <a:r>
+              <a:rPr lang="en-US" sz="1500" b="1" kern="0" spc="90" dirty="0">
                 <a:solidFill>
                   <a:srgbClr val="F6F3EC"/>
                 </a:solidFill>
@@ -13823,14 +14314,304 @@
       </p:sp>
       <p:sp>
         <p:nvSpPr>
-          <p:cNvPr id="8" name="Text 6"/>
-          <p:cNvSpPr/>
-          <p:nvPr/>
-        </p:nvSpPr>
-        <p:spPr>
-          <a:xfrm>
-            <a:off x="6481465" y="2695277"/>
-            <a:ext cx="2357735" cy="261937"/>
+          <p:cNvPr id="9" name="Shape 7"/>
+          <p:cNvSpPr/>
+          <p:nvPr/>
+        </p:nvSpPr>
+        <p:spPr>
+          <a:xfrm>
+            <a:off x="914400" y="4307235"/>
+            <a:ext cx="7924800" cy="9525"/>
+          </a:xfrm>
+          <a:prstGeom prst="rect">
+            <a:avLst/>
+          </a:prstGeom>
+          <a:solidFill>
+            <a:srgbClr val="3A3733"/>
+          </a:solidFill>
+          <a:ln/>
+        </p:spPr>
+        <p:txBody>
+          <a:bodyPr/>
+          <a:lstStyle/>
+          <a:p>
+            <a:endParaRPr lang="en-US"/>
+          </a:p>
+        </p:txBody>
+      </p:sp>
+      <p:sp>
+        <p:nvSpPr>
+          <p:cNvPr id="10" name="Text 8"/>
+          <p:cNvSpPr/>
+          <p:nvPr/>
+        </p:nvSpPr>
+        <p:spPr>
+          <a:xfrm>
+            <a:off x="1181100" y="3238202"/>
+            <a:ext cx="7895844" cy="1011882"/>
+          </a:xfrm>
+          <a:prstGeom prst="rect">
+            <a:avLst/>
+          </a:prstGeom>
+          <a:noFill/>
+          <a:ln/>
+        </p:spPr>
+        <p:txBody>
+          <a:bodyPr wrap="square" lIns="25400" tIns="25400" rIns="25400" bIns="25400" rtlCol="0" anchor="t">
+            <a:normAutofit fontScale="92500" lnSpcReduction="20000"/>
+          </a:bodyPr>
+          <a:lstStyle/>
+          <a:p>
+            <a:pPr marL="0" indent="0" algn="l">
+              <a:lnSpc>
+                <a:spcPct val="142000"/>
+              </a:lnSpc>
+              <a:buNone/>
+            </a:pPr>
+            <a:r>
+              <a:rPr lang="en-US" sz="1800" b="1" dirty="0">
+                <a:solidFill>
+                  <a:srgbClr val="F6F3EC"/>
+                </a:solidFill>
+                <a:latin typeface="IBM Plex Serif" pitchFamily="34" charset="0"/>
+                <a:ea typeface="IBM Plex Serif" pitchFamily="34" charset="-122"/>
+                <a:cs typeface="IBM Plex Serif" pitchFamily="34" charset="-120"/>
+              </a:rPr>
+              <a:t>Sample budgets three orders below analytic Hoeffding. </a:t>
+            </a:r>
+            <a:r>
+              <a:rPr lang="en-US" sz="1800" dirty="0">
+                <a:solidFill>
+                  <a:srgbClr val="DAD4C7"/>
+                </a:solidFill>
+                <a:latin typeface="IBM Plex Serif" pitchFamily="34" charset="0"/>
+                <a:ea typeface="IBM Plex Serif" pitchFamily="34" charset="-122"/>
+                <a:cs typeface="IBM Plex Serif" pitchFamily="34" charset="-120"/>
+              </a:rPr>
+              <a:t>For </a:t>
+            </a:r>
+            <a:r>
+              <a:rPr lang="en-US" sz="1800" dirty="0">
+                <a:solidFill>
+                  <a:srgbClr val="DAD4C7"/>
+                </a:solidFill>
+                <a:latin typeface="IBM Plex Mono" pitchFamily="34" charset="0"/>
+                <a:ea typeface="IBM Plex Mono" pitchFamily="34" charset="-122"/>
+                <a:cs typeface="IBM Plex Mono" pitchFamily="34" charset="-120"/>
+              </a:rPr>
+              <a:t>|L|=10, ε=0.3, δ=0.1 </a:t>
+            </a:r>
+            <a:r>
+              <a:rPr lang="en-US" sz="1800" dirty="0">
+                <a:solidFill>
+                  <a:srgbClr val="DAD4C7"/>
+                </a:solidFill>
+                <a:latin typeface="IBM Plex Serif" pitchFamily="34" charset="0"/>
+                <a:ea typeface="IBM Plex Serif" pitchFamily="34" charset="-122"/>
+                <a:cs typeface="IBM Plex Serif" pitchFamily="34" charset="-120"/>
+              </a:rPr>
+              <a:t>the requirement is ≈ </a:t>
+            </a:r>
+            <a:r>
+              <a:rPr lang="en-US" sz="1800" dirty="0">
+                <a:solidFill>
+                  <a:srgbClr val="DAD4C7"/>
+                </a:solidFill>
+                <a:latin typeface="IBM Plex Mono" pitchFamily="34" charset="0"/>
+                <a:ea typeface="IBM Plex Mono" pitchFamily="34" charset="-122"/>
+                <a:cs typeface="IBM Plex Mono" pitchFamily="34" charset="-120"/>
+              </a:rPr>
+              <a:t>3.8×10⁷ </a:t>
+            </a:r>
+            <a:r>
+              <a:rPr lang="en-US" sz="1800" dirty="0">
+                <a:solidFill>
+                  <a:srgbClr val="DAD4C7"/>
+                </a:solidFill>
+                <a:latin typeface="IBM Plex Serif" pitchFamily="34" charset="0"/>
+                <a:ea typeface="IBM Plex Serif" pitchFamily="34" charset="-122"/>
+                <a:cs typeface="IBM Plex Serif" pitchFamily="34" charset="-120"/>
+              </a:rPr>
+              <a:t>; experiments use ~10⁴. Maps mechanisms, not asymptotic complexity.</a:t>
+            </a:r>
+            <a:endParaRPr lang="en-US" sz="1800" dirty="0"/>
+          </a:p>
+        </p:txBody>
+      </p:sp>
+      <p:sp>
+        <p:nvSpPr>
+          <p:cNvPr id="11" name="Shape 9"/>
+          <p:cNvSpPr/>
+          <p:nvPr/>
+        </p:nvSpPr>
+        <p:spPr>
+          <a:xfrm>
+            <a:off x="914400" y="5156448"/>
+            <a:ext cx="7924800" cy="9525"/>
+          </a:xfrm>
+          <a:prstGeom prst="rect">
+            <a:avLst/>
+          </a:prstGeom>
+          <a:solidFill>
+            <a:srgbClr val="3A3733"/>
+          </a:solidFill>
+          <a:ln/>
+        </p:spPr>
+        <p:txBody>
+          <a:bodyPr/>
+          <a:lstStyle/>
+          <a:p>
+            <a:endParaRPr lang="en-US"/>
+          </a:p>
+        </p:txBody>
+      </p:sp>
+      <p:sp>
+        <p:nvSpPr>
+          <p:cNvPr id="12" name="Text 10"/>
+          <p:cNvSpPr/>
+          <p:nvPr/>
+        </p:nvSpPr>
+        <p:spPr>
+          <a:xfrm>
+            <a:off x="1181100" y="4412010"/>
+            <a:ext cx="7895844" cy="687288"/>
+          </a:xfrm>
+          <a:prstGeom prst="rect">
+            <a:avLst/>
+          </a:prstGeom>
+          <a:noFill/>
+          <a:ln/>
+        </p:spPr>
+        <p:txBody>
+          <a:bodyPr wrap="square" lIns="25400" tIns="25400" rIns="25400" bIns="25400" rtlCol="0" anchor="t">
+            <a:normAutofit fontScale="92500" lnSpcReduction="20000"/>
+          </a:bodyPr>
+          <a:lstStyle/>
+          <a:p>
+            <a:pPr marL="0" indent="0" algn="l">
+              <a:lnSpc>
+                <a:spcPct val="142000"/>
+              </a:lnSpc>
+              <a:buNone/>
+            </a:pPr>
+            <a:r>
+              <a:rPr lang="en-US" sz="1800" b="1" dirty="0">
+                <a:solidFill>
+                  <a:srgbClr val="F6F3EC"/>
+                </a:solidFill>
+                <a:latin typeface="IBM Plex Serif" pitchFamily="34" charset="0"/>
+                <a:ea typeface="IBM Plex Serif" pitchFamily="34" charset="-122"/>
+                <a:cs typeface="IBM Plex Serif" pitchFamily="34" charset="-120"/>
+              </a:rPr>
+              <a:t>No real quantum hardware. </a:t>
+            </a:r>
+            <a:r>
+              <a:rPr lang="en-US" sz="1800" dirty="0">
+                <a:solidFill>
+                  <a:srgbClr val="DAD4C7"/>
+                </a:solidFill>
+                <a:latin typeface="IBM Plex Serif" pitchFamily="34" charset="0"/>
+                <a:ea typeface="IBM Plex Serif" pitchFamily="34" charset="-122"/>
+                <a:cs typeface="IBM Plex Serif" pitchFamily="34" charset="-120"/>
+              </a:rPr>
+              <a:t>Every measurement is classical simulation. Cross-talk, decay, biased readout are unstressed.</a:t>
+            </a:r>
+            <a:endParaRPr lang="en-US" sz="1800" dirty="0"/>
+          </a:p>
+        </p:txBody>
+      </p:sp>
+      <p:sp>
+        <p:nvSpPr>
+          <p:cNvPr id="13" name="Text 11"/>
+          <p:cNvSpPr/>
+          <p:nvPr/>
+        </p:nvSpPr>
+        <p:spPr>
+          <a:xfrm>
+            <a:off x="1181100" y="5261223"/>
+            <a:ext cx="7895844" cy="1011882"/>
+          </a:xfrm>
+          <a:prstGeom prst="rect">
+            <a:avLst/>
+          </a:prstGeom>
+          <a:noFill/>
+          <a:ln/>
+        </p:spPr>
+        <p:txBody>
+          <a:bodyPr wrap="square" lIns="25400" tIns="25400" rIns="25400" bIns="25400" rtlCol="0" anchor="t">
+            <a:normAutofit fontScale="92500" lnSpcReduction="20000"/>
+          </a:bodyPr>
+          <a:lstStyle/>
+          <a:p>
+            <a:pPr marL="0" indent="0" algn="l">
+              <a:lnSpc>
+                <a:spcPct val="142000"/>
+              </a:lnSpc>
+              <a:buNone/>
+            </a:pPr>
+            <a:r>
+              <a:rPr lang="en-US" sz="1800" b="1" dirty="0">
+                <a:solidFill>
+                  <a:srgbClr val="F6F3EC"/>
+                </a:solidFill>
+                <a:latin typeface="IBM Plex Serif" pitchFamily="34" charset="0"/>
+                <a:ea typeface="IBM Plex Serif" pitchFamily="34" charset="-122"/>
+                <a:cs typeface="IBM Plex Serif" pitchFamily="34" charset="-120"/>
+              </a:rPr>
+              <a:t>Brute-force circuit oracle caps gate-noise study at n=8. </a:t>
+            </a:r>
+            <a:r>
+              <a:rPr lang="en-US" sz="1800" dirty="0">
+                <a:solidFill>
+                  <a:srgbClr val="DAD4C7"/>
+                </a:solidFill>
+                <a:latin typeface="IBM Plex Serif" pitchFamily="34" charset="0"/>
+                <a:ea typeface="IBM Plex Serif" pitchFamily="34" charset="-122"/>
+                <a:cs typeface="IBM Plex Serif" pitchFamily="34" charset="-120"/>
+              </a:rPr>
+              <a:t>The MCX construction is exponential; the Statevector path avoids this but cannot carry per-gate noise.</a:t>
+            </a:r>
+            <a:endParaRPr lang="en-US" sz="1800" dirty="0"/>
+          </a:p>
+        </p:txBody>
+      </p:sp>
+      <p:sp>
+        <p:nvSpPr>
+          <p:cNvPr id="14" name="Shape 12"/>
+          <p:cNvSpPr/>
+          <p:nvPr/>
+        </p:nvSpPr>
+        <p:spPr>
+          <a:xfrm>
+            <a:off x="9448800" y="3000077"/>
+            <a:ext cx="7924800" cy="9525"/>
+          </a:xfrm>
+          <a:prstGeom prst="rect">
+            <a:avLst/>
+          </a:prstGeom>
+          <a:solidFill>
+            <a:srgbClr val="3A3733"/>
+          </a:solidFill>
+          <a:ln/>
+        </p:spPr>
+        <p:txBody>
+          <a:bodyPr/>
+          <a:lstStyle/>
+          <a:p>
+            <a:endParaRPr lang="en-US"/>
+          </a:p>
+        </p:txBody>
+      </p:sp>
+      <p:sp>
+        <p:nvSpPr>
+          <p:cNvPr id="15" name="Text 13"/>
+          <p:cNvSpPr/>
+          <p:nvPr/>
+        </p:nvSpPr>
+        <p:spPr>
+          <a:xfrm>
+            <a:off x="9448800" y="2676227"/>
+            <a:ext cx="1624831" cy="285750"/>
           </a:xfrm>
           <a:prstGeom prst="rect">
             <a:avLst/>
@@ -13844,33 +14625,33 @@
           </a:bodyPr>
           <a:lstStyle/>
           <a:p>
-            <a:pPr algn="r" indent="0" marL="0">
-              <a:buNone/>
-            </a:pPr>
-            <a:r>
-              <a:rPr lang="en-US" sz="1350" spc="27" kern="0" dirty="0">
-                <a:solidFill>
-                  <a:srgbClr val="9C978C"/>
+            <a:pPr marL="0" indent="0" algn="l">
+              <a:buNone/>
+            </a:pPr>
+            <a:r>
+              <a:rPr lang="en-US" sz="1500" b="1" kern="0" spc="90" dirty="0">
+                <a:solidFill>
+                  <a:srgbClr val="F6F3EC"/>
                 </a:solidFill>
                 <a:latin typeface="IBM Plex Sans Condensed" pitchFamily="34" charset="0"/>
                 <a:ea typeface="IBM Plex Sans Condensed" pitchFamily="34" charset="-122"/>
                 <a:cs typeface="IBM Plex Sans Condensed" pitchFamily="34" charset="-120"/>
               </a:rPr>
-              <a:t>own these before they’re asked</a:t>
-            </a:r>
-            <a:endParaRPr lang="en-US" sz="1350" dirty="0"/>
-          </a:p>
-        </p:txBody>
-      </p:sp>
-      <p:sp>
-        <p:nvSpPr>
-          <p:cNvPr id="9" name="Shape 7"/>
-          <p:cNvSpPr/>
-          <p:nvPr/>
-        </p:nvSpPr>
-        <p:spPr>
-          <a:xfrm>
-            <a:off x="914400" y="4307235"/>
+              <a:t>CONTRIBUTIONS</a:t>
+            </a:r>
+            <a:endParaRPr lang="en-US" sz="1500" dirty="0"/>
+          </a:p>
+        </p:txBody>
+      </p:sp>
+      <p:sp>
+        <p:nvSpPr>
+          <p:cNvPr id="17" name="Shape 15"/>
+          <p:cNvSpPr/>
+          <p:nvPr/>
+        </p:nvSpPr>
+        <p:spPr>
+          <a:xfrm>
+            <a:off x="9448800" y="3658046"/>
             <a:ext cx="7924800" cy="9525"/>
           </a:xfrm>
           <a:prstGeom prst="rect">
@@ -13881,17 +14662,24 @@
           </a:solidFill>
           <a:ln/>
         </p:spPr>
-      </p:sp>
-      <p:sp>
-        <p:nvSpPr>
-          <p:cNvPr id="10" name="Text 8"/>
-          <p:cNvSpPr/>
-          <p:nvPr/>
-        </p:nvSpPr>
-        <p:spPr>
-          <a:xfrm>
-            <a:off x="1181100" y="3238202"/>
-            <a:ext cx="7895844" cy="1011882"/>
+        <p:txBody>
+          <a:bodyPr/>
+          <a:lstStyle/>
+          <a:p>
+            <a:endParaRPr lang="en-US"/>
+          </a:p>
+        </p:txBody>
+      </p:sp>
+      <p:sp>
+        <p:nvSpPr>
+          <p:cNvPr id="18" name="Text 16"/>
+          <p:cNvSpPr/>
+          <p:nvPr/>
+        </p:nvSpPr>
+        <p:spPr>
+          <a:xfrm>
+            <a:off x="9715500" y="3238202"/>
+            <a:ext cx="7895844" cy="362694"/>
           </a:xfrm>
           <a:prstGeom prst="rect">
             <a:avLst/>
@@ -13901,101 +14689,153 @@
         </p:spPr>
         <p:txBody>
           <a:bodyPr wrap="square" lIns="25400" tIns="25400" rIns="25400" bIns="25400" rtlCol="0" anchor="t">
-            <a:normAutofit/>
-          </a:bodyPr>
-          <a:lstStyle/>
-          <a:p>
-            <a:pPr algn="l" indent="0" marL="0">
+            <a:normAutofit fontScale="92500" lnSpcReduction="20000"/>
+          </a:bodyPr>
+          <a:lstStyle/>
+          <a:p>
+            <a:pPr marL="0" indent="0" algn="l">
               <a:lnSpc>
                 <a:spcPct val="142000"/>
               </a:lnSpc>
               <a:buNone/>
             </a:pPr>
             <a:r>
-              <a:rPr lang="en-US" sz="1800" b="1" dirty="0">
-                <a:solidFill>
-                  <a:srgbClr val="F6F3EC"/>
+              <a:rPr lang="en-US" sz="1800" dirty="0">
+                <a:solidFill>
+                  <a:srgbClr val="DAD4C7"/>
                 </a:solidFill>
                 <a:latin typeface="IBM Plex Serif" pitchFamily="34" charset="0"/>
                 <a:ea typeface="IBM Plex Serif" pitchFamily="34" charset="-122"/>
                 <a:cs typeface="IBM Plex Serif" pitchFamily="34" charset="-120"/>
               </a:rPr>
-              <a:t>Sample budgets three orders below analytic Hoeffding. </a:t>
-            </a:r>
-            <a:pPr algn="l" indent="0" marL="0">
+              <a:t>First faithful implementation of the MoS protocol</a:t>
+            </a:r>
+            <a:endParaRPr lang="en-US" sz="1800" dirty="0"/>
+          </a:p>
+        </p:txBody>
+      </p:sp>
+      <p:sp>
+        <p:nvSpPr>
+          <p:cNvPr id="19" name="Shape 17"/>
+          <p:cNvSpPr/>
+          <p:nvPr/>
+        </p:nvSpPr>
+        <p:spPr>
+          <a:xfrm>
+            <a:off x="9448800" y="4831854"/>
+            <a:ext cx="7924800" cy="9525"/>
+          </a:xfrm>
+          <a:prstGeom prst="rect">
+            <a:avLst/>
+          </a:prstGeom>
+          <a:solidFill>
+            <a:srgbClr val="3A3733"/>
+          </a:solidFill>
+          <a:ln/>
+        </p:spPr>
+        <p:txBody>
+          <a:bodyPr/>
+          <a:lstStyle/>
+          <a:p>
+            <a:endParaRPr lang="en-US"/>
+          </a:p>
+        </p:txBody>
+      </p:sp>
+      <p:sp>
+        <p:nvSpPr>
+          <p:cNvPr id="20" name="Text 18"/>
+          <p:cNvSpPr/>
+          <p:nvPr/>
+        </p:nvSpPr>
+        <p:spPr>
+          <a:xfrm>
+            <a:off x="9715500" y="3762821"/>
+            <a:ext cx="7895844" cy="1011882"/>
+          </a:xfrm>
+          <a:prstGeom prst="rect">
+            <a:avLst/>
+          </a:prstGeom>
+          <a:noFill/>
+          <a:ln/>
+        </p:spPr>
+        <p:txBody>
+          <a:bodyPr wrap="square" lIns="25400" tIns="25400" rIns="25400" bIns="25400" rtlCol="0" anchor="t">
+            <a:normAutofit fontScale="92500" lnSpcReduction="20000"/>
+          </a:bodyPr>
+          <a:lstStyle/>
+          <a:p>
+            <a:pPr marL="0" indent="0" algn="l">
               <a:lnSpc>
                 <a:spcPct val="142000"/>
               </a:lnSpc>
               <a:buNone/>
             </a:pPr>
             <a:r>
-              <a:rPr lang="en-US" sz="1800" dirty="0">
-                <a:solidFill>
-                  <a:srgbClr val="DAD4C7"/>
+              <a:rPr lang="en-US" sz="1800" b="1" dirty="0">
+                <a:solidFill>
+                  <a:srgbClr val="F6F3EC"/>
                 </a:solidFill>
                 <a:latin typeface="IBM Plex Serif" pitchFamily="34" charset="0"/>
                 <a:ea typeface="IBM Plex Serif" pitchFamily="34" charset="-122"/>
                 <a:cs typeface="IBM Plex Serif" pitchFamily="34" charset="-120"/>
               </a:rPr>
-              <a:t>For </a:t>
-            </a:r>
-            <a:pPr algn="l" indent="0" marL="0">
+              <a:t>Two failure modes characterised. </a:t>
+            </a:r>
+            <a:r>
+              <a:rPr lang="en-US" sz="1800" dirty="0">
+                <a:solidFill>
+                  <a:srgbClr val="DAD4C7"/>
+                </a:solidFill>
+                <a:latin typeface="IBM Plex Serif" pitchFamily="34" charset="0"/>
+                <a:ea typeface="IBM Plex Serif" pitchFamily="34" charset="-122"/>
+                <a:cs typeface="IBM Plex Serif" pitchFamily="34" charset="-120"/>
+              </a:rPr>
+              <a:t>Vanishing-margin acceptance ceiling under mixed-coefficient cheats; prover-side cliff under per-gate depolarising noise.</a:t>
+            </a:r>
+            <a:endParaRPr lang="en-US" sz="1800" dirty="0"/>
+          </a:p>
+        </p:txBody>
+      </p:sp>
+      <p:sp>
+        <p:nvSpPr>
+          <p:cNvPr id="21" name="Text 19"/>
+          <p:cNvSpPr/>
+          <p:nvPr/>
+        </p:nvSpPr>
+        <p:spPr>
+          <a:xfrm>
+            <a:off x="9715500" y="4936629"/>
+            <a:ext cx="7895844" cy="687288"/>
+          </a:xfrm>
+          <a:prstGeom prst="rect">
+            <a:avLst/>
+          </a:prstGeom>
+          <a:noFill/>
+          <a:ln/>
+        </p:spPr>
+        <p:txBody>
+          <a:bodyPr wrap="square" lIns="25400" tIns="25400" rIns="25400" bIns="25400" rtlCol="0" anchor="t">
+            <a:normAutofit fontScale="92500" lnSpcReduction="20000"/>
+          </a:bodyPr>
+          <a:lstStyle/>
+          <a:p>
+            <a:pPr marL="0" indent="0" algn="l">
               <a:lnSpc>
                 <a:spcPct val="142000"/>
               </a:lnSpc>
               <a:buNone/>
             </a:pPr>
             <a:r>
-              <a:rPr lang="en-US" sz="1800" dirty="0">
-                <a:solidFill>
-                  <a:srgbClr val="DAD4C7"/>
-                </a:solidFill>
-                <a:latin typeface="IBM Plex Mono" pitchFamily="34" charset="0"/>
-                <a:ea typeface="IBM Plex Mono" pitchFamily="34" charset="-122"/>
-                <a:cs typeface="IBM Plex Mono" pitchFamily="34" charset="-120"/>
-              </a:rPr>
-              <a:t>|L|=10, ε=0.3, δ=0.1 </a:t>
-            </a:r>
-            <a:pPr algn="l" indent="0" marL="0">
-              <a:lnSpc>
-                <a:spcPct val="142000"/>
-              </a:lnSpc>
-              <a:buNone/>
-            </a:pPr>
-            <a:r>
-              <a:rPr lang="en-US" sz="1800" dirty="0">
-                <a:solidFill>
-                  <a:srgbClr val="DAD4C7"/>
+              <a:rPr lang="en-US" sz="1800" b="1" dirty="0">
+                <a:solidFill>
+                  <a:srgbClr val="F6F3EC"/>
                 </a:solidFill>
                 <a:latin typeface="IBM Plex Serif" pitchFamily="34" charset="0"/>
                 <a:ea typeface="IBM Plex Serif" pitchFamily="34" charset="-122"/>
                 <a:cs typeface="IBM Plex Serif" pitchFamily="34" charset="-120"/>
               </a:rPr>
-              <a:t>the requirement is ≈ </a:t>
-            </a:r>
-            <a:pPr algn="l" indent="0" marL="0">
-              <a:lnSpc>
-                <a:spcPct val="142000"/>
-              </a:lnSpc>
-              <a:buNone/>
-            </a:pPr>
-            <a:r>
-              <a:rPr lang="en-US" sz="1800" dirty="0">
-                <a:solidFill>
-                  <a:srgbClr val="DAD4C7"/>
-                </a:solidFill>
-                <a:latin typeface="IBM Plex Mono" pitchFamily="34" charset="0"/>
-                <a:ea typeface="IBM Plex Mono" pitchFamily="34" charset="-122"/>
-                <a:cs typeface="IBM Plex Mono" pitchFamily="34" charset="-120"/>
-              </a:rPr>
-              <a:t>3.8×10⁷ </a:t>
-            </a:r>
-            <a:pPr algn="l" indent="0" marL="0">
-              <a:lnSpc>
-                <a:spcPct val="142000"/>
-              </a:lnSpc>
-              <a:buNone/>
-            </a:pPr>
+              <a:t>One open theoretical question raised. </a:t>
+            </a:r>
             <a:r>
               <a:rPr lang="en-US" sz="1800" dirty="0">
                 <a:solidFill>
@@ -14005,7 +14845,7 @@
                 <a:ea typeface="IBM Plex Serif" pitchFamily="34" charset="-122"/>
                 <a:cs typeface="IBM Plex Serif" pitchFamily="34" charset="-120"/>
               </a:rPr>
-              <a:t>; experiments use ~10⁴. Maps mechanisms, not asymptotic complexity.</a:t>
+              <a:t>Per-gate depolarising noise: Ma–Su–Deng treat output-side, not gate-side.</a:t>
             </a:r>
             <a:endParaRPr lang="en-US" sz="1800" dirty="0"/>
           </a:p>
@@ -14013,14 +14853,14 @@
       </p:sp>
       <p:sp>
         <p:nvSpPr>
-          <p:cNvPr id="11" name="Shape 9"/>
-          <p:cNvSpPr/>
-          <p:nvPr/>
-        </p:nvSpPr>
-        <p:spPr>
-          <a:xfrm>
-            <a:off x="914400" y="5156448"/>
-            <a:ext cx="7924800" cy="9525"/>
+          <p:cNvPr id="22" name="Shape 20"/>
+          <p:cNvSpPr/>
+          <p:nvPr/>
+        </p:nvSpPr>
+        <p:spPr>
+          <a:xfrm>
+            <a:off x="914400" y="9486900"/>
+            <a:ext cx="16459200" cy="9525"/>
           </a:xfrm>
           <a:prstGeom prst="rect">
             <a:avLst/>
@@ -14030,17 +14870,24 @@
           </a:solidFill>
           <a:ln/>
         </p:spPr>
-      </p:sp>
-      <p:sp>
-        <p:nvSpPr>
-          <p:cNvPr id="12" name="Text 10"/>
-          <p:cNvSpPr/>
-          <p:nvPr/>
-        </p:nvSpPr>
-        <p:spPr>
-          <a:xfrm>
-            <a:off x="1181100" y="4412010"/>
-            <a:ext cx="7895844" cy="687288"/>
+        <p:txBody>
+          <a:bodyPr/>
+          <a:lstStyle/>
+          <a:p>
+            <a:endParaRPr lang="en-US"/>
+          </a:p>
+        </p:txBody>
+      </p:sp>
+      <p:sp>
+        <p:nvSpPr>
+          <p:cNvPr id="23" name="Text 21"/>
+          <p:cNvSpPr/>
+          <p:nvPr/>
+        </p:nvSpPr>
+        <p:spPr>
+          <a:xfrm>
+            <a:off x="914400" y="9629775"/>
+            <a:ext cx="3251267" cy="238125"/>
           </a:xfrm>
           <a:prstGeom prst="rect">
             <a:avLst/>
@@ -14054,461 +14901,11 @@
           </a:bodyPr>
           <a:lstStyle/>
           <a:p>
-            <a:pPr algn="l" indent="0" marL="0">
-              <a:lnSpc>
-                <a:spcPct val="142000"/>
-              </a:lnSpc>
-              <a:buNone/>
-            </a:pPr>
-            <a:r>
-              <a:rPr lang="en-US" sz="1800" b="1" dirty="0">
-                <a:solidFill>
-                  <a:srgbClr val="F6F3EC"/>
-                </a:solidFill>
-                <a:latin typeface="IBM Plex Serif" pitchFamily="34" charset="0"/>
-                <a:ea typeface="IBM Plex Serif" pitchFamily="34" charset="-122"/>
-                <a:cs typeface="IBM Plex Serif" pitchFamily="34" charset="-120"/>
-              </a:rPr>
-              <a:t>No real quantum hardware. </a:t>
-            </a:r>
-            <a:pPr algn="l" indent="0" marL="0">
-              <a:lnSpc>
-                <a:spcPct val="142000"/>
-              </a:lnSpc>
-              <a:buNone/>
-            </a:pPr>
-            <a:r>
-              <a:rPr lang="en-US" sz="1800" dirty="0">
-                <a:solidFill>
-                  <a:srgbClr val="DAD4C7"/>
-                </a:solidFill>
-                <a:latin typeface="IBM Plex Serif" pitchFamily="34" charset="0"/>
-                <a:ea typeface="IBM Plex Serif" pitchFamily="34" charset="-122"/>
-                <a:cs typeface="IBM Plex Serif" pitchFamily="34" charset="-120"/>
-              </a:rPr>
-              <a:t>Every measurement is classical simulation. Cross-talk, decay, biased readout are unstressed.</a:t>
-            </a:r>
-            <a:endParaRPr lang="en-US" sz="1800" dirty="0"/>
-          </a:p>
-        </p:txBody>
-      </p:sp>
-      <p:sp>
-        <p:nvSpPr>
-          <p:cNvPr id="13" name="Text 11"/>
-          <p:cNvSpPr/>
-          <p:nvPr/>
-        </p:nvSpPr>
-        <p:spPr>
-          <a:xfrm>
-            <a:off x="1181100" y="5261223"/>
-            <a:ext cx="7895844" cy="1011882"/>
-          </a:xfrm>
-          <a:prstGeom prst="rect">
-            <a:avLst/>
-          </a:prstGeom>
-          <a:noFill/>
-          <a:ln/>
-        </p:spPr>
-        <p:txBody>
-          <a:bodyPr wrap="square" lIns="25400" tIns="25400" rIns="25400" bIns="25400" rtlCol="0" anchor="t">
-            <a:normAutofit/>
-          </a:bodyPr>
-          <a:lstStyle/>
-          <a:p>
-            <a:pPr algn="l" indent="0" marL="0">
-              <a:lnSpc>
-                <a:spcPct val="142000"/>
-              </a:lnSpc>
-              <a:buNone/>
-            </a:pPr>
-            <a:r>
-              <a:rPr lang="en-US" sz="1800" b="1" dirty="0">
-                <a:solidFill>
-                  <a:srgbClr val="F6F3EC"/>
-                </a:solidFill>
-                <a:latin typeface="IBM Plex Serif" pitchFamily="34" charset="0"/>
-                <a:ea typeface="IBM Plex Serif" pitchFamily="34" charset="-122"/>
-                <a:cs typeface="IBM Plex Serif" pitchFamily="34" charset="-120"/>
-              </a:rPr>
-              <a:t>Brute-force circuit oracle caps gate-noise study at n=8. </a:t>
-            </a:r>
-            <a:pPr algn="l" indent="0" marL="0">
-              <a:lnSpc>
-                <a:spcPct val="142000"/>
-              </a:lnSpc>
-              <a:buNone/>
-            </a:pPr>
-            <a:r>
-              <a:rPr lang="en-US" sz="1800" dirty="0">
-                <a:solidFill>
-                  <a:srgbClr val="DAD4C7"/>
-                </a:solidFill>
-                <a:latin typeface="IBM Plex Serif" pitchFamily="34" charset="0"/>
-                <a:ea typeface="IBM Plex Serif" pitchFamily="34" charset="-122"/>
-                <a:cs typeface="IBM Plex Serif" pitchFamily="34" charset="-120"/>
-              </a:rPr>
-              <a:t>The MCX construction is exponential; the Statevector path avoids this but cannot carry per-gate noise.</a:t>
-            </a:r>
-            <a:endParaRPr lang="en-US" sz="1800" dirty="0"/>
-          </a:p>
-        </p:txBody>
-      </p:sp>
-      <p:sp>
-        <p:nvSpPr>
-          <p:cNvPr id="14" name="Shape 12"/>
-          <p:cNvSpPr/>
-          <p:nvPr/>
-        </p:nvSpPr>
-        <p:spPr>
-          <a:xfrm>
-            <a:off x="9448800" y="3000077"/>
-            <a:ext cx="7924800" cy="9525"/>
-          </a:xfrm>
-          <a:prstGeom prst="rect">
-            <a:avLst/>
-          </a:prstGeom>
-          <a:solidFill>
-            <a:srgbClr val="3A3733"/>
-          </a:solidFill>
-          <a:ln/>
-        </p:spPr>
-      </p:sp>
-      <p:sp>
-        <p:nvSpPr>
-          <p:cNvPr id="15" name="Text 13"/>
-          <p:cNvSpPr/>
-          <p:nvPr/>
-        </p:nvSpPr>
-        <p:spPr>
-          <a:xfrm>
-            <a:off x="9448800" y="2676227"/>
-            <a:ext cx="1624831" cy="285750"/>
-          </a:xfrm>
-          <a:prstGeom prst="rect">
-            <a:avLst/>
-          </a:prstGeom>
-          <a:noFill/>
-          <a:ln/>
-        </p:spPr>
-        <p:txBody>
-          <a:bodyPr wrap="square" lIns="25400" tIns="25400" rIns="25400" bIns="25400" rtlCol="0" anchor="t">
-            <a:normAutofit/>
-          </a:bodyPr>
-          <a:lstStyle/>
-          <a:p>
-            <a:pPr algn="l" indent="0" marL="0">
-              <a:buNone/>
-            </a:pPr>
-            <a:r>
-              <a:rPr lang="en-US" sz="1500" b="1" spc="90" kern="0" dirty="0">
-                <a:solidFill>
-                  <a:srgbClr val="F6F3EC"/>
-                </a:solidFill>
-                <a:latin typeface="IBM Plex Sans Condensed" pitchFamily="34" charset="0"/>
-                <a:ea typeface="IBM Plex Sans Condensed" pitchFamily="34" charset="-122"/>
-                <a:cs typeface="IBM Plex Sans Condensed" pitchFamily="34" charset="-120"/>
-              </a:rPr>
-              <a:t>CONTRIBUTIONS</a:t>
-            </a:r>
-            <a:endParaRPr lang="en-US" sz="1500" dirty="0"/>
-          </a:p>
-        </p:txBody>
-      </p:sp>
-      <p:sp>
-        <p:nvSpPr>
-          <p:cNvPr id="16" name="Text 14"/>
-          <p:cNvSpPr/>
-          <p:nvPr/>
-        </p:nvSpPr>
-        <p:spPr>
-          <a:xfrm>
-            <a:off x="15745718" y="2695277"/>
-            <a:ext cx="1627882" cy="261937"/>
-          </a:xfrm>
-          <a:prstGeom prst="rect">
-            <a:avLst/>
-          </a:prstGeom>
-          <a:noFill/>
-          <a:ln/>
-        </p:spPr>
-        <p:txBody>
-          <a:bodyPr wrap="square" lIns="25400" tIns="25400" rIns="25400" bIns="25400" rtlCol="0" anchor="t">
-            <a:normAutofit/>
-          </a:bodyPr>
-          <a:lstStyle/>
-          <a:p>
-            <a:pPr algn="r" indent="0" marL="0">
-              <a:buNone/>
-            </a:pPr>
-            <a:r>
-              <a:rPr lang="en-US" sz="1350" spc="27" kern="0" dirty="0">
-                <a:solidFill>
-                  <a:srgbClr val="9C978C"/>
-                </a:solidFill>
-                <a:latin typeface="IBM Plex Sans Condensed" pitchFamily="34" charset="0"/>
-                <a:ea typeface="IBM Plex Sans Condensed" pitchFamily="34" charset="-122"/>
-                <a:cs typeface="IBM Plex Sans Condensed" pitchFamily="34" charset="-120"/>
-              </a:rPr>
-              <a:t>what this report adds</a:t>
-            </a:r>
-            <a:endParaRPr lang="en-US" sz="1350" dirty="0"/>
-          </a:p>
-        </p:txBody>
-      </p:sp>
-      <p:sp>
-        <p:nvSpPr>
-          <p:cNvPr id="17" name="Shape 15"/>
-          <p:cNvSpPr/>
-          <p:nvPr/>
-        </p:nvSpPr>
-        <p:spPr>
-          <a:xfrm>
-            <a:off x="9448800" y="3658046"/>
-            <a:ext cx="7924800" cy="9525"/>
-          </a:xfrm>
-          <a:prstGeom prst="rect">
-            <a:avLst/>
-          </a:prstGeom>
-          <a:solidFill>
-            <a:srgbClr val="3A3733"/>
-          </a:solidFill>
-          <a:ln/>
-        </p:spPr>
-      </p:sp>
-      <p:sp>
-        <p:nvSpPr>
-          <p:cNvPr id="18" name="Text 16"/>
-          <p:cNvSpPr/>
-          <p:nvPr/>
-        </p:nvSpPr>
-        <p:spPr>
-          <a:xfrm>
-            <a:off x="9715500" y="3238202"/>
-            <a:ext cx="7895844" cy="362694"/>
-          </a:xfrm>
-          <a:prstGeom prst="rect">
-            <a:avLst/>
-          </a:prstGeom>
-          <a:noFill/>
-          <a:ln/>
-        </p:spPr>
-        <p:txBody>
-          <a:bodyPr wrap="square" lIns="25400" tIns="25400" rIns="25400" bIns="25400" rtlCol="0" anchor="t">
-            <a:normAutofit/>
-          </a:bodyPr>
-          <a:lstStyle/>
-          <a:p>
-            <a:pPr algn="l" indent="0" marL="0">
-              <a:lnSpc>
-                <a:spcPct val="142000"/>
-              </a:lnSpc>
-              <a:buNone/>
-            </a:pPr>
-            <a:r>
-              <a:rPr lang="en-US" sz="1800" dirty="0">
-                <a:solidFill>
-                  <a:srgbClr val="DAD4C7"/>
-                </a:solidFill>
-                <a:latin typeface="IBM Plex Serif" pitchFamily="34" charset="0"/>
-                <a:ea typeface="IBM Plex Serif" pitchFamily="34" charset="-122"/>
-                <a:cs typeface="IBM Plex Serif" pitchFamily="34" charset="-120"/>
-              </a:rPr>
-              <a:t>First faithful implementation of the MoS protocol</a:t>
-            </a:r>
-            <a:endParaRPr lang="en-US" sz="1800" dirty="0"/>
-          </a:p>
-        </p:txBody>
-      </p:sp>
-      <p:sp>
-        <p:nvSpPr>
-          <p:cNvPr id="19" name="Shape 17"/>
-          <p:cNvSpPr/>
-          <p:nvPr/>
-        </p:nvSpPr>
-        <p:spPr>
-          <a:xfrm>
-            <a:off x="9448800" y="4831854"/>
-            <a:ext cx="7924800" cy="9525"/>
-          </a:xfrm>
-          <a:prstGeom prst="rect">
-            <a:avLst/>
-          </a:prstGeom>
-          <a:solidFill>
-            <a:srgbClr val="3A3733"/>
-          </a:solidFill>
-          <a:ln/>
-        </p:spPr>
-      </p:sp>
-      <p:sp>
-        <p:nvSpPr>
-          <p:cNvPr id="20" name="Text 18"/>
-          <p:cNvSpPr/>
-          <p:nvPr/>
-        </p:nvSpPr>
-        <p:spPr>
-          <a:xfrm>
-            <a:off x="9715500" y="3762821"/>
-            <a:ext cx="7895844" cy="1011882"/>
-          </a:xfrm>
-          <a:prstGeom prst="rect">
-            <a:avLst/>
-          </a:prstGeom>
-          <a:noFill/>
-          <a:ln/>
-        </p:spPr>
-        <p:txBody>
-          <a:bodyPr wrap="square" lIns="25400" tIns="25400" rIns="25400" bIns="25400" rtlCol="0" anchor="t">
-            <a:normAutofit/>
-          </a:bodyPr>
-          <a:lstStyle/>
-          <a:p>
-            <a:pPr algn="l" indent="0" marL="0">
-              <a:lnSpc>
-                <a:spcPct val="142000"/>
-              </a:lnSpc>
-              <a:buNone/>
-            </a:pPr>
-            <a:r>
-              <a:rPr lang="en-US" sz="1800" b="1" dirty="0">
-                <a:solidFill>
-                  <a:srgbClr val="F6F3EC"/>
-                </a:solidFill>
-                <a:latin typeface="IBM Plex Serif" pitchFamily="34" charset="0"/>
-                <a:ea typeface="IBM Plex Serif" pitchFamily="34" charset="-122"/>
-                <a:cs typeface="IBM Plex Serif" pitchFamily="34" charset="-120"/>
-              </a:rPr>
-              <a:t>Two failure modes characterised. </a:t>
-            </a:r>
-            <a:pPr algn="l" indent="0" marL="0">
-              <a:lnSpc>
-                <a:spcPct val="142000"/>
-              </a:lnSpc>
-              <a:buNone/>
-            </a:pPr>
-            <a:r>
-              <a:rPr lang="en-US" sz="1800" dirty="0">
-                <a:solidFill>
-                  <a:srgbClr val="DAD4C7"/>
-                </a:solidFill>
-                <a:latin typeface="IBM Plex Serif" pitchFamily="34" charset="0"/>
-                <a:ea typeface="IBM Plex Serif" pitchFamily="34" charset="-122"/>
-                <a:cs typeface="IBM Plex Serif" pitchFamily="34" charset="-120"/>
-              </a:rPr>
-              <a:t>Vanishing-margin acceptance ceiling under mixed-coefficient cheats; prover-side cliff under per-gate depolarising noise.</a:t>
-            </a:r>
-            <a:endParaRPr lang="en-US" sz="1800" dirty="0"/>
-          </a:p>
-        </p:txBody>
-      </p:sp>
-      <p:sp>
-        <p:nvSpPr>
-          <p:cNvPr id="21" name="Text 19"/>
-          <p:cNvSpPr/>
-          <p:nvPr/>
-        </p:nvSpPr>
-        <p:spPr>
-          <a:xfrm>
-            <a:off x="9715500" y="4936629"/>
-            <a:ext cx="7895844" cy="687288"/>
-          </a:xfrm>
-          <a:prstGeom prst="rect">
-            <a:avLst/>
-          </a:prstGeom>
-          <a:noFill/>
-          <a:ln/>
-        </p:spPr>
-        <p:txBody>
-          <a:bodyPr wrap="square" lIns="25400" tIns="25400" rIns="25400" bIns="25400" rtlCol="0" anchor="t">
-            <a:normAutofit/>
-          </a:bodyPr>
-          <a:lstStyle/>
-          <a:p>
-            <a:pPr algn="l" indent="0" marL="0">
-              <a:lnSpc>
-                <a:spcPct val="142000"/>
-              </a:lnSpc>
-              <a:buNone/>
-            </a:pPr>
-            <a:r>
-              <a:rPr lang="en-US" sz="1800" b="1" dirty="0">
-                <a:solidFill>
-                  <a:srgbClr val="F6F3EC"/>
-                </a:solidFill>
-                <a:latin typeface="IBM Plex Serif" pitchFamily="34" charset="0"/>
-                <a:ea typeface="IBM Plex Serif" pitchFamily="34" charset="-122"/>
-                <a:cs typeface="IBM Plex Serif" pitchFamily="34" charset="-120"/>
-              </a:rPr>
-              <a:t>One open theoretical question raised. </a:t>
-            </a:r>
-            <a:pPr algn="l" indent="0" marL="0">
-              <a:lnSpc>
-                <a:spcPct val="142000"/>
-              </a:lnSpc>
-              <a:buNone/>
-            </a:pPr>
-            <a:r>
-              <a:rPr lang="en-US" sz="1800" dirty="0">
-                <a:solidFill>
-                  <a:srgbClr val="DAD4C7"/>
-                </a:solidFill>
-                <a:latin typeface="IBM Plex Serif" pitchFamily="34" charset="0"/>
-                <a:ea typeface="IBM Plex Serif" pitchFamily="34" charset="-122"/>
-                <a:cs typeface="IBM Plex Serif" pitchFamily="34" charset="-120"/>
-              </a:rPr>
-              <a:t>Per-gate depolarising noise: Ma–Su–Deng treat output-side, not gate-side.</a:t>
-            </a:r>
-            <a:endParaRPr lang="en-US" sz="1800" dirty="0"/>
-          </a:p>
-        </p:txBody>
-      </p:sp>
-      <p:sp>
-        <p:nvSpPr>
-          <p:cNvPr id="22" name="Shape 20"/>
-          <p:cNvSpPr/>
-          <p:nvPr/>
-        </p:nvSpPr>
-        <p:spPr>
-          <a:xfrm>
-            <a:off x="914400" y="9486900"/>
-            <a:ext cx="16459200" cy="9525"/>
-          </a:xfrm>
-          <a:prstGeom prst="rect">
-            <a:avLst/>
-          </a:prstGeom>
-          <a:solidFill>
-            <a:srgbClr val="3A3733"/>
-          </a:solidFill>
-          <a:ln/>
-        </p:spPr>
-      </p:sp>
-      <p:sp>
-        <p:nvSpPr>
-          <p:cNvPr id="23" name="Text 21"/>
-          <p:cNvSpPr/>
-          <p:nvPr/>
-        </p:nvSpPr>
-        <p:spPr>
-          <a:xfrm>
-            <a:off x="914400" y="9629775"/>
-            <a:ext cx="3251267" cy="238125"/>
-          </a:xfrm>
-          <a:prstGeom prst="rect">
-            <a:avLst/>
-          </a:prstGeom>
-          <a:noFill/>
-          <a:ln/>
-        </p:spPr>
-        <p:txBody>
-          <a:bodyPr wrap="square" lIns="25400" tIns="25400" rIns="25400" bIns="25400" rtlCol="0" anchor="t">
-            <a:normAutofit/>
-          </a:bodyPr>
-          <a:lstStyle/>
-          <a:p>
-            <a:pPr algn="l" indent="0" marL="0">
-              <a:buNone/>
-            </a:pPr>
-            <a:r>
-              <a:rPr lang="en-US" sz="1200" spc="48" kern="0" dirty="0">
+            <a:pPr marL="0" indent="0" algn="l">
+              <a:buNone/>
+            </a:pPr>
+            <a:r>
+              <a:rPr lang="en-US" sz="1200" kern="0" spc="48" dirty="0">
                 <a:solidFill>
                   <a:srgbClr val="EFEADF"/>
                 </a:solidFill>
@@ -14538,6 +14935,7 @@
         <a:solidFill>
           <a:srgbClr val="F6F3EC"/>
         </a:solidFill>
+        <a:effectLst/>
       </p:bgPr>
     </p:bg>
     <p:spTree>
@@ -14573,6 +14971,13 @@
           </a:solidFill>
           <a:ln/>
         </p:spPr>
+        <p:txBody>
+          <a:bodyPr/>
+          <a:lstStyle/>
+          <a:p>
+            <a:endParaRPr lang="en-US"/>
+          </a:p>
+        </p:txBody>
       </p:sp>
       <p:sp>
         <p:nvSpPr>
@@ -14597,11 +15002,11 @@
           </a:bodyPr>
           <a:lstStyle/>
           <a:p>
-            <a:pPr algn="l" indent="0" marL="0">
-              <a:buNone/>
-            </a:pPr>
-            <a:r>
-              <a:rPr lang="en-US" sz="1350" b="1" spc="54" kern="0" dirty="0">
+            <a:pPr marL="0" indent="0" algn="l">
+              <a:buNone/>
+            </a:pPr>
+            <a:r>
+              <a:rPr lang="en-US" sz="1350" b="1" kern="0" spc="54" dirty="0">
                 <a:solidFill>
                   <a:srgbClr val="161512"/>
                 </a:solidFill>
@@ -14638,11 +15043,11 @@
           </a:bodyPr>
           <a:lstStyle/>
           <a:p>
-            <a:pPr algn="l" indent="0" marL="0">
-              <a:buNone/>
-            </a:pPr>
-            <a:r>
-              <a:rPr lang="en-US" sz="1350" spc="54" kern="0" dirty="0">
+            <a:pPr marL="0" indent="0" algn="l">
+              <a:buNone/>
+            </a:pPr>
+            <a:r>
+              <a:rPr lang="en-US" sz="1350" kern="0" spc="54" dirty="0">
                 <a:solidFill>
                   <a:srgbClr val="3A3733"/>
                 </a:solidFill>
@@ -14675,18 +15080,18 @@
         </p:spPr>
         <p:txBody>
           <a:bodyPr wrap="square" lIns="25400" tIns="25400" rIns="25400" bIns="25400" rtlCol="0" anchor="t">
-            <a:normAutofit/>
-          </a:bodyPr>
-          <a:lstStyle/>
-          <a:p>
-            <a:pPr algn="l" indent="0" marL="0">
+            <a:normAutofit fontScale="92500" lnSpcReduction="20000"/>
+          </a:bodyPr>
+          <a:lstStyle/>
+          <a:p>
+            <a:pPr marL="0" indent="0" algn="l">
               <a:lnSpc>
                 <a:spcPct val="112000"/>
               </a:lnSpc>
               <a:buNone/>
             </a:pPr>
             <a:r>
-              <a:rPr lang="en-US" sz="3900" spc="-58" kern="0" dirty="0">
+              <a:rPr lang="en-US" sz="3900" kern="0" spc="-58" dirty="0">
                 <a:solidFill>
                   <a:srgbClr val="161512"/>
                 </a:solidFill>
@@ -14723,6 +15128,13 @@
             <a:prstDash val="solid"/>
           </a:ln>
         </p:spPr>
+        <p:txBody>
+          <a:bodyPr/>
+          <a:lstStyle/>
+          <a:p>
+            <a:endParaRPr lang="en-US"/>
+          </a:p>
+        </p:txBody>
       </p:sp>
       <p:sp>
         <p:nvSpPr>
@@ -14747,11 +15159,11 @@
           </a:bodyPr>
           <a:lstStyle/>
           <a:p>
-            <a:pPr algn="l" indent="0" marL="0">
-              <a:buNone/>
-            </a:pPr>
-            <a:r>
-              <a:rPr lang="en-US" sz="1125" spc="68" kern="0" dirty="0">
+            <a:pPr marL="0" indent="0" algn="l">
+              <a:buNone/>
+            </a:pPr>
+            <a:r>
+              <a:rPr lang="en-US" sz="1125" kern="0" spc="68" dirty="0">
                 <a:solidFill>
                   <a:srgbClr val="3A3733"/>
                 </a:solidFill>
@@ -14784,18 +15196,18 @@
         </p:spPr>
         <p:txBody>
           <a:bodyPr wrap="square" lIns="25400" tIns="25400" rIns="25400" bIns="25400" rtlCol="0" anchor="t">
-            <a:normAutofit/>
-          </a:bodyPr>
-          <a:lstStyle/>
-          <a:p>
-            <a:pPr algn="l" indent="0" marL="0">
+            <a:normAutofit fontScale="92500" lnSpcReduction="20000"/>
+          </a:bodyPr>
+          <a:lstStyle/>
+          <a:p>
+            <a:pPr marL="0" indent="0" algn="l">
               <a:lnSpc>
                 <a:spcPct val="115000"/>
               </a:lnSpc>
               <a:buNone/>
             </a:pPr>
             <a:r>
-              <a:rPr lang="en-US" sz="2700" spc="-40" kern="0" dirty="0">
+              <a:rPr lang="en-US" sz="2700" kern="0" spc="-40" dirty="0">
                 <a:solidFill>
                   <a:srgbClr val="161512"/>
                 </a:solidFill>
@@ -14828,11 +15240,11 @@
         </p:spPr>
         <p:txBody>
           <a:bodyPr wrap="square" lIns="25400" tIns="25400" rIns="25400" bIns="25400" rtlCol="0" anchor="t">
-            <a:normAutofit/>
-          </a:bodyPr>
-          <a:lstStyle/>
-          <a:p>
-            <a:pPr algn="l" indent="0" marL="0">
+            <a:normAutofit fontScale="92500" lnSpcReduction="10000"/>
+          </a:bodyPr>
+          <a:lstStyle/>
+          <a:p>
+            <a:pPr marL="0" indent="0" algn="l">
               <a:lnSpc>
                 <a:spcPct val="142000"/>
               </a:lnSpc>
@@ -14879,6 +15291,13 @@
             <a:prstDash val="solid"/>
           </a:ln>
         </p:spPr>
+        <p:txBody>
+          <a:bodyPr/>
+          <a:lstStyle/>
+          <a:p>
+            <a:endParaRPr lang="en-US"/>
+          </a:p>
+        </p:txBody>
       </p:sp>
       <p:sp>
         <p:nvSpPr>
@@ -14903,11 +15322,11 @@
           </a:bodyPr>
           <a:lstStyle/>
           <a:p>
-            <a:pPr algn="l" indent="0" marL="0">
-              <a:buNone/>
-            </a:pPr>
-            <a:r>
-              <a:rPr lang="en-US" sz="1125" spc="68" kern="0" dirty="0">
+            <a:pPr marL="0" indent="0" algn="l">
+              <a:buNone/>
+            </a:pPr>
+            <a:r>
+              <a:rPr lang="en-US" sz="1125" kern="0" spc="68" dirty="0">
                 <a:solidFill>
                   <a:srgbClr val="8A2A18"/>
                 </a:solidFill>
@@ -14940,18 +15359,18 @@
         </p:spPr>
         <p:txBody>
           <a:bodyPr wrap="square" lIns="25400" tIns="25400" rIns="25400" bIns="25400" rtlCol="0" anchor="t">
-            <a:normAutofit/>
-          </a:bodyPr>
-          <a:lstStyle/>
-          <a:p>
-            <a:pPr algn="l" indent="0" marL="0">
+            <a:normAutofit fontScale="92500"/>
+          </a:bodyPr>
+          <a:lstStyle/>
+          <a:p>
+            <a:pPr marL="0" indent="0" algn="l">
               <a:lnSpc>
                 <a:spcPct val="115000"/>
               </a:lnSpc>
               <a:buNone/>
             </a:pPr>
             <a:r>
-              <a:rPr lang="en-US" sz="2700" spc="-40" kern="0" dirty="0">
+              <a:rPr lang="en-US" sz="2700" kern="0" spc="-40" dirty="0">
                 <a:solidFill>
                   <a:srgbClr val="161512"/>
                 </a:solidFill>
@@ -14984,11 +15403,11 @@
         </p:spPr>
         <p:txBody>
           <a:bodyPr wrap="square" lIns="25400" tIns="25400" rIns="25400" bIns="25400" rtlCol="0" anchor="t">
-            <a:normAutofit/>
-          </a:bodyPr>
-          <a:lstStyle/>
-          <a:p>
-            <a:pPr algn="l" indent="0" marL="0">
+            <a:normAutofit fontScale="92500" lnSpcReduction="20000"/>
+          </a:bodyPr>
+          <a:lstStyle/>
+          <a:p>
+            <a:pPr marL="0" indent="0" algn="l">
               <a:lnSpc>
                 <a:spcPct val="142000"/>
               </a:lnSpc>
@@ -15005,12 +15424,6 @@
               </a:rPr>
               <a:t>Extend Ma–Su–Deng's </a:t>
             </a:r>
-            <a:pPr algn="l" indent="0" marL="0">
-              <a:lnSpc>
-                <a:spcPct val="142000"/>
-              </a:lnSpc>
-              <a:buNone/>
-            </a:pPr>
             <a:r>
               <a:rPr lang="en-US" sz="1650" i="1" dirty="0">
                 <a:solidFill>
@@ -15022,12 +15435,6 @@
               </a:rPr>
               <a:t>output-side </a:t>
             </a:r>
-            <a:pPr algn="l" indent="0" marL="0">
-              <a:lnSpc>
-                <a:spcPct val="142000"/>
-              </a:lnSpc>
-              <a:buNone/>
-            </a:pPr>
             <a:r>
               <a:rPr lang="en-US" sz="1650" dirty="0">
                 <a:solidFill>
@@ -15039,12 +15446,6 @@
               </a:rPr>
               <a:t>bounds (measurement noise, end-of-circuit depolarisation) to </a:t>
             </a:r>
-            <a:pPr algn="l" indent="0" marL="0">
-              <a:lnSpc>
-                <a:spcPct val="142000"/>
-              </a:lnSpc>
-              <a:buNone/>
-            </a:pPr>
             <a:r>
               <a:rPr lang="en-US" sz="1650" i="1" dirty="0">
                 <a:solidFill>
@@ -15056,12 +15457,6 @@
               </a:rPr>
               <a:t>per-gate </a:t>
             </a:r>
-            <a:pPr algn="l" indent="0" marL="0">
-              <a:lnSpc>
-                <a:spcPct val="142000"/>
-              </a:lnSpc>
-              <a:buNone/>
-            </a:pPr>
             <a:r>
               <a:rPr lang="en-US" sz="1650" dirty="0">
                 <a:solidFill>
@@ -15100,6 +15495,13 @@
             <a:prstDash val="solid"/>
           </a:ln>
         </p:spPr>
+        <p:txBody>
+          <a:bodyPr/>
+          <a:lstStyle/>
+          <a:p>
+            <a:endParaRPr lang="en-US"/>
+          </a:p>
+        </p:txBody>
       </p:sp>
       <p:sp>
         <p:nvSpPr>
@@ -15124,11 +15526,11 @@
           </a:bodyPr>
           <a:lstStyle/>
           <a:p>
-            <a:pPr algn="l" indent="0" marL="0">
-              <a:buNone/>
-            </a:pPr>
-            <a:r>
-              <a:rPr lang="en-US" sz="1125" spc="68" kern="0" dirty="0">
+            <a:pPr marL="0" indent="0" algn="l">
+              <a:buNone/>
+            </a:pPr>
+            <a:r>
+              <a:rPr lang="en-US" sz="1125" kern="0" spc="68" dirty="0">
                 <a:solidFill>
                   <a:srgbClr val="3A3733"/>
                 </a:solidFill>
@@ -15161,18 +15563,18 @@
         </p:spPr>
         <p:txBody>
           <a:bodyPr wrap="square" lIns="25400" tIns="25400" rIns="25400" bIns="25400" rtlCol="0" anchor="t">
-            <a:normAutofit/>
-          </a:bodyPr>
-          <a:lstStyle/>
-          <a:p>
-            <a:pPr algn="l" indent="0" marL="0">
+            <a:normAutofit fontScale="92500" lnSpcReduction="20000"/>
+          </a:bodyPr>
+          <a:lstStyle/>
+          <a:p>
+            <a:pPr marL="0" indent="0" algn="l">
               <a:lnSpc>
                 <a:spcPct val="115000"/>
               </a:lnSpc>
               <a:buNone/>
             </a:pPr>
             <a:r>
-              <a:rPr lang="en-US" sz="2700" spc="-40" kern="0" dirty="0">
+              <a:rPr lang="en-US" sz="2700" kern="0" spc="-40" dirty="0">
                 <a:solidFill>
                   <a:srgbClr val="161512"/>
                 </a:solidFill>
@@ -15205,11 +15607,11 @@
         </p:spPr>
         <p:txBody>
           <a:bodyPr wrap="square" lIns="25400" tIns="25400" rIns="25400" bIns="25400" rtlCol="0" anchor="t">
-            <a:normAutofit/>
-          </a:bodyPr>
-          <a:lstStyle/>
-          <a:p>
-            <a:pPr algn="l" indent="0" marL="0">
+            <a:normAutofit fontScale="92500" lnSpcReduction="10000"/>
+          </a:bodyPr>
+          <a:lstStyle/>
+          <a:p>
+            <a:pPr marL="0" indent="0" algn="l">
               <a:lnSpc>
                 <a:spcPct val="142000"/>
               </a:lnSpc>
@@ -15249,6 +15651,13 @@
           </a:solidFill>
           <a:ln/>
         </p:spPr>
+        <p:txBody>
+          <a:bodyPr/>
+          <a:lstStyle/>
+          <a:p>
+            <a:endParaRPr lang="en-US"/>
+          </a:p>
+        </p:txBody>
       </p:sp>
       <p:sp>
         <p:nvSpPr>
@@ -15273,20 +15682,9 @@
           </a:bodyPr>
           <a:lstStyle/>
           <a:p>
-            <a:pPr algn="l" indent="0" marL="0">
-              <a:buNone/>
-            </a:pPr>
-            <a:r>
-              <a:rPr lang="en-US" sz="2400" dirty="0">
-                <a:solidFill>
-                  <a:srgbClr val="8A2A18"/>
-                </a:solidFill>
-                <a:latin typeface="IBM Plex Mono" pitchFamily="34" charset="0"/>
-                <a:ea typeface="IBM Plex Mono" pitchFamily="34" charset="-122"/>
-                <a:cs typeface="IBM Plex Mono" pitchFamily="34" charset="-120"/>
-              </a:rPr>
-              <a:t>▶</a:t>
-            </a:r>
+            <a:pPr marL="0" indent="0" algn="l">
+              <a:buNone/>
+            </a:pPr>
             <a:endParaRPr lang="en-US" sz="2400" dirty="0"/>
           </a:p>
         </p:txBody>
@@ -15314,11 +15712,44 @@
           </a:bodyPr>
           <a:lstStyle/>
           <a:p>
-            <a:pPr algn="l" indent="0" marL="0">
-              <a:buNone/>
-            </a:pPr>
-            <a:r>
-              <a:rPr lang="en-US" sz="1275" spc="51" kern="0" dirty="0">
+            <a:pPr marL="0" indent="0" algn="l">
+              <a:buNone/>
+            </a:pPr>
+            <a:r>
+              <a:rPr lang="en-US" sz="1275" dirty="0"/>
+              <a:t>DEMO</a:t>
+            </a:r>
+          </a:p>
+        </p:txBody>
+      </p:sp>
+      <p:sp>
+        <p:nvSpPr>
+          <p:cNvPr id="21" name="Text 19"/>
+          <p:cNvSpPr/>
+          <p:nvPr/>
+        </p:nvSpPr>
+        <p:spPr>
+          <a:xfrm>
+            <a:off x="16542990" y="9310688"/>
+            <a:ext cx="830610" cy="247650"/>
+          </a:xfrm>
+          <a:prstGeom prst="rect">
+            <a:avLst/>
+          </a:prstGeom>
+          <a:noFill/>
+          <a:ln/>
+        </p:spPr>
+        <p:txBody>
+          <a:bodyPr wrap="square" lIns="25400" tIns="25400" rIns="25400" bIns="25400" rtlCol="0" anchor="t">
+            <a:normAutofit/>
+          </a:bodyPr>
+          <a:lstStyle/>
+          <a:p>
+            <a:pPr marL="0" indent="0" algn="r">
+              <a:buNone/>
+            </a:pPr>
+            <a:r>
+              <a:rPr lang="en-US" sz="1275" kern="0" spc="51" dirty="0">
                 <a:solidFill>
                   <a:srgbClr val="75716A"/>
                 </a:solidFill>
@@ -15326,7 +15757,7 @@
                 <a:ea typeface="IBM Plex Sans Condensed" pitchFamily="34" charset="-122"/>
                 <a:cs typeface="IBM Plex Sans Condensed" pitchFamily="34" charset="-120"/>
               </a:rPr>
-              <a:t>CLOSING: SEGUE TO DEMO</a:t>
+              <a:t>DEMO</a:t>
             </a:r>
             <a:endParaRPr lang="en-US" sz="1275" dirty="0"/>
           </a:p>
@@ -15334,14 +15765,14 @@
       </p:sp>
       <p:sp>
         <p:nvSpPr>
-          <p:cNvPr id="21" name="Text 19"/>
-          <p:cNvSpPr/>
-          <p:nvPr/>
-        </p:nvSpPr>
-        <p:spPr>
-          <a:xfrm>
-            <a:off x="16542990" y="9310688"/>
-            <a:ext cx="830610" cy="247650"/>
+          <p:cNvPr id="22" name="Text 20"/>
+          <p:cNvSpPr/>
+          <p:nvPr/>
+        </p:nvSpPr>
+        <p:spPr>
+          <a:xfrm>
+            <a:off x="16542990" y="9558338"/>
+            <a:ext cx="830610" cy="309563"/>
           </a:xfrm>
           <a:prstGeom prst="rect">
             <a:avLst/>
@@ -15355,48 +15786,7 @@
           </a:bodyPr>
           <a:lstStyle/>
           <a:p>
-            <a:pPr algn="r" indent="0" marL="0">
-              <a:buNone/>
-            </a:pPr>
-            <a:r>
-              <a:rPr lang="en-US" sz="1275" spc="51" kern="0" dirty="0">
-                <a:solidFill>
-                  <a:srgbClr val="75716A"/>
-                </a:solidFill>
-                <a:latin typeface="IBM Plex Sans Condensed" pitchFamily="34" charset="0"/>
-                <a:ea typeface="IBM Plex Sans Condensed" pitchFamily="34" charset="-122"/>
-                <a:cs typeface="IBM Plex Sans Condensed" pitchFamily="34" charset="-120"/>
-              </a:rPr>
-              <a:t>DEMO</a:t>
-            </a:r>
-            <a:endParaRPr lang="en-US" sz="1275" dirty="0"/>
-          </a:p>
-        </p:txBody>
-      </p:sp>
-      <p:sp>
-        <p:nvSpPr>
-          <p:cNvPr id="22" name="Text 20"/>
-          <p:cNvSpPr/>
-          <p:nvPr/>
-        </p:nvSpPr>
-        <p:spPr>
-          <a:xfrm>
-            <a:off x="16542990" y="9558338"/>
-            <a:ext cx="830610" cy="309563"/>
-          </a:xfrm>
-          <a:prstGeom prst="rect">
-            <a:avLst/>
-          </a:prstGeom>
-          <a:noFill/>
-          <a:ln/>
-        </p:spPr>
-        <p:txBody>
-          <a:bodyPr wrap="square" lIns="25400" tIns="25400" rIns="25400" bIns="25400" rtlCol="0" anchor="t">
-            <a:normAutofit/>
-          </a:bodyPr>
-          <a:lstStyle/>
-          <a:p>
-            <a:pPr algn="r" indent="0" marL="0">
+            <a:pPr marL="0" indent="0" algn="r">
               <a:buNone/>
             </a:pPr>
             <a:r>
@@ -15715,4 +16105,319 @@
     </a:ext>
   </a:extLst>
 </a:theme>
+</file>
+
+<file path=ppt/theme/theme2.xml><?xml version="1.0" encoding="utf-8"?>
+<a:theme xmlns:a="http://schemas.openxmlformats.org/drawingml/2006/main" name="Office Theme">
+  <a:themeElements>
+    <a:clrScheme name="Office">
+      <a:dk1>
+        <a:sysClr val="windowText" lastClr="000000"/>
+      </a:dk1>
+      <a:lt1>
+        <a:sysClr val="window" lastClr="FFFFFF"/>
+      </a:lt1>
+      <a:dk2>
+        <a:srgbClr val="0E2841"/>
+      </a:dk2>
+      <a:lt2>
+        <a:srgbClr val="E8E8E8"/>
+      </a:lt2>
+      <a:accent1>
+        <a:srgbClr val="156082"/>
+      </a:accent1>
+      <a:accent2>
+        <a:srgbClr val="E97132"/>
+      </a:accent2>
+      <a:accent3>
+        <a:srgbClr val="196B24"/>
+      </a:accent3>
+      <a:accent4>
+        <a:srgbClr val="0F9ED5"/>
+      </a:accent4>
+      <a:accent5>
+        <a:srgbClr val="A02B93"/>
+      </a:accent5>
+      <a:accent6>
+        <a:srgbClr val="4EA72E"/>
+      </a:accent6>
+      <a:hlink>
+        <a:srgbClr val="467886"/>
+      </a:hlink>
+      <a:folHlink>
+        <a:srgbClr val="96607D"/>
+      </a:folHlink>
+    </a:clrScheme>
+    <a:fontScheme name="Office">
+      <a:majorFont>
+        <a:latin typeface="Aptos Display" panose="02110004020202020204"/>
+        <a:ea typeface=""/>
+        <a:cs typeface=""/>
+        <a:font script="Jpan" typeface="游ゴシック Light"/>
+        <a:font script="Hang" typeface="맑은 고딕"/>
+        <a:font script="Hans" typeface="等线 Light"/>
+        <a:font script="Hant" typeface="新細明體"/>
+        <a:font script="Arab" typeface="Times New Roman"/>
+        <a:font script="Hebr" typeface="Times New Roman"/>
+        <a:font script="Thai" typeface="Angsana New"/>
+        <a:font script="Ethi" typeface="Nyala"/>
+        <a:font script="Beng" typeface="Vrinda"/>
+        <a:font script="Gujr" typeface="Shruti"/>
+        <a:font script="Khmr" typeface="MoolBoran"/>
+        <a:font script="Knda" typeface="Tunga"/>
+        <a:font script="Guru" typeface="Raavi"/>
+        <a:font script="Cans" typeface="Euphemia"/>
+        <a:font script="Cher" typeface="Plantagenet Cherokee"/>
+        <a:font script="Yiii" typeface="Microsoft Yi Baiti"/>
+        <a:font script="Tibt" typeface="Microsoft Himalaya"/>
+        <a:font script="Thaa" typeface="MV Boli"/>
+        <a:font script="Deva" typeface="Mangal"/>
+        <a:font script="Telu" typeface="Gautami"/>
+        <a:font script="Taml" typeface="Latha"/>
+        <a:font script="Syrc" typeface="Estrangelo Edessa"/>
+        <a:font script="Orya" typeface="Kalinga"/>
+        <a:font script="Mlym" typeface="Kartika"/>
+        <a:font script="Laoo" typeface="DokChampa"/>
+        <a:font script="Sinh" typeface="Iskoola Pota"/>
+        <a:font script="Mong" typeface="Mongolian Baiti"/>
+        <a:font script="Viet" typeface="Times New Roman"/>
+        <a:font script="Uigh" typeface="Microsoft Uighur"/>
+        <a:font script="Geor" typeface="Sylfaen"/>
+        <a:font script="Armn" typeface="Arial"/>
+        <a:font script="Bugi" typeface="Leelawadee UI"/>
+        <a:font script="Bopo" typeface="Microsoft JhengHei"/>
+        <a:font script="Java" typeface="Javanese Text"/>
+        <a:font script="Lisu" typeface="Segoe UI"/>
+        <a:font script="Mymr" typeface="Myanmar Text"/>
+        <a:font script="Nkoo" typeface="Ebrima"/>
+        <a:font script="Olck" typeface="Nirmala UI"/>
+        <a:font script="Osma" typeface="Ebrima"/>
+        <a:font script="Phag" typeface="Phagspa"/>
+        <a:font script="Syrn" typeface="Estrangelo Edessa"/>
+        <a:font script="Syrj" typeface="Estrangelo Edessa"/>
+        <a:font script="Syre" typeface="Estrangelo Edessa"/>
+        <a:font script="Sora" typeface="Nirmala UI"/>
+        <a:font script="Tale" typeface="Microsoft Tai Le"/>
+        <a:font script="Talu" typeface="Microsoft New Tai Lue"/>
+        <a:font script="Tfng" typeface="Ebrima"/>
+      </a:majorFont>
+      <a:minorFont>
+        <a:latin typeface="Aptos" panose="02110004020202020204"/>
+        <a:ea typeface=""/>
+        <a:cs typeface=""/>
+        <a:font script="Jpan" typeface="游ゴシック"/>
+        <a:font script="Hang" typeface="맑은 고딕"/>
+        <a:font script="Hans" typeface="等线"/>
+        <a:font script="Hant" typeface="新細明體"/>
+        <a:font script="Arab" typeface="Arial"/>
+        <a:font script="Hebr" typeface="Arial"/>
+        <a:font script="Thai" typeface="Cordia New"/>
+        <a:font script="Ethi" typeface="Nyala"/>
+        <a:font script="Beng" typeface="Vrinda"/>
+        <a:font script="Gujr" typeface="Shruti"/>
+        <a:font script="Khmr" typeface="DaunPenh"/>
+        <a:font script="Knda" typeface="Tunga"/>
+        <a:font script="Guru" typeface="Raavi"/>
+        <a:font script="Cans" typeface="Euphemia"/>
+        <a:font script="Cher" typeface="Plantagenet Cherokee"/>
+        <a:font script="Yiii" typeface="Microsoft Yi Baiti"/>
+        <a:font script="Tibt" typeface="Microsoft Himalaya"/>
+        <a:font script="Thaa" typeface="MV Boli"/>
+        <a:font script="Deva" typeface="Mangal"/>
+        <a:font script="Telu" typeface="Gautami"/>
+        <a:font script="Taml" typeface="Latha"/>
+        <a:font script="Syrc" typeface="Estrangelo Edessa"/>
+        <a:font script="Orya" typeface="Kalinga"/>
+        <a:font script="Mlym" typeface="Kartika"/>
+        <a:font script="Laoo" typeface="DokChampa"/>
+        <a:font script="Sinh" typeface="Iskoola Pota"/>
+        <a:font script="Mong" typeface="Mongolian Baiti"/>
+        <a:font script="Viet" typeface="Arial"/>
+        <a:font script="Uigh" typeface="Microsoft Uighur"/>
+        <a:font script="Geor" typeface="Sylfaen"/>
+        <a:font script="Armn" typeface="Arial"/>
+        <a:font script="Bugi" typeface="Leelawadee UI"/>
+        <a:font script="Bopo" typeface="Microsoft JhengHei"/>
+        <a:font script="Java" typeface="Javanese Text"/>
+        <a:font script="Lisu" typeface="Segoe UI"/>
+        <a:font script="Mymr" typeface="Myanmar Text"/>
+        <a:font script="Nkoo" typeface="Ebrima"/>
+        <a:font script="Olck" typeface="Nirmala UI"/>
+        <a:font script="Osma" typeface="Ebrima"/>
+        <a:font script="Phag" typeface="Phagspa"/>
+        <a:font script="Syrn" typeface="Estrangelo Edessa"/>
+        <a:font script="Syrj" typeface="Estrangelo Edessa"/>
+        <a:font script="Syre" typeface="Estrangelo Edessa"/>
+        <a:font script="Sora" typeface="Nirmala UI"/>
+        <a:font script="Tale" typeface="Microsoft Tai Le"/>
+        <a:font script="Talu" typeface="Microsoft New Tai Lue"/>
+        <a:font script="Tfng" typeface="Ebrima"/>
+      </a:minorFont>
+    </a:fontScheme>
+    <a:fmtScheme name="Office">
+      <a:fillStyleLst>
+        <a:solidFill>
+          <a:schemeClr val="phClr"/>
+        </a:solidFill>
+        <a:gradFill rotWithShape="1">
+          <a:gsLst>
+            <a:gs pos="0">
+              <a:schemeClr val="phClr">
+                <a:lumMod val="110000"/>
+                <a:satMod val="105000"/>
+                <a:tint val="67000"/>
+              </a:schemeClr>
+            </a:gs>
+            <a:gs pos="50000">
+              <a:schemeClr val="phClr">
+                <a:lumMod val="105000"/>
+                <a:satMod val="103000"/>
+                <a:tint val="73000"/>
+              </a:schemeClr>
+            </a:gs>
+            <a:gs pos="100000">
+              <a:schemeClr val="phClr">
+                <a:lumMod val="105000"/>
+                <a:satMod val="109000"/>
+                <a:tint val="81000"/>
+              </a:schemeClr>
+            </a:gs>
+          </a:gsLst>
+          <a:lin ang="5400000" scaled="0"/>
+        </a:gradFill>
+        <a:gradFill rotWithShape="1">
+          <a:gsLst>
+            <a:gs pos="0">
+              <a:schemeClr val="phClr">
+                <a:satMod val="103000"/>
+                <a:lumMod val="102000"/>
+                <a:tint val="94000"/>
+              </a:schemeClr>
+            </a:gs>
+            <a:gs pos="50000">
+              <a:schemeClr val="phClr">
+                <a:satMod val="110000"/>
+                <a:lumMod val="100000"/>
+                <a:shade val="100000"/>
+              </a:schemeClr>
+            </a:gs>
+            <a:gs pos="100000">
+              <a:schemeClr val="phClr">
+                <a:lumMod val="99000"/>
+                <a:satMod val="120000"/>
+                <a:shade val="78000"/>
+              </a:schemeClr>
+            </a:gs>
+          </a:gsLst>
+          <a:lin ang="5400000" scaled="0"/>
+        </a:gradFill>
+      </a:fillStyleLst>
+      <a:lnStyleLst>
+        <a:ln w="12700" cap="flat" cmpd="sng" algn="ctr">
+          <a:solidFill>
+            <a:schemeClr val="phClr"/>
+          </a:solidFill>
+          <a:prstDash val="solid"/>
+          <a:miter lim="800000"/>
+        </a:ln>
+        <a:ln w="19050" cap="flat" cmpd="sng" algn="ctr">
+          <a:solidFill>
+            <a:schemeClr val="phClr"/>
+          </a:solidFill>
+          <a:prstDash val="solid"/>
+          <a:miter lim="800000"/>
+        </a:ln>
+        <a:ln w="25400" cap="flat" cmpd="sng" algn="ctr">
+          <a:solidFill>
+            <a:schemeClr val="phClr"/>
+          </a:solidFill>
+          <a:prstDash val="solid"/>
+          <a:miter lim="800000"/>
+        </a:ln>
+      </a:lnStyleLst>
+      <a:effectStyleLst>
+        <a:effectStyle>
+          <a:effectLst/>
+        </a:effectStyle>
+        <a:effectStyle>
+          <a:effectLst/>
+        </a:effectStyle>
+        <a:effectStyle>
+          <a:effectLst>
+            <a:outerShdw blurRad="57150" dist="19050" dir="5400000" algn="ctr" rotWithShape="0">
+              <a:srgbClr val="000000">
+                <a:alpha val="63000"/>
+              </a:srgbClr>
+            </a:outerShdw>
+          </a:effectLst>
+        </a:effectStyle>
+      </a:effectStyleLst>
+      <a:bgFillStyleLst>
+        <a:solidFill>
+          <a:schemeClr val="phClr"/>
+        </a:solidFill>
+        <a:solidFill>
+          <a:schemeClr val="phClr">
+            <a:tint val="95000"/>
+            <a:satMod val="170000"/>
+          </a:schemeClr>
+        </a:solidFill>
+        <a:gradFill rotWithShape="1">
+          <a:gsLst>
+            <a:gs pos="0">
+              <a:schemeClr val="phClr">
+                <a:tint val="93000"/>
+                <a:satMod val="150000"/>
+                <a:shade val="98000"/>
+                <a:lumMod val="102000"/>
+              </a:schemeClr>
+            </a:gs>
+            <a:gs pos="50000">
+              <a:schemeClr val="phClr">
+                <a:tint val="98000"/>
+                <a:satMod val="130000"/>
+                <a:shade val="90000"/>
+                <a:lumMod val="103000"/>
+              </a:schemeClr>
+            </a:gs>
+            <a:gs pos="100000">
+              <a:schemeClr val="phClr">
+                <a:shade val="63000"/>
+                <a:satMod val="120000"/>
+              </a:schemeClr>
+            </a:gs>
+          </a:gsLst>
+          <a:lin ang="5400000" scaled="0"/>
+        </a:gradFill>
+      </a:bgFillStyleLst>
+    </a:fmtScheme>
+  </a:themeElements>
+  <a:objectDefaults>
+    <a:lnDef>
+      <a:spPr/>
+      <a:bodyPr/>
+      <a:lstStyle/>
+      <a:style>
+        <a:lnRef idx="2">
+          <a:schemeClr val="accent1"/>
+        </a:lnRef>
+        <a:fillRef idx="0">
+          <a:schemeClr val="accent1"/>
+        </a:fillRef>
+        <a:effectRef idx="1">
+          <a:schemeClr val="accent1"/>
+        </a:effectRef>
+        <a:fontRef idx="minor">
+          <a:schemeClr val="tx1"/>
+        </a:fontRef>
+      </a:style>
+    </a:lnDef>
+  </a:objectDefaults>
+  <a:extraClrSchemeLst/>
+  <a:extLst>
+    <a:ext uri="{05A4C25C-085E-4340-85A3-A5531E510DB2}">
+      <thm15:themeFamily xmlns:thm15="http://schemas.microsoft.com/office/thememl/2012/main" name="Office Theme" id="{2E142A2C-CD16-42D6-873A-C26D2A0506FA}" vid="{1BDDFF52-6CD6-40A5-AB3C-68EB2F1E4D0A}"/>
+    </a:ext>
+  </a:extLst>
+</a:theme>
 </file>